--- a/sunumlar/6-sinif-unite2-kelime-islemci-DETAYLI.pptx
+++ b/sunumlar/6-sinif-unite2-kelime-islemci-DETAYLI.pptx
@@ -115,6 +115,1732 @@
     </a:lvl9pPr>
   </p:defaultTextStyle>
 </p:presentation>
+</file>
+
+<file path=ppt/notesMasters/notesMaster1.xml><?xml version="1.0" encoding="utf-8"?>
+<p:notesMaster xmlns:a="http://schemas.openxmlformats.org/drawingml/2006/main" xmlns:p="http://schemas.openxmlformats.org/presentationml/2006/main" xmlns:r="http://schemas.openxmlformats.org/officeDocument/2006/relationships">
+  <p:cSld>
+    <p:bg>
+      <p:bgRef idx="1001">
+        <a:schemeClr val="bg1"/>
+      </p:bgRef>
+    </p:bg>
+    <p:spTree>
+      <p:nvGrpSpPr>
+        <p:cNvPr id="1" name=""/>
+        <p:cNvGrpSpPr/>
+        <p:nvPr/>
+      </p:nvGrpSpPr>
+      <p:grpSpPr>
+        <a:xfrm>
+          <a:off x="0" y="0"/>
+          <a:ext cx="0" cy="0"/>
+          <a:chOff x="0" y="0"/>
+          <a:chExt cx="0" cy="0"/>
+        </a:xfrm>
+      </p:grpSpPr>
+      <p:sp>
+        <p:nvSpPr>
+          <p:cNvPr id="2" name="Header Placeholder 1"/>
+          <p:cNvSpPr>
+            <a:spLocks noGrp="1"/>
+          </p:cNvSpPr>
+          <p:nvPr>
+            <p:ph type="hdr" sz="quarter"/>
+          </p:nvPr>
+        </p:nvSpPr>
+        <p:spPr>
+          <a:xfrm>
+            <a:off x="0" y="0"/>
+            <a:ext cx="2971800" cy="457200"/>
+          </a:xfrm>
+          <a:prstGeom prst="rect">
+            <a:avLst/>
+          </a:prstGeom>
+        </p:spPr>
+        <p:txBody>
+          <a:bodyPr vert="horz" lIns="91440" tIns="45720" rIns="91440" bIns="45720" rtlCol="0"/>
+          <a:lstStyle>
+            <a:lvl1pPr algn="l">
+              <a:defRPr sz="1200"/>
+            </a:lvl1pPr>
+          </a:lstStyle>
+          <a:p>
+            <a:endParaRPr lang="en-US"/>
+          </a:p>
+        </p:txBody>
+      </p:sp>
+      <p:sp>
+        <p:nvSpPr>
+          <p:cNvPr id="3" name="Date Placeholder 2"/>
+          <p:cNvSpPr>
+            <a:spLocks noGrp="1"/>
+          </p:cNvSpPr>
+          <p:nvPr>
+            <p:ph type="dt" idx="1"/>
+          </p:nvPr>
+        </p:nvSpPr>
+        <p:spPr>
+          <a:xfrm>
+            <a:off x="3884613" y="0"/>
+            <a:ext cx="2971800" cy="457200"/>
+          </a:xfrm>
+          <a:prstGeom prst="rect">
+            <a:avLst/>
+          </a:prstGeom>
+        </p:spPr>
+        <p:txBody>
+          <a:bodyPr vert="horz" lIns="91440" tIns="45720" rIns="91440" bIns="45720" rtlCol="0"/>
+          <a:lstStyle>
+            <a:lvl1pPr algn="r">
+              <a:defRPr sz="1200"/>
+            </a:lvl1pPr>
+          </a:lstStyle>
+          <a:p>
+            <a:fld id="{0F89C1C7-3DCD-1040-A9CF-14679D8B5DDD}" type="datetimeFigureOut">
+              <a:rPr lang="en-US" smtClean="0"/>
+              <a:t>10/17/16</a:t>
+            </a:fld>
+            <a:endParaRPr lang="en-US"/>
+          </a:p>
+        </p:txBody>
+      </p:sp>
+      <p:sp>
+        <p:nvSpPr>
+          <p:cNvPr id="4" name="Slide Image Placeholder 3"/>
+          <p:cNvSpPr>
+            <a:spLocks noGrp="1" noRot="1" noChangeAspect="1"/>
+          </p:cNvSpPr>
+          <p:nvPr>
+            <p:ph type="sldImg" idx="2"/>
+          </p:nvPr>
+        </p:nvSpPr>
+        <p:spPr>
+          <a:xfrm>
+            <a:off x="1143000" y="685800"/>
+            <a:ext cx="4572000" cy="3429000"/>
+          </a:xfrm>
+          <a:prstGeom prst="rect">
+            <a:avLst/>
+          </a:prstGeom>
+          <a:noFill/>
+          <a:ln w="12700">
+            <a:solidFill>
+              <a:prstClr val="black"/>
+            </a:solidFill>
+          </a:ln>
+        </p:spPr>
+        <p:txBody>
+          <a:bodyPr vert="horz" lIns="91440" tIns="45720" rIns="91440" bIns="45720" rtlCol="0" anchor="ctr"/>
+          <a:lstStyle/>
+          <a:p>
+            <a:endParaRPr lang="en-US"/>
+          </a:p>
+        </p:txBody>
+      </p:sp>
+      <p:sp>
+        <p:nvSpPr>
+          <p:cNvPr id="5" name="Notes Placeholder 4"/>
+          <p:cNvSpPr>
+            <a:spLocks noGrp="1"/>
+          </p:cNvSpPr>
+          <p:nvPr>
+            <p:ph type="body" sz="quarter" idx="3"/>
+          </p:nvPr>
+        </p:nvSpPr>
+        <p:spPr>
+          <a:xfrm>
+            <a:off x="685800" y="4343400"/>
+            <a:ext cx="5486400" cy="4114800"/>
+          </a:xfrm>
+          <a:prstGeom prst="rect">
+            <a:avLst/>
+          </a:prstGeom>
+        </p:spPr>
+        <p:txBody>
+          <a:bodyPr vert="horz" lIns="91440" tIns="45720" rIns="91440" bIns="45720" rtlCol="0"/>
+          <a:lstStyle/>
+          <a:p>
+            <a:pPr lvl="0"/>
+            <a:r>
+              <a:rPr lang="en-US" smtClean="0"/>
+              <a:t>Click to edit Master text styles</a:t>
+            </a:r>
+          </a:p>
+          <a:p>
+            <a:pPr lvl="1"/>
+            <a:r>
+              <a:rPr lang="en-US" smtClean="0"/>
+              <a:t>Second level</a:t>
+            </a:r>
+          </a:p>
+          <a:p>
+            <a:pPr lvl="2"/>
+            <a:r>
+              <a:rPr lang="en-US" smtClean="0"/>
+              <a:t>Third level</a:t>
+            </a:r>
+          </a:p>
+          <a:p>
+            <a:pPr lvl="3"/>
+            <a:r>
+              <a:rPr lang="en-US" smtClean="0"/>
+              <a:t>Fourth level</a:t>
+            </a:r>
+          </a:p>
+          <a:p>
+            <a:pPr lvl="4"/>
+            <a:r>
+              <a:rPr lang="en-US" smtClean="0"/>
+              <a:t>Fifth level</a:t>
+            </a:r>
+            <a:endParaRPr lang="en-US"/>
+          </a:p>
+        </p:txBody>
+      </p:sp>
+      <p:sp>
+        <p:nvSpPr>
+          <p:cNvPr id="6" name="Footer Placeholder 5"/>
+          <p:cNvSpPr>
+            <a:spLocks noGrp="1"/>
+          </p:cNvSpPr>
+          <p:nvPr>
+            <p:ph type="ftr" sz="quarter" idx="4"/>
+          </p:nvPr>
+        </p:nvSpPr>
+        <p:spPr>
+          <a:xfrm>
+            <a:off x="0" y="8685213"/>
+            <a:ext cx="2971800" cy="457200"/>
+          </a:xfrm>
+          <a:prstGeom prst="rect">
+            <a:avLst/>
+          </a:prstGeom>
+        </p:spPr>
+        <p:txBody>
+          <a:bodyPr vert="horz" lIns="91440" tIns="45720" rIns="91440" bIns="45720" rtlCol="0" anchor="b"/>
+          <a:lstStyle>
+            <a:lvl1pPr algn="l">
+              <a:defRPr sz="1200"/>
+            </a:lvl1pPr>
+          </a:lstStyle>
+          <a:p>
+            <a:endParaRPr lang="en-US"/>
+          </a:p>
+        </p:txBody>
+      </p:sp>
+      <p:sp>
+        <p:nvSpPr>
+          <p:cNvPr id="7" name="Slide Number Placeholder 6"/>
+          <p:cNvSpPr>
+            <a:spLocks noGrp="1"/>
+          </p:cNvSpPr>
+          <p:nvPr>
+            <p:ph type="sldNum" sz="quarter" idx="5"/>
+          </p:nvPr>
+        </p:nvSpPr>
+        <p:spPr>
+          <a:xfrm>
+            <a:off x="3884613" y="8685213"/>
+            <a:ext cx="2971800" cy="457200"/>
+          </a:xfrm>
+          <a:prstGeom prst="rect">
+            <a:avLst/>
+          </a:prstGeom>
+        </p:spPr>
+        <p:txBody>
+          <a:bodyPr vert="horz" lIns="91440" tIns="45720" rIns="91440" bIns="45720" rtlCol="0" anchor="b"/>
+          <a:lstStyle>
+            <a:lvl1pPr algn="r">
+              <a:defRPr sz="1200"/>
+            </a:lvl1pPr>
+          </a:lstStyle>
+          <a:p>
+            <a:fld id="{BB5E49A5-4136-284D-997B-48E1D791AD67}" type="slidenum">
+              <a:rPr lang="en-US" smtClean="0"/>
+              <a:t>‹#›</a:t>
+            </a:fld>
+            <a:endParaRPr lang="en-US"/>
+          </a:p>
+        </p:txBody>
+      </p:sp>
+    </p:spTree>
+    <p:extLst>
+      <p:ext uri="{BB962C8B-B14F-4D97-AF65-F5344CB8AC3E}">
+        <p14:creationId xmlns:p14="http://schemas.microsoft.com/office/powerpoint/2010/main" val="2623252185"/>
+      </p:ext>
+    </p:extLst>
+  </p:cSld>
+  <p:clrMap bg1="lt1" tx1="dk1" bg2="lt2" tx2="dk2" accent1="accent1" accent2="accent2" accent3="accent3" accent4="accent4" accent5="accent5" accent6="accent6" hlink="hlink" folHlink="folHlink"/>
+  <p:notesStyle>
+    <a:lvl1pPr marL="0" algn="l" defTabSz="457200" rtl="0" eaLnBrk="1" latinLnBrk="0" hangingPunct="1">
+      <a:defRPr sz="1200" kern="1200">
+        <a:solidFill>
+          <a:schemeClr val="tx1"/>
+        </a:solidFill>
+        <a:latin typeface="+mn-lt"/>
+        <a:ea typeface="+mn-ea"/>
+        <a:cs typeface="+mn-cs"/>
+      </a:defRPr>
+    </a:lvl1pPr>
+    <a:lvl2pPr marL="457200" algn="l" defTabSz="457200" rtl="0" eaLnBrk="1" latinLnBrk="0" hangingPunct="1">
+      <a:defRPr sz="1200" kern="1200">
+        <a:solidFill>
+          <a:schemeClr val="tx1"/>
+        </a:solidFill>
+        <a:latin typeface="+mn-lt"/>
+        <a:ea typeface="+mn-ea"/>
+        <a:cs typeface="+mn-cs"/>
+      </a:defRPr>
+    </a:lvl2pPr>
+    <a:lvl3pPr marL="914400" algn="l" defTabSz="457200" rtl="0" eaLnBrk="1" latinLnBrk="0" hangingPunct="1">
+      <a:defRPr sz="1200" kern="1200">
+        <a:solidFill>
+          <a:schemeClr val="tx1"/>
+        </a:solidFill>
+        <a:latin typeface="+mn-lt"/>
+        <a:ea typeface="+mn-ea"/>
+        <a:cs typeface="+mn-cs"/>
+      </a:defRPr>
+    </a:lvl3pPr>
+    <a:lvl4pPr marL="1371600" algn="l" defTabSz="457200" rtl="0" eaLnBrk="1" latinLnBrk="0" hangingPunct="1">
+      <a:defRPr sz="1200" kern="1200">
+        <a:solidFill>
+          <a:schemeClr val="tx1"/>
+        </a:solidFill>
+        <a:latin typeface="+mn-lt"/>
+        <a:ea typeface="+mn-ea"/>
+        <a:cs typeface="+mn-cs"/>
+      </a:defRPr>
+    </a:lvl4pPr>
+    <a:lvl5pPr marL="1828800" algn="l" defTabSz="457200" rtl="0" eaLnBrk="1" latinLnBrk="0" hangingPunct="1">
+      <a:defRPr sz="1200" kern="1200">
+        <a:solidFill>
+          <a:schemeClr val="tx1"/>
+        </a:solidFill>
+        <a:latin typeface="+mn-lt"/>
+        <a:ea typeface="+mn-ea"/>
+        <a:cs typeface="+mn-cs"/>
+      </a:defRPr>
+    </a:lvl5pPr>
+    <a:lvl6pPr marL="2286000" algn="l" defTabSz="457200" rtl="0" eaLnBrk="1" latinLnBrk="0" hangingPunct="1">
+      <a:defRPr sz="1200" kern="1200">
+        <a:solidFill>
+          <a:schemeClr val="tx1"/>
+        </a:solidFill>
+        <a:latin typeface="+mn-lt"/>
+        <a:ea typeface="+mn-ea"/>
+        <a:cs typeface="+mn-cs"/>
+      </a:defRPr>
+    </a:lvl6pPr>
+    <a:lvl7pPr marL="2743200" algn="l" defTabSz="457200" rtl="0" eaLnBrk="1" latinLnBrk="0" hangingPunct="1">
+      <a:defRPr sz="1200" kern="1200">
+        <a:solidFill>
+          <a:schemeClr val="tx1"/>
+        </a:solidFill>
+        <a:latin typeface="+mn-lt"/>
+        <a:ea typeface="+mn-ea"/>
+        <a:cs typeface="+mn-cs"/>
+      </a:defRPr>
+    </a:lvl7pPr>
+    <a:lvl8pPr marL="3200400" algn="l" defTabSz="457200" rtl="0" eaLnBrk="1" latinLnBrk="0" hangingPunct="1">
+      <a:defRPr sz="1200" kern="1200">
+        <a:solidFill>
+          <a:schemeClr val="tx1"/>
+        </a:solidFill>
+        <a:latin typeface="+mn-lt"/>
+        <a:ea typeface="+mn-ea"/>
+        <a:cs typeface="+mn-cs"/>
+      </a:defRPr>
+    </a:lvl8pPr>
+    <a:lvl9pPr marL="3657600" algn="l" defTabSz="457200" rtl="0" eaLnBrk="1" latinLnBrk="0" hangingPunct="1">
+      <a:defRPr sz="1200" kern="1200">
+        <a:solidFill>
+          <a:schemeClr val="tx1"/>
+        </a:solidFill>
+        <a:latin typeface="+mn-lt"/>
+        <a:ea typeface="+mn-ea"/>
+        <a:cs typeface="+mn-cs"/>
+      </a:defRPr>
+    </a:lvl9pPr>
+  </p:notesStyle>
+</p:notesMaster>
+</file>
+
+<file path=ppt/notesSlides/notesSlide1.xml><?xml version="1.0" encoding="utf-8"?>
+<p:notes xmlns:a="http://schemas.openxmlformats.org/drawingml/2006/main" xmlns:p="http://schemas.openxmlformats.org/presentationml/2006/main" xmlns:r="http://schemas.openxmlformats.org/officeDocument/2006/relationships">
+  <p:cSld>
+    <p:spTree>
+      <p:nvGrpSpPr>
+        <p:cNvPr id="1" name=""/>
+        <p:cNvGrpSpPr/>
+        <p:nvPr/>
+      </p:nvGrpSpPr>
+      <p:grpSpPr>
+        <a:xfrm>
+          <a:off x="0" y="0"/>
+          <a:ext cx="0" cy="0"/>
+          <a:chOff x="0" y="0"/>
+          <a:chExt cx="0" cy="0"/>
+        </a:xfrm>
+      </p:grpSpPr>
+      <p:sp>
+        <p:nvSpPr>
+          <p:cNvPr id="2" name="Slide Image Placeholder 1"/>
+          <p:cNvSpPr>
+            <a:spLocks noGrp="1"/>
+          </p:cNvSpPr>
+          <p:nvPr>
+            <p:ph type="sldImg" idx="2"/>
+          </p:nvPr>
+        </p:nvSpPr>
+        <p:spPr/>
+      </p:sp>
+      <p:sp>
+        <p:nvSpPr>
+          <p:cNvPr id="3" name="Notes Placeholder 2"/>
+          <p:cNvSpPr>
+            <a:spLocks noGrp="1"/>
+          </p:cNvSpPr>
+          <p:nvPr>
+            <p:ph type="body" idx="3" sz="quarter"/>
+          </p:nvPr>
+        </p:nvSpPr>
+        <p:spPr/>
+        <p:txBody>
+          <a:bodyPr/>
+          <a:lstStyle/>
+          <a:p>
+            <a:r>
+              <a:t>🎨 GÖRSELLEŞTİRME ÖNERİLERİ:</a:t>
+            </a:r>
+          </a:p>
+          <a:p/>
+          <a:p>
+            <a:r>
+              <a:t>📸 Görsel: CPU, RAM ve anakart fotoğrafları</a:t>
+            </a:r>
+          </a:p>
+          <a:p>
+            <a:r>
+              <a:t>🎬 Video: Bilgisayar donanımı tanıtım videosu (1-2 dk)</a:t>
+            </a:r>
+          </a:p>
+          <a:p>
+            <a:r>
+              <a:t>💡 İnfografik: Bilgisayar bileşenleri şeması</a:t>
+            </a:r>
+          </a:p>
+          <a:p>
+            <a:r>
+              <a:t>📸 Görsel: Scratch arayüzü ekran görüntüsü</a:t>
+            </a:r>
+          </a:p>
+          <a:p>
+            <a:r>
+              <a:t>🎬 Video: Scratch ile basit oyun yapımı (3-5 dk)</a:t>
+            </a:r>
+          </a:p>
+          <a:p>
+            <a:r>
+              <a:t>💡 Ekran kaydı: Adım adım Scratch projesi</a:t>
+            </a:r>
+          </a:p>
+          <a:p>
+            <a:r>
+              <a:t>📸 Görsel: Koşullu yapılar akış diyagramı</a:t>
+            </a:r>
+          </a:p>
+          <a:p>
+            <a:r>
+              <a:t>🎬 Video: Koşullu ifadeler Scratch'te</a:t>
+            </a:r>
+          </a:p>
+        </p:txBody>
+      </p:sp>
+      <p:sp>
+        <p:nvSpPr>
+          <p:cNvPr id="4" name="Slide Number Placeholder 3"/>
+          <p:cNvSpPr>
+            <a:spLocks noGrp="1"/>
+          </p:cNvSpPr>
+          <p:nvPr>
+            <p:ph type="sldNum" idx="5" sz="quarter"/>
+          </p:nvPr>
+        </p:nvSpPr>
+        <p:spPr/>
+      </p:sp>
+    </p:spTree>
+  </p:cSld>
+  <p:clrMapOvr>
+    <a:masterClrMapping/>
+  </p:clrMapOvr>
+</p:notes>
+</file>
+
+<file path=ppt/notesSlides/notesSlide10.xml><?xml version="1.0" encoding="utf-8"?>
+<p:notes xmlns:a="http://schemas.openxmlformats.org/drawingml/2006/main" xmlns:p="http://schemas.openxmlformats.org/presentationml/2006/main" xmlns:r="http://schemas.openxmlformats.org/officeDocument/2006/relationships">
+  <p:cSld>
+    <p:spTree>
+      <p:nvGrpSpPr>
+        <p:cNvPr id="1" name=""/>
+        <p:cNvGrpSpPr/>
+        <p:nvPr/>
+      </p:nvGrpSpPr>
+      <p:grpSpPr>
+        <a:xfrm>
+          <a:off x="0" y="0"/>
+          <a:ext cx="0" cy="0"/>
+          <a:chOff x="0" y="0"/>
+          <a:chExt cx="0" cy="0"/>
+        </a:xfrm>
+      </p:grpSpPr>
+      <p:sp>
+        <p:nvSpPr>
+          <p:cNvPr id="2" name="Slide Image Placeholder 1"/>
+          <p:cNvSpPr>
+            <a:spLocks noGrp="1"/>
+          </p:cNvSpPr>
+          <p:nvPr>
+            <p:ph type="sldImg" idx="2"/>
+          </p:nvPr>
+        </p:nvSpPr>
+        <p:spPr/>
+      </p:sp>
+      <p:sp>
+        <p:nvSpPr>
+          <p:cNvPr id="3" name="Notes Placeholder 2"/>
+          <p:cNvSpPr>
+            <a:spLocks noGrp="1"/>
+          </p:cNvSpPr>
+          <p:nvPr>
+            <p:ph type="body" idx="3" sz="quarter"/>
+          </p:nvPr>
+        </p:nvSpPr>
+        <p:spPr/>
+        <p:txBody>
+          <a:bodyPr/>
+          <a:lstStyle/>
+          <a:p>
+            <a:r>
+              <a:t>🎨 GÖRSELLEŞTİRME ÖNERİLERİ:</a:t>
+            </a:r>
+          </a:p>
+          <a:p/>
+          <a:p>
+            <a:r>
+              <a:t>📸 Görsel: Temel tasarım prensipleri</a:t>
+            </a:r>
+          </a:p>
+          <a:p>
+            <a:r>
+              <a:t>🎬 Video: Dijital tasarıma giriş</a:t>
+            </a:r>
+          </a:p>
+          <a:p>
+            <a:r>
+              <a:t>💡 İnfografik: Renk teorisi ve uyumu</a:t>
+            </a:r>
+          </a:p>
+        </p:txBody>
+      </p:sp>
+      <p:sp>
+        <p:nvSpPr>
+          <p:cNvPr id="4" name="Slide Number Placeholder 3"/>
+          <p:cNvSpPr>
+            <a:spLocks noGrp="1"/>
+          </p:cNvSpPr>
+          <p:nvPr>
+            <p:ph type="sldNum" idx="5" sz="quarter"/>
+          </p:nvPr>
+        </p:nvSpPr>
+        <p:spPr/>
+      </p:sp>
+    </p:spTree>
+  </p:cSld>
+  <p:clrMapOvr>
+    <a:masterClrMapping/>
+  </p:clrMapOvr>
+</p:notes>
+</file>
+
+<file path=ppt/notesSlides/notesSlide11.xml><?xml version="1.0" encoding="utf-8"?>
+<p:notes xmlns:a="http://schemas.openxmlformats.org/drawingml/2006/main" xmlns:p="http://schemas.openxmlformats.org/presentationml/2006/main" xmlns:r="http://schemas.openxmlformats.org/officeDocument/2006/relationships">
+  <p:cSld>
+    <p:spTree>
+      <p:nvGrpSpPr>
+        <p:cNvPr id="1" name=""/>
+        <p:cNvGrpSpPr/>
+        <p:nvPr/>
+      </p:nvGrpSpPr>
+      <p:grpSpPr>
+        <a:xfrm>
+          <a:off x="0" y="0"/>
+          <a:ext cx="0" cy="0"/>
+          <a:chOff x="0" y="0"/>
+          <a:chExt cx="0" cy="0"/>
+        </a:xfrm>
+      </p:grpSpPr>
+      <p:sp>
+        <p:nvSpPr>
+          <p:cNvPr id="2" name="Slide Image Placeholder 1"/>
+          <p:cNvSpPr>
+            <a:spLocks noGrp="1"/>
+          </p:cNvSpPr>
+          <p:nvPr>
+            <p:ph type="sldImg" idx="2"/>
+          </p:nvPr>
+        </p:nvSpPr>
+        <p:spPr/>
+      </p:sp>
+      <p:sp>
+        <p:nvSpPr>
+          <p:cNvPr id="3" name="Notes Placeholder 2"/>
+          <p:cNvSpPr>
+            <a:spLocks noGrp="1"/>
+          </p:cNvSpPr>
+          <p:nvPr>
+            <p:ph type="body" idx="3" sz="quarter"/>
+          </p:nvPr>
+        </p:nvSpPr>
+        <p:spPr/>
+        <p:txBody>
+          <a:bodyPr/>
+          <a:lstStyle/>
+          <a:p>
+            <a:r>
+              <a:t>🎨 GÖRSELLEŞTİRME ÖNERİLERİ:</a:t>
+            </a:r>
+          </a:p>
+          <a:p/>
+          <a:p>
+            <a:r>
+              <a:t>📸 Görsel: CPU, RAM ve anakart fotoğrafları</a:t>
+            </a:r>
+          </a:p>
+          <a:p>
+            <a:r>
+              <a:t>🎬 Video: Bilgisayar donanımı tanıtım videosu (1-2 dk)</a:t>
+            </a:r>
+          </a:p>
+          <a:p>
+            <a:r>
+              <a:t>💡 İnfografik: Bilgisayar bileşenleri şeması</a:t>
+            </a:r>
+          </a:p>
+          <a:p>
+            <a:r>
+              <a:t>📸 Görsel: MS Word arayüz ekran görüntüsü</a:t>
+            </a:r>
+          </a:p>
+          <a:p>
+            <a:r>
+              <a:t>🎬 Video: Word temel özellikleri demo (2-3 dk)</a:t>
+            </a:r>
+          </a:p>
+          <a:p>
+            <a:r>
+              <a:t>💡 Ekran kaydı: Biçimlendirme araçları kullanımı</a:t>
+            </a:r>
+          </a:p>
+          <a:p>
+            <a:r>
+              <a:t>📸 Görsel: LAN ve WAN ağ topolojileri şeması</a:t>
+            </a:r>
+          </a:p>
+          <a:p>
+            <a:r>
+              <a:t>🎬 Video: İnternet nasıl çalışır? Animasyonlu anlatım</a:t>
+            </a:r>
+          </a:p>
+          <a:p>
+            <a:r>
+              <a:t>💡 İnfografik: Ev ağı kurulumu diyagramı</a:t>
+            </a:r>
+          </a:p>
+          <a:p>
+            <a:r>
+              <a:t>📸 Görsel: Scratch arayüzü ekran görüntüsü</a:t>
+            </a:r>
+          </a:p>
+          <a:p>
+            <a:r>
+              <a:t>🎬 Video: Scratch ile basit oyun yapımı (3-5 dk)</a:t>
+            </a:r>
+          </a:p>
+          <a:p>
+            <a:r>
+              <a:t>💡 Ekran kaydı: Adım adım Scratch projesi</a:t>
+            </a:r>
+          </a:p>
+          <a:p>
+            <a:r>
+              <a:t>📸 Görsel: Farklı grafik türleri örnekleri</a:t>
+            </a:r>
+          </a:p>
+          <a:p>
+            <a:r>
+              <a:t>🎬 Video: Veri görselleştirme önemi</a:t>
+            </a:r>
+          </a:p>
+          <a:p>
+            <a:r>
+              <a:t>💡 İnfografik: Grafik türleri ve kullanım alanları</a:t>
+            </a:r>
+          </a:p>
+          <a:p>
+            <a:r>
+              <a:t>📸 Görsel: Temel tasarım prensipleri</a:t>
+            </a:r>
+          </a:p>
+          <a:p>
+            <a:r>
+              <a:t>🎬 Video: Dijital tasarıma giriş</a:t>
+            </a:r>
+          </a:p>
+          <a:p>
+            <a:r>
+              <a:t>💡 İnfografik: Renk teorisi ve uyumu</a:t>
+            </a:r>
+          </a:p>
+        </p:txBody>
+      </p:sp>
+      <p:sp>
+        <p:nvSpPr>
+          <p:cNvPr id="4" name="Slide Number Placeholder 3"/>
+          <p:cNvSpPr>
+            <a:spLocks noGrp="1"/>
+          </p:cNvSpPr>
+          <p:nvPr>
+            <p:ph type="sldNum" idx="5" sz="quarter"/>
+          </p:nvPr>
+        </p:nvSpPr>
+        <p:spPr/>
+      </p:sp>
+    </p:spTree>
+  </p:cSld>
+  <p:clrMapOvr>
+    <a:masterClrMapping/>
+  </p:clrMapOvr>
+</p:notes>
+</file>
+
+<file path=ppt/notesSlides/notesSlide2.xml><?xml version="1.0" encoding="utf-8"?>
+<p:notes xmlns:a="http://schemas.openxmlformats.org/drawingml/2006/main" xmlns:p="http://schemas.openxmlformats.org/presentationml/2006/main" xmlns:r="http://schemas.openxmlformats.org/officeDocument/2006/relationships">
+  <p:cSld>
+    <p:spTree>
+      <p:nvGrpSpPr>
+        <p:cNvPr id="1" name=""/>
+        <p:cNvGrpSpPr/>
+        <p:nvPr/>
+      </p:nvGrpSpPr>
+      <p:grpSpPr>
+        <a:xfrm>
+          <a:off x="0" y="0"/>
+          <a:ext cx="0" cy="0"/>
+          <a:chOff x="0" y="0"/>
+          <a:chExt cx="0" cy="0"/>
+        </a:xfrm>
+      </p:grpSpPr>
+      <p:sp>
+        <p:nvSpPr>
+          <p:cNvPr id="2" name="Slide Image Placeholder 1"/>
+          <p:cNvSpPr>
+            <a:spLocks noGrp="1"/>
+          </p:cNvSpPr>
+          <p:nvPr>
+            <p:ph type="sldImg" idx="2"/>
+          </p:nvPr>
+        </p:nvSpPr>
+        <p:spPr/>
+      </p:sp>
+      <p:sp>
+        <p:nvSpPr>
+          <p:cNvPr id="3" name="Notes Placeholder 2"/>
+          <p:cNvSpPr>
+            <a:spLocks noGrp="1"/>
+          </p:cNvSpPr>
+          <p:nvPr>
+            <p:ph type="body" idx="3" sz="quarter"/>
+          </p:nvPr>
+        </p:nvSpPr>
+        <p:spPr/>
+        <p:txBody>
+          <a:bodyPr/>
+          <a:lstStyle/>
+          <a:p>
+            <a:r>
+              <a:t>🎨 GÖRSELLEŞTİRME ÖNERİLERİ:</a:t>
+            </a:r>
+          </a:p>
+          <a:p/>
+          <a:p>
+            <a:r>
+              <a:t>📸 Görsel: CPU, RAM ve anakart fotoğrafları</a:t>
+            </a:r>
+          </a:p>
+          <a:p>
+            <a:r>
+              <a:t>🎬 Video: Bilgisayar donanımı tanıtım videosu (1-2 dk)</a:t>
+            </a:r>
+          </a:p>
+          <a:p>
+            <a:r>
+              <a:t>💡 İnfografik: Bilgisayar bileşenleri şeması</a:t>
+            </a:r>
+          </a:p>
+          <a:p>
+            <a:r>
+              <a:t>📸 Görsel: MS Word arayüz ekran görüntüsü</a:t>
+            </a:r>
+          </a:p>
+          <a:p>
+            <a:r>
+              <a:t>🎬 Video: Word temel özellikleri demo (2-3 dk)</a:t>
+            </a:r>
+          </a:p>
+          <a:p>
+            <a:r>
+              <a:t>💡 Ekran kaydı: Biçimlendirme araçları kullanımı</a:t>
+            </a:r>
+          </a:p>
+          <a:p>
+            <a:r>
+              <a:t>📸 Görsel: LAN ve WAN ağ topolojileri şeması</a:t>
+            </a:r>
+          </a:p>
+          <a:p>
+            <a:r>
+              <a:t>🎬 Video: İnternet nasıl çalışır? Animasyonlu anlatım</a:t>
+            </a:r>
+          </a:p>
+          <a:p>
+            <a:r>
+              <a:t>💡 İnfografik: Ev ağı kurulumu diyagramı</a:t>
+            </a:r>
+          </a:p>
+          <a:p>
+            <a:r>
+              <a:t>📸 Görsel: Scratch arayüzü ekran görüntüsü</a:t>
+            </a:r>
+          </a:p>
+          <a:p>
+            <a:r>
+              <a:t>🎬 Video: Scratch ile basit oyun yapımı (3-5 dk)</a:t>
+            </a:r>
+          </a:p>
+          <a:p>
+            <a:r>
+              <a:t>💡 Ekran kaydı: Adım adım Scratch projesi</a:t>
+            </a:r>
+          </a:p>
+          <a:p>
+            <a:r>
+              <a:t>📸 Görsel: Farklı grafik türleri örnekleri</a:t>
+            </a:r>
+          </a:p>
+          <a:p>
+            <a:r>
+              <a:t>🎬 Video: Veri görselleştirme önemi</a:t>
+            </a:r>
+          </a:p>
+          <a:p>
+            <a:r>
+              <a:t>💡 İnfografik: Grafik türleri ve kullanım alanları</a:t>
+            </a:r>
+          </a:p>
+        </p:txBody>
+      </p:sp>
+      <p:sp>
+        <p:nvSpPr>
+          <p:cNvPr id="4" name="Slide Number Placeholder 3"/>
+          <p:cNvSpPr>
+            <a:spLocks noGrp="1"/>
+          </p:cNvSpPr>
+          <p:nvPr>
+            <p:ph type="sldNum" idx="5" sz="quarter"/>
+          </p:nvPr>
+        </p:nvSpPr>
+        <p:spPr/>
+      </p:sp>
+    </p:spTree>
+  </p:cSld>
+  <p:clrMapOvr>
+    <a:masterClrMapping/>
+  </p:clrMapOvr>
+</p:notes>
+</file>
+
+<file path=ppt/notesSlides/notesSlide3.xml><?xml version="1.0" encoding="utf-8"?>
+<p:notes xmlns:a="http://schemas.openxmlformats.org/drawingml/2006/main" xmlns:p="http://schemas.openxmlformats.org/presentationml/2006/main" xmlns:r="http://schemas.openxmlformats.org/officeDocument/2006/relationships">
+  <p:cSld>
+    <p:spTree>
+      <p:nvGrpSpPr>
+        <p:cNvPr id="1" name=""/>
+        <p:cNvGrpSpPr/>
+        <p:nvPr/>
+      </p:nvGrpSpPr>
+      <p:grpSpPr>
+        <a:xfrm>
+          <a:off x="0" y="0"/>
+          <a:ext cx="0" cy="0"/>
+          <a:chOff x="0" y="0"/>
+          <a:chExt cx="0" cy="0"/>
+        </a:xfrm>
+      </p:grpSpPr>
+      <p:sp>
+        <p:nvSpPr>
+          <p:cNvPr id="2" name="Slide Image Placeholder 1"/>
+          <p:cNvSpPr>
+            <a:spLocks noGrp="1"/>
+          </p:cNvSpPr>
+          <p:nvPr>
+            <p:ph type="sldImg" idx="2"/>
+          </p:nvPr>
+        </p:nvSpPr>
+        <p:spPr/>
+      </p:sp>
+      <p:sp>
+        <p:nvSpPr>
+          <p:cNvPr id="3" name="Notes Placeholder 2"/>
+          <p:cNvSpPr>
+            <a:spLocks noGrp="1"/>
+          </p:cNvSpPr>
+          <p:nvPr>
+            <p:ph type="body" idx="3" sz="quarter"/>
+          </p:nvPr>
+        </p:nvSpPr>
+        <p:spPr/>
+        <p:txBody>
+          <a:bodyPr/>
+          <a:lstStyle/>
+          <a:p>
+            <a:r>
+              <a:t>🎨 GÖRSELLEŞTİRME ÖNERİLERİ:</a:t>
+            </a:r>
+          </a:p>
+          <a:p/>
+          <a:p>
+            <a:r>
+              <a:t>📸 Görsel: CPU, RAM ve anakart fotoğrafları</a:t>
+            </a:r>
+          </a:p>
+          <a:p>
+            <a:r>
+              <a:t>🎬 Video: Bilgisayar donanımı tanıtım videosu (1-2 dk)</a:t>
+            </a:r>
+          </a:p>
+          <a:p>
+            <a:r>
+              <a:t>💡 İnfografik: Bilgisayar bileşenleri şeması</a:t>
+            </a:r>
+          </a:p>
+          <a:p>
+            <a:r>
+              <a:t>📸 Görsel: MS Word arayüz ekran görüntüsü</a:t>
+            </a:r>
+          </a:p>
+          <a:p>
+            <a:r>
+              <a:t>🎬 Video: Word temel özellikleri demo (2-3 dk)</a:t>
+            </a:r>
+          </a:p>
+          <a:p>
+            <a:r>
+              <a:t>💡 Ekran kaydı: Biçimlendirme araçları kullanımı</a:t>
+            </a:r>
+          </a:p>
+          <a:p>
+            <a:r>
+              <a:t>📸 Görsel: LAN ve WAN ağ topolojileri şeması</a:t>
+            </a:r>
+          </a:p>
+          <a:p>
+            <a:r>
+              <a:t>🎬 Video: İnternet nasıl çalışır? Animasyonlu anlatım</a:t>
+            </a:r>
+          </a:p>
+          <a:p>
+            <a:r>
+              <a:t>💡 İnfografik: Ev ağı kurulumu diyagramı</a:t>
+            </a:r>
+          </a:p>
+        </p:txBody>
+      </p:sp>
+      <p:sp>
+        <p:nvSpPr>
+          <p:cNvPr id="4" name="Slide Number Placeholder 3"/>
+          <p:cNvSpPr>
+            <a:spLocks noGrp="1"/>
+          </p:cNvSpPr>
+          <p:nvPr>
+            <p:ph type="sldNum" idx="5" sz="quarter"/>
+          </p:nvPr>
+        </p:nvSpPr>
+        <p:spPr/>
+      </p:sp>
+    </p:spTree>
+  </p:cSld>
+  <p:clrMapOvr>
+    <a:masterClrMapping/>
+  </p:clrMapOvr>
+</p:notes>
+</file>
+
+<file path=ppt/notesSlides/notesSlide4.xml><?xml version="1.0" encoding="utf-8"?>
+<p:notes xmlns:a="http://schemas.openxmlformats.org/drawingml/2006/main" xmlns:p="http://schemas.openxmlformats.org/presentationml/2006/main" xmlns:r="http://schemas.openxmlformats.org/officeDocument/2006/relationships">
+  <p:cSld>
+    <p:spTree>
+      <p:nvGrpSpPr>
+        <p:cNvPr id="1" name=""/>
+        <p:cNvGrpSpPr/>
+        <p:nvPr/>
+      </p:nvGrpSpPr>
+      <p:grpSpPr>
+        <a:xfrm>
+          <a:off x="0" y="0"/>
+          <a:ext cx="0" cy="0"/>
+          <a:chOff x="0" y="0"/>
+          <a:chExt cx="0" cy="0"/>
+        </a:xfrm>
+      </p:grpSpPr>
+      <p:sp>
+        <p:nvSpPr>
+          <p:cNvPr id="2" name="Slide Image Placeholder 1"/>
+          <p:cNvSpPr>
+            <a:spLocks noGrp="1"/>
+          </p:cNvSpPr>
+          <p:nvPr>
+            <p:ph type="sldImg" idx="2"/>
+          </p:nvPr>
+        </p:nvSpPr>
+        <p:spPr/>
+      </p:sp>
+      <p:sp>
+        <p:nvSpPr>
+          <p:cNvPr id="3" name="Notes Placeholder 2"/>
+          <p:cNvSpPr>
+            <a:spLocks noGrp="1"/>
+          </p:cNvSpPr>
+          <p:nvPr>
+            <p:ph type="body" idx="3" sz="quarter"/>
+          </p:nvPr>
+        </p:nvSpPr>
+        <p:spPr/>
+        <p:txBody>
+          <a:bodyPr/>
+          <a:lstStyle/>
+          <a:p>
+            <a:r>
+              <a:t>🎨 GÖRSELLEŞTİRME ÖNERİLERİ:</a:t>
+            </a:r>
+          </a:p>
+          <a:p/>
+          <a:p>
+            <a:r>
+              <a:t>📸 Görsel: Temel tasarım prensipleri</a:t>
+            </a:r>
+          </a:p>
+          <a:p>
+            <a:r>
+              <a:t>🎬 Video: Dijital tasarıma giriş</a:t>
+            </a:r>
+          </a:p>
+          <a:p>
+            <a:r>
+              <a:t>💡 İnfografik: Renk teorisi ve uyumu</a:t>
+            </a:r>
+          </a:p>
+        </p:txBody>
+      </p:sp>
+      <p:sp>
+        <p:nvSpPr>
+          <p:cNvPr id="4" name="Slide Number Placeholder 3"/>
+          <p:cNvSpPr>
+            <a:spLocks noGrp="1"/>
+          </p:cNvSpPr>
+          <p:nvPr>
+            <p:ph type="sldNum" idx="5" sz="quarter"/>
+          </p:nvPr>
+        </p:nvSpPr>
+        <p:spPr/>
+      </p:sp>
+    </p:spTree>
+  </p:cSld>
+  <p:clrMapOvr>
+    <a:masterClrMapping/>
+  </p:clrMapOvr>
+</p:notes>
+</file>
+
+<file path=ppt/notesSlides/notesSlide5.xml><?xml version="1.0" encoding="utf-8"?>
+<p:notes xmlns:a="http://schemas.openxmlformats.org/drawingml/2006/main" xmlns:p="http://schemas.openxmlformats.org/presentationml/2006/main" xmlns:r="http://schemas.openxmlformats.org/officeDocument/2006/relationships">
+  <p:cSld>
+    <p:spTree>
+      <p:nvGrpSpPr>
+        <p:cNvPr id="1" name=""/>
+        <p:cNvGrpSpPr/>
+        <p:nvPr/>
+      </p:nvGrpSpPr>
+      <p:grpSpPr>
+        <a:xfrm>
+          <a:off x="0" y="0"/>
+          <a:ext cx="0" cy="0"/>
+          <a:chOff x="0" y="0"/>
+          <a:chExt cx="0" cy="0"/>
+        </a:xfrm>
+      </p:grpSpPr>
+      <p:sp>
+        <p:nvSpPr>
+          <p:cNvPr id="2" name="Slide Image Placeholder 1"/>
+          <p:cNvSpPr>
+            <a:spLocks noGrp="1"/>
+          </p:cNvSpPr>
+          <p:nvPr>
+            <p:ph type="sldImg" idx="2"/>
+          </p:nvPr>
+        </p:nvSpPr>
+        <p:spPr/>
+      </p:sp>
+      <p:sp>
+        <p:nvSpPr>
+          <p:cNvPr id="3" name="Notes Placeholder 2"/>
+          <p:cNvSpPr>
+            <a:spLocks noGrp="1"/>
+          </p:cNvSpPr>
+          <p:nvPr>
+            <p:ph type="body" idx="3" sz="quarter"/>
+          </p:nvPr>
+        </p:nvSpPr>
+        <p:spPr/>
+        <p:txBody>
+          <a:bodyPr/>
+          <a:lstStyle/>
+          <a:p>
+            <a:r>
+              <a:t>🎨 GÖRSELLEŞTİRME ÖNERİLERİ:</a:t>
+            </a:r>
+          </a:p>
+          <a:p/>
+          <a:p>
+            <a:r>
+              <a:t>📸 Görsel: LAN ve WAN ağ topolojileri şeması</a:t>
+            </a:r>
+          </a:p>
+          <a:p>
+            <a:r>
+              <a:t>🎬 Video: İnternet nasıl çalışır? Animasyonlu anlatım</a:t>
+            </a:r>
+          </a:p>
+          <a:p>
+            <a:r>
+              <a:t>💡 İnfografik: Ev ağı kurulumu diyagramı</a:t>
+            </a:r>
+          </a:p>
+          <a:p>
+            <a:r>
+              <a:t>📸 Görsel: Koşullu yapılar akış diyagramı</a:t>
+            </a:r>
+          </a:p>
+          <a:p>
+            <a:r>
+              <a:t>🎬 Video: Koşullu ifadeler Scratch'te</a:t>
+            </a:r>
+          </a:p>
+        </p:txBody>
+      </p:sp>
+      <p:sp>
+        <p:nvSpPr>
+          <p:cNvPr id="4" name="Slide Number Placeholder 3"/>
+          <p:cNvSpPr>
+            <a:spLocks noGrp="1"/>
+          </p:cNvSpPr>
+          <p:nvPr>
+            <p:ph type="sldNum" idx="5" sz="quarter"/>
+          </p:nvPr>
+        </p:nvSpPr>
+        <p:spPr/>
+      </p:sp>
+    </p:spTree>
+  </p:cSld>
+  <p:clrMapOvr>
+    <a:masterClrMapping/>
+  </p:clrMapOvr>
+</p:notes>
+</file>
+
+<file path=ppt/notesSlides/notesSlide6.xml><?xml version="1.0" encoding="utf-8"?>
+<p:notes xmlns:a="http://schemas.openxmlformats.org/drawingml/2006/main" xmlns:p="http://schemas.openxmlformats.org/presentationml/2006/main" xmlns:r="http://schemas.openxmlformats.org/officeDocument/2006/relationships">
+  <p:cSld>
+    <p:spTree>
+      <p:nvGrpSpPr>
+        <p:cNvPr id="1" name=""/>
+        <p:cNvGrpSpPr/>
+        <p:nvPr/>
+      </p:nvGrpSpPr>
+      <p:grpSpPr>
+        <a:xfrm>
+          <a:off x="0" y="0"/>
+          <a:ext cx="0" cy="0"/>
+          <a:chOff x="0" y="0"/>
+          <a:chExt cx="0" cy="0"/>
+        </a:xfrm>
+      </p:grpSpPr>
+      <p:sp>
+        <p:nvSpPr>
+          <p:cNvPr id="2" name="Slide Image Placeholder 1"/>
+          <p:cNvSpPr>
+            <a:spLocks noGrp="1"/>
+          </p:cNvSpPr>
+          <p:nvPr>
+            <p:ph type="sldImg" idx="2"/>
+          </p:nvPr>
+        </p:nvSpPr>
+        <p:spPr/>
+      </p:sp>
+      <p:sp>
+        <p:nvSpPr>
+          <p:cNvPr id="3" name="Notes Placeholder 2"/>
+          <p:cNvSpPr>
+            <a:spLocks noGrp="1"/>
+          </p:cNvSpPr>
+          <p:nvPr>
+            <p:ph type="body" idx="3" sz="quarter"/>
+          </p:nvPr>
+        </p:nvSpPr>
+        <p:spPr/>
+        <p:txBody>
+          <a:bodyPr/>
+          <a:lstStyle/>
+          <a:p>
+            <a:r>
+              <a:t>🎨 GÖRSELLEŞTİRME ÖNERİLERİ:</a:t>
+            </a:r>
+          </a:p>
+          <a:p/>
+          <a:p>
+            <a:r>
+              <a:t>📸 Görsel: CPU, RAM ve anakart fotoğrafları</a:t>
+            </a:r>
+          </a:p>
+          <a:p>
+            <a:r>
+              <a:t>🎬 Video: Bilgisayar donanımı tanıtım videosu (1-2 dk)</a:t>
+            </a:r>
+          </a:p>
+          <a:p>
+            <a:r>
+              <a:t>💡 İnfografik: Bilgisayar bileşenleri şeması</a:t>
+            </a:r>
+          </a:p>
+          <a:p>
+            <a:r>
+              <a:t>📸 Görsel: LAN ve WAN ağ topolojileri şeması</a:t>
+            </a:r>
+          </a:p>
+          <a:p>
+            <a:r>
+              <a:t>🎬 Video: İnternet nasıl çalışır? Animasyonlu anlatım</a:t>
+            </a:r>
+          </a:p>
+          <a:p>
+            <a:r>
+              <a:t>💡 İnfografik: Ev ağı kurulumu diyagramı</a:t>
+            </a:r>
+          </a:p>
+          <a:p>
+            <a:r>
+              <a:t>📸 Görsel: Telif hakları sembolleri (©, ®, ™)</a:t>
+            </a:r>
+          </a:p>
+          <a:p>
+            <a:r>
+              <a:t>🎬 Video: Dijital etik ve telif hakları</a:t>
+            </a:r>
+          </a:p>
+          <a:p>
+            <a:r>
+              <a:t>💡 İnfografik: Lisans türleri karşılaştırması</a:t>
+            </a:r>
+          </a:p>
+          <a:p>
+            <a:r>
+              <a:t>📸 Görsel: Yapay zeka uygulama örnekleri (Siri, Alexa, ChatGPT)</a:t>
+            </a:r>
+          </a:p>
+          <a:p>
+            <a:r>
+              <a:t>🎬 Video: Yapay zeka nedir? Çocuklar için anlatım</a:t>
+            </a:r>
+          </a:p>
+          <a:p>
+            <a:r>
+              <a:t>💡 İnfografik: AI kullanım alanları</a:t>
+            </a:r>
+          </a:p>
+          <a:p>
+            <a:r>
+              <a:t>📸 Görsel: Akış şeması örnekleri</a:t>
+            </a:r>
+          </a:p>
+          <a:p>
+            <a:r>
+              <a:t>🎬 Video: Algoritma nedir? Günlük hayattan örnekler</a:t>
+            </a:r>
+          </a:p>
+          <a:p>
+            <a:r>
+              <a:t>💡 İnfografik: Akış şeması sembolleri</a:t>
+            </a:r>
+          </a:p>
+          <a:p>
+            <a:r>
+              <a:t>📸 Görsel: Koşullu yapılar akış diyagramı</a:t>
+            </a:r>
+          </a:p>
+          <a:p>
+            <a:r>
+              <a:t>🎬 Video: Koşullu ifadeler Scratch'te</a:t>
+            </a:r>
+          </a:p>
+          <a:p>
+            <a:r>
+              <a:t>📸 Görsel: Farklı grafik türleri örnekleri</a:t>
+            </a:r>
+          </a:p>
+          <a:p>
+            <a:r>
+              <a:t>🎬 Video: Veri görselleştirme önemi</a:t>
+            </a:r>
+          </a:p>
+          <a:p>
+            <a:r>
+              <a:t>💡 İnfografik: Grafik türleri ve kullanım alanları</a:t>
+            </a:r>
+          </a:p>
+          <a:p>
+            <a:r>
+              <a:t>📸 Görsel: Paint araçları ekran görüntüsü</a:t>
+            </a:r>
+          </a:p>
+          <a:p>
+            <a:r>
+              <a:t>🎬 Video: Paint ile basit çizim teknikleri</a:t>
+            </a:r>
+          </a:p>
+          <a:p>
+            <a:r>
+              <a:t>📸 Görsel: Temel tasarım prensipleri</a:t>
+            </a:r>
+          </a:p>
+          <a:p>
+            <a:r>
+              <a:t>🎬 Video: Dijital tasarıma giriş</a:t>
+            </a:r>
+          </a:p>
+          <a:p>
+            <a:r>
+              <a:t>💡 İnfografik: Renk teorisi ve uyumu</a:t>
+            </a:r>
+          </a:p>
+        </p:txBody>
+      </p:sp>
+      <p:sp>
+        <p:nvSpPr>
+          <p:cNvPr id="4" name="Slide Number Placeholder 3"/>
+          <p:cNvSpPr>
+            <a:spLocks noGrp="1"/>
+          </p:cNvSpPr>
+          <p:nvPr>
+            <p:ph type="sldNum" idx="5" sz="quarter"/>
+          </p:nvPr>
+        </p:nvSpPr>
+        <p:spPr/>
+      </p:sp>
+    </p:spTree>
+  </p:cSld>
+  <p:clrMapOvr>
+    <a:masterClrMapping/>
+  </p:clrMapOvr>
+</p:notes>
+</file>
+
+<file path=ppt/notesSlides/notesSlide7.xml><?xml version="1.0" encoding="utf-8"?>
+<p:notes xmlns:a="http://schemas.openxmlformats.org/drawingml/2006/main" xmlns:p="http://schemas.openxmlformats.org/presentationml/2006/main" xmlns:r="http://schemas.openxmlformats.org/officeDocument/2006/relationships">
+  <p:cSld>
+    <p:spTree>
+      <p:nvGrpSpPr>
+        <p:cNvPr id="1" name=""/>
+        <p:cNvGrpSpPr/>
+        <p:nvPr/>
+      </p:nvGrpSpPr>
+      <p:grpSpPr>
+        <a:xfrm>
+          <a:off x="0" y="0"/>
+          <a:ext cx="0" cy="0"/>
+          <a:chOff x="0" y="0"/>
+          <a:chExt cx="0" cy="0"/>
+        </a:xfrm>
+      </p:grpSpPr>
+      <p:sp>
+        <p:nvSpPr>
+          <p:cNvPr id="2" name="Slide Image Placeholder 1"/>
+          <p:cNvSpPr>
+            <a:spLocks noGrp="1"/>
+          </p:cNvSpPr>
+          <p:nvPr>
+            <p:ph type="sldImg" idx="2"/>
+          </p:nvPr>
+        </p:nvSpPr>
+        <p:spPr/>
+      </p:sp>
+      <p:sp>
+        <p:nvSpPr>
+          <p:cNvPr id="3" name="Notes Placeholder 2"/>
+          <p:cNvSpPr>
+            <a:spLocks noGrp="1"/>
+          </p:cNvSpPr>
+          <p:nvPr>
+            <p:ph type="body" idx="3" sz="quarter"/>
+          </p:nvPr>
+        </p:nvSpPr>
+        <p:spPr/>
+        <p:txBody>
+          <a:bodyPr/>
+          <a:lstStyle/>
+          <a:p>
+            <a:r>
+              <a:t>🎨 GÖRSELLEŞTİRME ÖNERİLERİ:</a:t>
+            </a:r>
+          </a:p>
+          <a:p/>
+          <a:p>
+            <a:r>
+              <a:t>📸 Görsel: CPU, RAM ve anakart fotoğrafları</a:t>
+            </a:r>
+          </a:p>
+          <a:p>
+            <a:r>
+              <a:t>🎬 Video: Bilgisayar donanımı tanıtım videosu (1-2 dk)</a:t>
+            </a:r>
+          </a:p>
+          <a:p>
+            <a:r>
+              <a:t>💡 İnfografik: Bilgisayar bileşenleri şeması</a:t>
+            </a:r>
+          </a:p>
+          <a:p>
+            <a:r>
+              <a:t>📸 Görsel: MS Word arayüz ekran görüntüsü</a:t>
+            </a:r>
+          </a:p>
+          <a:p>
+            <a:r>
+              <a:t>🎬 Video: Word temel özellikleri demo (2-3 dk)</a:t>
+            </a:r>
+          </a:p>
+          <a:p>
+            <a:r>
+              <a:t>💡 Ekran kaydı: Biçimlendirme araçları kullanımı</a:t>
+            </a:r>
+          </a:p>
+          <a:p>
+            <a:r>
+              <a:t>📸 Görsel: LAN ve WAN ağ topolojileri şeması</a:t>
+            </a:r>
+          </a:p>
+          <a:p>
+            <a:r>
+              <a:t>🎬 Video: İnternet nasıl çalışır? Animasyonlu anlatım</a:t>
+            </a:r>
+          </a:p>
+          <a:p>
+            <a:r>
+              <a:t>💡 İnfografik: Ev ağı kurulumu diyagramı</a:t>
+            </a:r>
+          </a:p>
+          <a:p>
+            <a:r>
+              <a:t>📸 Görsel: Farklı grafik türleri örnekleri</a:t>
+            </a:r>
+          </a:p>
+          <a:p>
+            <a:r>
+              <a:t>🎬 Video: Veri görselleştirme önemi</a:t>
+            </a:r>
+          </a:p>
+          <a:p>
+            <a:r>
+              <a:t>💡 İnfografik: Grafik türleri ve kullanım alanları</a:t>
+            </a:r>
+          </a:p>
+          <a:p>
+            <a:r>
+              <a:t>📸 Görsel: Excel arayüzü ekran görüntüsü</a:t>
+            </a:r>
+          </a:p>
+          <a:p>
+            <a:r>
+              <a:t>🎬 Video: Excel temel işlemler (2-3 dk)</a:t>
+            </a:r>
+          </a:p>
+          <a:p>
+            <a:r>
+              <a:t>💡 Ekran kaydı: Formül kullanımı demo</a:t>
+            </a:r>
+          </a:p>
+        </p:txBody>
+      </p:sp>
+      <p:sp>
+        <p:nvSpPr>
+          <p:cNvPr id="4" name="Slide Number Placeholder 3"/>
+          <p:cNvSpPr>
+            <a:spLocks noGrp="1"/>
+          </p:cNvSpPr>
+          <p:nvPr>
+            <p:ph type="sldNum" idx="5" sz="quarter"/>
+          </p:nvPr>
+        </p:nvSpPr>
+        <p:spPr/>
+      </p:sp>
+    </p:spTree>
+  </p:cSld>
+  <p:clrMapOvr>
+    <a:masterClrMapping/>
+  </p:clrMapOvr>
+</p:notes>
+</file>
+
+<file path=ppt/notesSlides/notesSlide8.xml><?xml version="1.0" encoding="utf-8"?>
+<p:notes xmlns:a="http://schemas.openxmlformats.org/drawingml/2006/main" xmlns:p="http://schemas.openxmlformats.org/presentationml/2006/main" xmlns:r="http://schemas.openxmlformats.org/officeDocument/2006/relationships">
+  <p:cSld>
+    <p:spTree>
+      <p:nvGrpSpPr>
+        <p:cNvPr id="1" name=""/>
+        <p:cNvGrpSpPr/>
+        <p:nvPr/>
+      </p:nvGrpSpPr>
+      <p:grpSpPr>
+        <a:xfrm>
+          <a:off x="0" y="0"/>
+          <a:ext cx="0" cy="0"/>
+          <a:chOff x="0" y="0"/>
+          <a:chExt cx="0" cy="0"/>
+        </a:xfrm>
+      </p:grpSpPr>
+      <p:sp>
+        <p:nvSpPr>
+          <p:cNvPr id="2" name="Slide Image Placeholder 1"/>
+          <p:cNvSpPr>
+            <a:spLocks noGrp="1"/>
+          </p:cNvSpPr>
+          <p:nvPr>
+            <p:ph type="sldImg" idx="2"/>
+          </p:nvPr>
+        </p:nvSpPr>
+        <p:spPr/>
+      </p:sp>
+      <p:sp>
+        <p:nvSpPr>
+          <p:cNvPr id="3" name="Notes Placeholder 2"/>
+          <p:cNvSpPr>
+            <a:spLocks noGrp="1"/>
+          </p:cNvSpPr>
+          <p:nvPr>
+            <p:ph type="body" idx="3" sz="quarter"/>
+          </p:nvPr>
+        </p:nvSpPr>
+        <p:spPr/>
+        <p:txBody>
+          <a:bodyPr/>
+          <a:lstStyle/>
+          <a:p>
+            <a:r>
+              <a:t>🎨 GÖRSELLEŞTİRME ÖNERİLERİ:</a:t>
+            </a:r>
+          </a:p>
+          <a:p/>
+          <a:p>
+            <a:r>
+              <a:t>📸 Görsel: LAN ve WAN ağ topolojileri şeması</a:t>
+            </a:r>
+          </a:p>
+          <a:p>
+            <a:r>
+              <a:t>🎬 Video: İnternet nasıl çalışır? Animasyonlu anlatım</a:t>
+            </a:r>
+          </a:p>
+          <a:p>
+            <a:r>
+              <a:t>💡 İnfografik: Ev ağı kurulumu diyagramı</a:t>
+            </a:r>
+          </a:p>
+          <a:p>
+            <a:r>
+              <a:t>📸 Görsel: Yapay zeka uygulama örnekleri (Siri, Alexa, ChatGPT)</a:t>
+            </a:r>
+          </a:p>
+          <a:p>
+            <a:r>
+              <a:t>🎬 Video: Yapay zeka nedir? Çocuklar için anlatım</a:t>
+            </a:r>
+          </a:p>
+          <a:p>
+            <a:r>
+              <a:t>💡 İnfografik: AI kullanım alanları</a:t>
+            </a:r>
+          </a:p>
+          <a:p>
+            <a:r>
+              <a:t>📸 Görsel: Farklı grafik türleri örnekleri</a:t>
+            </a:r>
+          </a:p>
+          <a:p>
+            <a:r>
+              <a:t>🎬 Video: Veri görselleştirme önemi</a:t>
+            </a:r>
+          </a:p>
+          <a:p>
+            <a:r>
+              <a:t>💡 İnfografik: Grafik türleri ve kullanım alanları</a:t>
+            </a:r>
+          </a:p>
+        </p:txBody>
+      </p:sp>
+      <p:sp>
+        <p:nvSpPr>
+          <p:cNvPr id="4" name="Slide Number Placeholder 3"/>
+          <p:cNvSpPr>
+            <a:spLocks noGrp="1"/>
+          </p:cNvSpPr>
+          <p:nvPr>
+            <p:ph type="sldNum" idx="5" sz="quarter"/>
+          </p:nvPr>
+        </p:nvSpPr>
+        <p:spPr/>
+      </p:sp>
+    </p:spTree>
+  </p:cSld>
+  <p:clrMapOvr>
+    <a:masterClrMapping/>
+  </p:clrMapOvr>
+</p:notes>
+</file>
+
+<file path=ppt/notesSlides/notesSlide9.xml><?xml version="1.0" encoding="utf-8"?>
+<p:notes xmlns:a="http://schemas.openxmlformats.org/drawingml/2006/main" xmlns:p="http://schemas.openxmlformats.org/presentationml/2006/main" xmlns:r="http://schemas.openxmlformats.org/officeDocument/2006/relationships">
+  <p:cSld>
+    <p:spTree>
+      <p:nvGrpSpPr>
+        <p:cNvPr id="1" name=""/>
+        <p:cNvGrpSpPr/>
+        <p:nvPr/>
+      </p:nvGrpSpPr>
+      <p:grpSpPr>
+        <a:xfrm>
+          <a:off x="0" y="0"/>
+          <a:ext cx="0" cy="0"/>
+          <a:chOff x="0" y="0"/>
+          <a:chExt cx="0" cy="0"/>
+        </a:xfrm>
+      </p:grpSpPr>
+      <p:sp>
+        <p:nvSpPr>
+          <p:cNvPr id="2" name="Slide Image Placeholder 1"/>
+          <p:cNvSpPr>
+            <a:spLocks noGrp="1"/>
+          </p:cNvSpPr>
+          <p:nvPr>
+            <p:ph type="sldImg" idx="2"/>
+          </p:nvPr>
+        </p:nvSpPr>
+        <p:spPr/>
+      </p:sp>
+      <p:sp>
+        <p:nvSpPr>
+          <p:cNvPr id="3" name="Notes Placeholder 2"/>
+          <p:cNvSpPr>
+            <a:spLocks noGrp="1"/>
+          </p:cNvSpPr>
+          <p:nvPr>
+            <p:ph type="body" idx="3" sz="quarter"/>
+          </p:nvPr>
+        </p:nvSpPr>
+        <p:spPr/>
+        <p:txBody>
+          <a:bodyPr/>
+          <a:lstStyle/>
+          <a:p>
+            <a:r>
+              <a:t>🎨 GÖRSELLEŞTİRME ÖNERİLERİ:</a:t>
+            </a:r>
+          </a:p>
+          <a:p/>
+          <a:p>
+            <a:r>
+              <a:t>📸 Görsel: CPU, RAM ve anakart fotoğrafları</a:t>
+            </a:r>
+          </a:p>
+          <a:p>
+            <a:r>
+              <a:t>🎬 Video: Bilgisayar donanımı tanıtım videosu (1-2 dk)</a:t>
+            </a:r>
+          </a:p>
+          <a:p>
+            <a:r>
+              <a:t>💡 İnfografik: Bilgisayar bileşenleri şeması</a:t>
+            </a:r>
+          </a:p>
+          <a:p>
+            <a:r>
+              <a:t>📸 Görsel: MS Word arayüz ekran görüntüsü</a:t>
+            </a:r>
+          </a:p>
+          <a:p>
+            <a:r>
+              <a:t>🎬 Video: Word temel özellikleri demo (2-3 dk)</a:t>
+            </a:r>
+          </a:p>
+          <a:p>
+            <a:r>
+              <a:t>💡 Ekran kaydı: Biçimlendirme araçları kullanımı</a:t>
+            </a:r>
+          </a:p>
+          <a:p>
+            <a:r>
+              <a:t>📸 Görsel: LAN ve WAN ağ topolojileri şeması</a:t>
+            </a:r>
+          </a:p>
+          <a:p>
+            <a:r>
+              <a:t>🎬 Video: İnternet nasıl çalışır? Animasyonlu anlatım</a:t>
+            </a:r>
+          </a:p>
+          <a:p>
+            <a:r>
+              <a:t>💡 İnfografik: Ev ağı kurulumu diyagramı</a:t>
+            </a:r>
+          </a:p>
+        </p:txBody>
+      </p:sp>
+      <p:sp>
+        <p:nvSpPr>
+          <p:cNvPr id="4" name="Slide Number Placeholder 3"/>
+          <p:cNvSpPr>
+            <a:spLocks noGrp="1"/>
+          </p:cNvSpPr>
+          <p:nvPr>
+            <p:ph type="sldNum" idx="5" sz="quarter"/>
+          </p:nvPr>
+        </p:nvSpPr>
+        <p:spPr/>
+      </p:sp>
+    </p:spTree>
+  </p:cSld>
+  <p:clrMapOvr>
+    <a:masterClrMapping/>
+  </p:clrMapOvr>
+</p:notes>
 </file>
 
 <file path=ppt/slideLayouts/slideLayout1.xml><?xml version="1.0" encoding="utf-8"?>
@@ -3269,6 +4995,7 @@
               <a:defRPr sz="1900"/>
             </a:pPr>
             <a:r>
+              <a:rPr sz="1600"/>
               <a:t>Birlikte belge oluşturmak</a:t>
             </a:r>
           </a:p>
@@ -3288,6 +5015,7 @@
               <a:defRPr sz="1900"/>
             </a:pPr>
             <a:r>
+              <a:rPr sz="1600"/>
               <a:t>✅ Google Docs ile İşbirliği:</a:t>
             </a:r>
           </a:p>
@@ -3299,6 +5027,7 @@
               <a:defRPr sz="1700"/>
             </a:pPr>
             <a:r>
+              <a:rPr sz="1600"/>
               <a:t>    • Aynı anda birden fazla kişi düzenler</a:t>
             </a:r>
           </a:p>
@@ -3310,6 +5039,7 @@
               <a:defRPr sz="1700"/>
             </a:pPr>
             <a:r>
+              <a:rPr sz="1600"/>
               <a:t>    • Her kişi farklı renk ile görünür</a:t>
             </a:r>
           </a:p>
@@ -3321,6 +5051,7 @@
               <a:defRPr sz="1700"/>
             </a:pPr>
             <a:r>
+              <a:rPr sz="1600"/>
               <a:t>    • Anlık değişiklikler</a:t>
             </a:r>
           </a:p>
@@ -3340,6 +5071,7 @@
               <a:defRPr sz="1900"/>
             </a:pPr>
             <a:r>
+              <a:rPr sz="1600"/>
               <a:t>✅ Yorumlar:</a:t>
             </a:r>
           </a:p>
@@ -3351,6 +5083,7 @@
               <a:defRPr sz="1700"/>
             </a:pPr>
             <a:r>
+              <a:rPr sz="1600"/>
               <a:t>    • Metin seç → Yorum ekle</a:t>
             </a:r>
           </a:p>
@@ -3362,6 +5095,7 @@
               <a:defRPr sz="1700"/>
             </a:pPr>
             <a:r>
+              <a:rPr sz="1600"/>
               <a:t>    • Geri bildirim ver</a:t>
             </a:r>
           </a:p>
@@ -3373,6 +5107,7 @@
               <a:defRPr sz="1700"/>
             </a:pPr>
             <a:r>
+              <a:rPr sz="1600"/>
               <a:t>    • Öneri yap</a:t>
             </a:r>
           </a:p>
@@ -3392,6 +5127,7 @@
               <a:defRPr sz="1900"/>
             </a:pPr>
             <a:r>
+              <a:rPr sz="1600"/>
               <a:t>✅ Sürüm Geçmişi:</a:t>
             </a:r>
           </a:p>
@@ -3403,6 +5139,7 @@
               <a:defRPr sz="1700"/>
             </a:pPr>
             <a:r>
+              <a:rPr sz="1600"/>
               <a:t>    • Dosya → Sürüm geçmişi</a:t>
             </a:r>
           </a:p>
@@ -3414,6 +5151,7 @@
               <a:defRPr sz="1700"/>
             </a:pPr>
             <a:r>
+              <a:rPr sz="1600"/>
               <a:t>    • Eski halini gör</a:t>
             </a:r>
           </a:p>
@@ -3425,6 +5163,7 @@
               <a:defRPr sz="1700"/>
             </a:pPr>
             <a:r>
+              <a:rPr sz="1600"/>
               <a:t>    • Geri dön</a:t>
             </a:r>
           </a:p>
@@ -3444,6 +5183,7 @@
               <a:defRPr sz="1900"/>
             </a:pPr>
             <a:r>
+              <a:rPr sz="1600"/>
               <a:t>✅ Etiket:</a:t>
             </a:r>
           </a:p>
@@ -3455,6 +5195,7 @@
               <a:defRPr sz="1700"/>
             </a:pPr>
             <a:r>
+              <a:rPr sz="1600"/>
               <a:t>    • @isim ile etiketle</a:t>
             </a:r>
           </a:p>
@@ -3466,6 +5207,7 @@
               <a:defRPr sz="1700"/>
             </a:pPr>
             <a:r>
+              <a:rPr sz="1600"/>
               <a:t>    • Bildirim gider</a:t>
             </a:r>
           </a:p>
@@ -3485,6 +5227,7 @@
               <a:defRPr sz="1900"/>
             </a:pPr>
             <a:r>
+              <a:rPr sz="1600"/>
               <a:t>💡 İşbirliği Kuralları:</a:t>
             </a:r>
           </a:p>
@@ -3496,6 +5239,7 @@
               <a:defRPr sz="1700"/>
             </a:pPr>
             <a:r>
+              <a:rPr sz="1600"/>
               <a:t>    • Başkasının yazısını silme</a:t>
             </a:r>
           </a:p>
@@ -3507,6 +5251,7 @@
               <a:defRPr sz="1700"/>
             </a:pPr>
             <a:r>
+              <a:rPr sz="1600"/>
               <a:t>    • Değişiklikleri yorum olarak öner</a:t>
             </a:r>
           </a:p>
@@ -3518,6 +5263,7 @@
               <a:defRPr sz="1700"/>
             </a:pPr>
             <a:r>
+              <a:rPr sz="1600"/>
               <a:t>    • İletişim kur</a:t>
             </a:r>
           </a:p>
@@ -4127,6 +5873,7 @@
               <a:defRPr sz="1900"/>
             </a:pPr>
             <a:r>
+              <a:rPr sz="1600"/>
               <a:t>Kelime işlemci = Metin belgesi oluşturma programı</a:t>
             </a:r>
           </a:p>
@@ -4146,6 +5893,7 @@
               <a:defRPr sz="1900"/>
             </a:pPr>
             <a:r>
+              <a:rPr sz="1600"/>
               <a:t>✅ Popüler Kelime İşlemciler:</a:t>
             </a:r>
           </a:p>
@@ -4157,6 +5905,7 @@
               <a:defRPr sz="1700"/>
             </a:pPr>
             <a:r>
+              <a:rPr sz="1600"/>
               <a:t>    • Microsoft Word (ücretli)</a:t>
             </a:r>
           </a:p>
@@ -4168,6 +5917,7 @@
               <a:defRPr sz="1700"/>
             </a:pPr>
             <a:r>
+              <a:rPr sz="1600"/>
               <a:t>    • Google Docs (ücretsiz, online)</a:t>
             </a:r>
           </a:p>
@@ -4179,6 +5929,7 @@
               <a:defRPr sz="1700"/>
             </a:pPr>
             <a:r>
+              <a:rPr sz="1600"/>
               <a:t>    • LibreOffice Writer (ücretsiz)</a:t>
             </a:r>
           </a:p>
@@ -4190,6 +5941,7 @@
               <a:defRPr sz="1700"/>
             </a:pPr>
             <a:r>
+              <a:rPr sz="1600"/>
               <a:t>    • Pages (Apple)</a:t>
             </a:r>
           </a:p>
@@ -4209,6 +5961,7 @@
               <a:defRPr sz="1900"/>
             </a:pPr>
             <a:r>
+              <a:rPr sz="1600"/>
               <a:t>📌 Ne İçin Kullanılır?</a:t>
             </a:r>
           </a:p>
@@ -4220,6 +5973,7 @@
               <a:defRPr sz="1700"/>
             </a:pPr>
             <a:r>
+              <a:rPr sz="1600"/>
               <a:t>    • Ödev yazmak</a:t>
             </a:r>
           </a:p>
@@ -4231,6 +5985,7 @@
               <a:defRPr sz="1700"/>
             </a:pPr>
             <a:r>
+              <a:rPr sz="1600"/>
               <a:t>    • Rapor hazırlamak</a:t>
             </a:r>
           </a:p>
@@ -4242,6 +5997,7 @@
               <a:defRPr sz="1700"/>
             </a:pPr>
             <a:r>
+              <a:rPr sz="1600"/>
               <a:t>    • Mektup yazmak</a:t>
             </a:r>
           </a:p>
@@ -4253,6 +6009,7 @@
               <a:defRPr sz="1700"/>
             </a:pPr>
             <a:r>
+              <a:rPr sz="1600"/>
               <a:t>    • Poster tasarlamak</a:t>
             </a:r>
           </a:p>
@@ -4272,6 +6029,7 @@
               <a:defRPr sz="1900"/>
             </a:pPr>
             <a:r>
+              <a:rPr sz="1600"/>
               <a:t>💡 Avantajları:</a:t>
             </a:r>
           </a:p>
@@ -4283,6 +6041,7 @@
               <a:defRPr sz="1700"/>
             </a:pPr>
             <a:r>
+              <a:rPr sz="1600"/>
               <a:t>    • Düzenleme kolay</a:t>
             </a:r>
           </a:p>
@@ -4294,6 +6053,7 @@
               <a:defRPr sz="1700"/>
             </a:pPr>
             <a:r>
+              <a:rPr sz="1600"/>
               <a:t>    • Yazım hatalarını bulur</a:t>
             </a:r>
           </a:p>
@@ -4305,6 +6065,7 @@
               <a:defRPr sz="1700"/>
             </a:pPr>
             <a:r>
+              <a:rPr sz="1600"/>
               <a:t>    • Güzel görünüm</a:t>
             </a:r>
           </a:p>
@@ -4316,6 +6077,7 @@
               <a:defRPr sz="1700"/>
             </a:pPr>
             <a:r>
+              <a:rPr sz="1600"/>
               <a:t>    • Yazdırma/paylaşma kolay</a:t>
             </a:r>
           </a:p>
@@ -5031,6 +6793,7 @@
               <a:defRPr sz="1900"/>
             </a:pPr>
             <a:r>
+              <a:rPr sz="1600"/>
               <a:t>Belgeye görsel katmak</a:t>
             </a:r>
           </a:p>
@@ -5050,6 +6813,7 @@
               <a:defRPr sz="1900"/>
             </a:pPr>
             <a:r>
+              <a:rPr sz="1600"/>
               <a:t>✅ Resim Ekleme:</a:t>
             </a:r>
           </a:p>
@@ -5061,6 +6825,7 @@
               <a:defRPr sz="1700"/>
             </a:pPr>
             <a:r>
+              <a:rPr sz="1600"/>
               <a:t>    • Ekle → Resim</a:t>
             </a:r>
           </a:p>
@@ -5072,6 +6837,7 @@
               <a:defRPr sz="1700"/>
             </a:pPr>
             <a:r>
+              <a:rPr sz="1600"/>
               <a:t>    • Bilgisayardan yükle</a:t>
             </a:r>
           </a:p>
@@ -5083,6 +6849,7 @@
               <a:defRPr sz="1700"/>
             </a:pPr>
             <a:r>
+              <a:rPr sz="1600"/>
               <a:t>    • İnternetten ara (dikkat: telif!)</a:t>
             </a:r>
           </a:p>
@@ -5102,6 +6869,7 @@
               <a:defRPr sz="1900"/>
             </a:pPr>
             <a:r>
+              <a:rPr sz="1600"/>
               <a:t>✅ Resim Düzenleme:</a:t>
             </a:r>
           </a:p>
@@ -5113,6 +6881,7 @@
               <a:defRPr sz="1700"/>
             </a:pPr>
             <a:r>
+              <a:rPr sz="1600"/>
               <a:t>    • Boyutlandır</a:t>
             </a:r>
           </a:p>
@@ -5124,6 +6893,7 @@
               <a:defRPr sz="1700"/>
             </a:pPr>
             <a:r>
+              <a:rPr sz="1600"/>
               <a:t>    • Kırp</a:t>
             </a:r>
           </a:p>
@@ -5135,6 +6905,7 @@
               <a:defRPr sz="1700"/>
             </a:pPr>
             <a:r>
+              <a:rPr sz="1600"/>
               <a:t>    • Metin sarma (çevreleme)</a:t>
             </a:r>
           </a:p>
@@ -5154,6 +6925,7 @@
               <a:defRPr sz="1900"/>
             </a:pPr>
             <a:r>
+              <a:rPr sz="1600"/>
               <a:t>✅ Şekiller:</a:t>
             </a:r>
           </a:p>
@@ -5165,6 +6937,7 @@
               <a:defRPr sz="1700"/>
             </a:pPr>
             <a:r>
+              <a:rPr sz="1600"/>
               <a:t>    • Dikdörtgen, daire, ok</a:t>
             </a:r>
           </a:p>
@@ -5176,6 +6949,7 @@
               <a:defRPr sz="1700"/>
             </a:pPr>
             <a:r>
+              <a:rPr sz="1600"/>
               <a:t>    • Akış diyagramı şekilleri</a:t>
             </a:r>
           </a:p>
@@ -5195,6 +6969,7 @@
               <a:defRPr sz="1900"/>
             </a:pPr>
             <a:r>
+              <a:rPr sz="1600"/>
               <a:t>✅ SmartArt:</a:t>
             </a:r>
           </a:p>
@@ -5206,6 +6981,7 @@
               <a:defRPr sz="1700"/>
             </a:pPr>
             <a:r>
+              <a:rPr sz="1600"/>
               <a:t>    • Şemalar, grafikler</a:t>
             </a:r>
           </a:p>
@@ -5225,6 +7001,7 @@
               <a:defRPr sz="1900"/>
             </a:pPr>
             <a:r>
+              <a:rPr sz="1600"/>
               <a:t>⚠️ Telif Hakkı:</a:t>
             </a:r>
           </a:p>
@@ -5236,6 +7013,7 @@
               <a:defRPr sz="1700"/>
             </a:pPr>
             <a:r>
+              <a:rPr sz="1600"/>
               <a:t>    • Başkasının resmini kullanırken kaynak göster</a:t>
             </a:r>
           </a:p>
@@ -5247,6 +7025,7 @@
               <a:defRPr sz="1700"/>
             </a:pPr>
             <a:r>
+              <a:rPr sz="1600"/>
               <a:t>    • Ücretsiz resim siteleri: Unsplash, Pixabay</a:t>
             </a:r>
           </a:p>
@@ -6003,6 +7782,7 @@
               <a:defRPr sz="1900"/>
             </a:pPr>
             <a:r>
+              <a:rPr sz="1600"/>
               <a:t>Online kelime işlemci</a:t>
             </a:r>
           </a:p>
@@ -6022,6 +7802,7 @@
               <a:defRPr sz="1900"/>
             </a:pPr>
             <a:r>
+              <a:rPr sz="1600"/>
               <a:t>✅ Google Docs Avantajları:</a:t>
             </a:r>
           </a:p>
@@ -6033,6 +7814,7 @@
               <a:defRPr sz="1700"/>
             </a:pPr>
             <a:r>
+              <a:rPr sz="1600"/>
               <a:t>    • Ücretsiz</a:t>
             </a:r>
           </a:p>
@@ -6044,6 +7826,7 @@
               <a:defRPr sz="1700"/>
             </a:pPr>
             <a:r>
+              <a:rPr sz="1600"/>
               <a:t>    • Her yerden erişim (internet ile)</a:t>
             </a:r>
           </a:p>
@@ -6055,6 +7838,7 @@
               <a:defRPr sz="1700"/>
             </a:pPr>
             <a:r>
+              <a:rPr sz="1600"/>
               <a:t>    • Otomatik kaydetme</a:t>
             </a:r>
           </a:p>
@@ -6066,6 +7850,7 @@
               <a:defRPr sz="1700"/>
             </a:pPr>
             <a:r>
+              <a:rPr sz="1600"/>
               <a:t>    • İşbirlikli çalışma</a:t>
             </a:r>
           </a:p>
@@ -6077,6 +7862,7 @@
               <a:defRPr sz="1700"/>
             </a:pPr>
             <a:r>
+              <a:rPr sz="1600"/>
               <a:t>    • Yorum yapma</a:t>
             </a:r>
           </a:p>
@@ -6096,6 +7882,7 @@
               <a:defRPr sz="1900"/>
             </a:pPr>
             <a:r>
+              <a:rPr sz="1600"/>
               <a:t>✅ Nasıl Kullanılır?</a:t>
             </a:r>
           </a:p>
@@ -6107,6 +7894,7 @@
               <a:defRPr sz="1700"/>
             </a:pPr>
             <a:r>
+              <a:rPr sz="1600"/>
               <a:t>    • docs.google.com</a:t>
             </a:r>
           </a:p>
@@ -6118,6 +7906,7 @@
               <a:defRPr sz="1700"/>
             </a:pPr>
             <a:r>
+              <a:rPr sz="1600"/>
               <a:t>    • Google hesabı ile giriş</a:t>
             </a:r>
           </a:p>
@@ -6129,6 +7918,7 @@
               <a:defRPr sz="1700"/>
             </a:pPr>
             <a:r>
+              <a:rPr sz="1600"/>
               <a:t>    • Yeni belge oluştur</a:t>
             </a:r>
           </a:p>
@@ -6148,6 +7938,7 @@
               <a:defRPr sz="1900"/>
             </a:pPr>
             <a:r>
+              <a:rPr sz="1600"/>
               <a:t>✅ Paylaşma:</a:t>
             </a:r>
           </a:p>
@@ -6159,6 +7950,7 @@
               <a:defRPr sz="1700"/>
             </a:pPr>
             <a:r>
+              <a:rPr sz="1600"/>
               <a:t>    • Paylaş butonu</a:t>
             </a:r>
           </a:p>
@@ -6170,6 +7962,7 @@
               <a:defRPr sz="1700"/>
             </a:pPr>
             <a:r>
+              <a:rPr sz="1600"/>
               <a:t>    • E-posta ile paylaş</a:t>
             </a:r>
           </a:p>
@@ -6181,6 +7974,7 @@
               <a:defRPr sz="1700"/>
             </a:pPr>
             <a:r>
+              <a:rPr sz="1600"/>
               <a:t>    • Link ile paylaş</a:t>
             </a:r>
           </a:p>
@@ -6192,6 +7986,7 @@
               <a:defRPr sz="1700"/>
             </a:pPr>
             <a:r>
+              <a:rPr sz="1600"/>
               <a:t>    • İzinler: Görüntüleme, Yorum, Düzenleme</a:t>
             </a:r>
           </a:p>
@@ -6211,6 +8006,7 @@
               <a:defRPr sz="1900"/>
             </a:pPr>
             <a:r>
+              <a:rPr sz="1600"/>
               <a:t>💡 Grup ödevlerinde çok kullanışlı!</a:t>
             </a:r>
           </a:p>
@@ -6222,6 +8018,7 @@
               <a:defRPr sz="1900"/>
             </a:pPr>
             <a:r>
+              <a:rPr sz="1600"/>
               <a:t>Herkes aynı anda çalışabilir</a:t>
             </a:r>
           </a:p>
@@ -6553,4 +8350,324 @@
   </a:objectDefaults>
   <a:extraClrSchemeLst/>
 </a:theme>
+</file>
+
+<file path=ppt/theme/theme2.xml><?xml version="1.0" encoding="utf-8"?>
+<a:theme xmlns:a="http://schemas.openxmlformats.org/drawingml/2006/main" name="Office Theme">
+  <a:themeElements>
+    <a:clrScheme name="Office">
+      <a:dk1>
+        <a:sysClr val="windowText" lastClr="000000"/>
+      </a:dk1>
+      <a:lt1>
+        <a:sysClr val="window" lastClr="FFFFFF"/>
+      </a:lt1>
+      <a:dk2>
+        <a:srgbClr val="1F497D"/>
+      </a:dk2>
+      <a:lt2>
+        <a:srgbClr val="EEECE1"/>
+      </a:lt2>
+      <a:accent1>
+        <a:srgbClr val="4F81BD"/>
+      </a:accent1>
+      <a:accent2>
+        <a:srgbClr val="C0504D"/>
+      </a:accent2>
+      <a:accent3>
+        <a:srgbClr val="9BBB59"/>
+      </a:accent3>
+      <a:accent4>
+        <a:srgbClr val="8064A2"/>
+      </a:accent4>
+      <a:accent5>
+        <a:srgbClr val="4BACC6"/>
+      </a:accent5>
+      <a:accent6>
+        <a:srgbClr val="F79646"/>
+      </a:accent6>
+      <a:hlink>
+        <a:srgbClr val="0000FF"/>
+      </a:hlink>
+      <a:folHlink>
+        <a:srgbClr val="800080"/>
+      </a:folHlink>
+    </a:clrScheme>
+    <a:fontScheme name="Office">
+      <a:majorFont>
+        <a:latin typeface="Calibri"/>
+        <a:ea typeface=""/>
+        <a:cs typeface=""/>
+        <a:font script="Jpan" typeface="ＭＳ Ｐゴシック"/>
+        <a:font script="Hang" typeface="맑은 고딕"/>
+        <a:font script="Hans" typeface="宋体"/>
+        <a:font script="Hant" typeface="新細明體"/>
+        <a:font script="Arab" typeface="Times New Roman"/>
+        <a:font script="Hebr" typeface="Times New Roman"/>
+        <a:font script="Thai" typeface="Angsana New"/>
+        <a:font script="Ethi" typeface="Nyala"/>
+        <a:font script="Beng" typeface="Vrinda"/>
+        <a:font script="Gujr" typeface="Shruti"/>
+        <a:font script="Khmr" typeface="MoolBoran"/>
+        <a:font script="Knda" typeface="Tunga"/>
+        <a:font script="Guru" typeface="Raavi"/>
+        <a:font script="Cans" typeface="Euphemia"/>
+        <a:font script="Cher" typeface="Plantagenet Cherokee"/>
+        <a:font script="Yiii" typeface="Microsoft Yi Baiti"/>
+        <a:font script="Tibt" typeface="Microsoft Himalaya"/>
+        <a:font script="Thaa" typeface="MV Boli"/>
+        <a:font script="Deva" typeface="Mangal"/>
+        <a:font script="Telu" typeface="Gautami"/>
+        <a:font script="Taml" typeface="Latha"/>
+        <a:font script="Syrc" typeface="Estrangelo Edessa"/>
+        <a:font script="Orya" typeface="Kalinga"/>
+        <a:font script="Mlym" typeface="Kartika"/>
+        <a:font script="Laoo" typeface="DokChampa"/>
+        <a:font script="Sinh" typeface="Iskoola Pota"/>
+        <a:font script="Mong" typeface="Mongolian Baiti"/>
+        <a:font script="Viet" typeface="Times New Roman"/>
+        <a:font script="Uigh" typeface="Microsoft Uighur"/>
+        <a:font script="Geor" typeface="Sylfaen"/>
+      </a:majorFont>
+      <a:minorFont>
+        <a:latin typeface="Calibri"/>
+        <a:ea typeface=""/>
+        <a:cs typeface=""/>
+        <a:font script="Jpan" typeface="ＭＳ Ｐゴシック"/>
+        <a:font script="Hang" typeface="맑은 고딕"/>
+        <a:font script="Hans" typeface="宋体"/>
+        <a:font script="Hant" typeface="新細明體"/>
+        <a:font script="Arab" typeface="Arial"/>
+        <a:font script="Hebr" typeface="Arial"/>
+        <a:font script="Thai" typeface="Cordia New"/>
+        <a:font script="Ethi" typeface="Nyala"/>
+        <a:font script="Beng" typeface="Vrinda"/>
+        <a:font script="Gujr" typeface="Shruti"/>
+        <a:font script="Khmr" typeface="DaunPenh"/>
+        <a:font script="Knda" typeface="Tunga"/>
+        <a:font script="Guru" typeface="Raavi"/>
+        <a:font script="Cans" typeface="Euphemia"/>
+        <a:font script="Cher" typeface="Plantagenet Cherokee"/>
+        <a:font script="Yiii" typeface="Microsoft Yi Baiti"/>
+        <a:font script="Tibt" typeface="Microsoft Himalaya"/>
+        <a:font script="Thaa" typeface="MV Boli"/>
+        <a:font script="Deva" typeface="Mangal"/>
+        <a:font script="Telu" typeface="Gautami"/>
+        <a:font script="Taml" typeface="Latha"/>
+        <a:font script="Syrc" typeface="Estrangelo Edessa"/>
+        <a:font script="Orya" typeface="Kalinga"/>
+        <a:font script="Mlym" typeface="Kartika"/>
+        <a:font script="Laoo" typeface="DokChampa"/>
+        <a:font script="Sinh" typeface="Iskoola Pota"/>
+        <a:font script="Mong" typeface="Mongolian Baiti"/>
+        <a:font script="Viet" typeface="Arial"/>
+        <a:font script="Uigh" typeface="Microsoft Uighur"/>
+        <a:font script="Geor" typeface="Sylfaen"/>
+      </a:minorFont>
+    </a:fontScheme>
+    <a:fmtScheme name="Office">
+      <a:fillStyleLst>
+        <a:solidFill>
+          <a:schemeClr val="phClr"/>
+        </a:solidFill>
+        <a:gradFill rotWithShape="1">
+          <a:gsLst>
+            <a:gs pos="0">
+              <a:schemeClr val="phClr">
+                <a:tint val="50000"/>
+                <a:satMod val="300000"/>
+              </a:schemeClr>
+            </a:gs>
+            <a:gs pos="35000">
+              <a:schemeClr val="phClr">
+                <a:tint val="37000"/>
+                <a:satMod val="300000"/>
+              </a:schemeClr>
+            </a:gs>
+            <a:gs pos="100000">
+              <a:schemeClr val="phClr">
+                <a:tint val="15000"/>
+                <a:satMod val="350000"/>
+              </a:schemeClr>
+            </a:gs>
+          </a:gsLst>
+          <a:lin ang="16200000" scaled="1"/>
+        </a:gradFill>
+        <a:gradFill rotWithShape="1">
+          <a:gsLst>
+            <a:gs pos="0">
+              <a:schemeClr val="phClr">
+                <a:tint val="100000"/>
+                <a:shade val="100000"/>
+                <a:satMod val="130000"/>
+              </a:schemeClr>
+            </a:gs>
+            <a:gs pos="100000">
+              <a:schemeClr val="phClr">
+                <a:tint val="50000"/>
+                <a:shade val="100000"/>
+                <a:satMod val="350000"/>
+              </a:schemeClr>
+            </a:gs>
+          </a:gsLst>
+          <a:lin ang="16200000" scaled="0"/>
+        </a:gradFill>
+      </a:fillStyleLst>
+      <a:lnStyleLst>
+        <a:ln w="9525" cap="flat" cmpd="sng" algn="ctr">
+          <a:solidFill>
+            <a:schemeClr val="phClr">
+              <a:shade val="95000"/>
+              <a:satMod val="105000"/>
+            </a:schemeClr>
+          </a:solidFill>
+          <a:prstDash val="solid"/>
+        </a:ln>
+        <a:ln w="25400" cap="flat" cmpd="sng" algn="ctr">
+          <a:solidFill>
+            <a:schemeClr val="phClr"/>
+          </a:solidFill>
+          <a:prstDash val="solid"/>
+        </a:ln>
+        <a:ln w="38100" cap="flat" cmpd="sng" algn="ctr">
+          <a:solidFill>
+            <a:schemeClr val="phClr"/>
+          </a:solidFill>
+          <a:prstDash val="solid"/>
+        </a:ln>
+      </a:lnStyleLst>
+      <a:effectStyleLst>
+        <a:effectStyle>
+          <a:effectLst>
+            <a:outerShdw blurRad="40000" dist="20000" dir="5400000" rotWithShape="0">
+              <a:srgbClr val="000000">
+                <a:alpha val="38000"/>
+              </a:srgbClr>
+            </a:outerShdw>
+          </a:effectLst>
+        </a:effectStyle>
+        <a:effectStyle>
+          <a:effectLst>
+            <a:outerShdw blurRad="40000" dist="23000" dir="5400000" rotWithShape="0">
+              <a:srgbClr val="000000">
+                <a:alpha val="35000"/>
+              </a:srgbClr>
+            </a:outerShdw>
+          </a:effectLst>
+        </a:effectStyle>
+        <a:effectStyle>
+          <a:effectLst>
+            <a:outerShdw blurRad="40000" dist="23000" dir="5400000" rotWithShape="0">
+              <a:srgbClr val="000000">
+                <a:alpha val="35000"/>
+              </a:srgbClr>
+            </a:outerShdw>
+          </a:effectLst>
+          <a:scene3d>
+            <a:camera prst="orthographicFront">
+              <a:rot lat="0" lon="0" rev="0"/>
+            </a:camera>
+            <a:lightRig rig="threePt" dir="t">
+              <a:rot lat="0" lon="0" rev="1200000"/>
+            </a:lightRig>
+          </a:scene3d>
+          <a:sp3d>
+            <a:bevelT w="63500" h="25400"/>
+          </a:sp3d>
+        </a:effectStyle>
+      </a:effectStyleLst>
+      <a:bgFillStyleLst>
+        <a:solidFill>
+          <a:schemeClr val="phClr"/>
+        </a:solidFill>
+        <a:gradFill rotWithShape="1">
+          <a:gsLst>
+            <a:gs pos="0">
+              <a:schemeClr val="phClr">
+                <a:tint val="40000"/>
+                <a:satMod val="350000"/>
+              </a:schemeClr>
+            </a:gs>
+            <a:gs pos="40000">
+              <a:schemeClr val="phClr">
+                <a:tint val="45000"/>
+                <a:shade val="99000"/>
+                <a:satMod val="350000"/>
+              </a:schemeClr>
+            </a:gs>
+            <a:gs pos="100000">
+              <a:schemeClr val="phClr">
+                <a:shade val="20000"/>
+                <a:satMod val="255000"/>
+              </a:schemeClr>
+            </a:gs>
+          </a:gsLst>
+          <a:path path="circle">
+            <a:fillToRect l="50000" t="-80000" r="50000" b="180000"/>
+          </a:path>
+        </a:gradFill>
+        <a:gradFill rotWithShape="1">
+          <a:gsLst>
+            <a:gs pos="0">
+              <a:schemeClr val="phClr">
+                <a:tint val="80000"/>
+                <a:satMod val="300000"/>
+              </a:schemeClr>
+            </a:gs>
+            <a:gs pos="100000">
+              <a:schemeClr val="phClr">
+                <a:shade val="30000"/>
+                <a:satMod val="200000"/>
+              </a:schemeClr>
+            </a:gs>
+          </a:gsLst>
+          <a:path path="circle">
+            <a:fillToRect l="50000" t="50000" r="50000" b="50000"/>
+          </a:path>
+        </a:gradFill>
+      </a:bgFillStyleLst>
+    </a:fmtScheme>
+  </a:themeElements>
+  <a:objectDefaults>
+    <a:spDef>
+      <a:spPr/>
+      <a:bodyPr/>
+      <a:lstStyle/>
+      <a:style>
+        <a:lnRef idx="1">
+          <a:schemeClr val="accent1"/>
+        </a:lnRef>
+        <a:fillRef idx="3">
+          <a:schemeClr val="accent1"/>
+        </a:fillRef>
+        <a:effectRef idx="2">
+          <a:schemeClr val="accent1"/>
+        </a:effectRef>
+        <a:fontRef idx="minor">
+          <a:schemeClr val="lt1"/>
+        </a:fontRef>
+      </a:style>
+    </a:spDef>
+    <a:lnDef>
+      <a:spPr/>
+      <a:bodyPr/>
+      <a:lstStyle/>
+      <a:style>
+        <a:lnRef idx="2">
+          <a:schemeClr val="accent1"/>
+        </a:lnRef>
+        <a:fillRef idx="0">
+          <a:schemeClr val="accent1"/>
+        </a:fillRef>
+        <a:effectRef idx="1">
+          <a:schemeClr val="accent1"/>
+        </a:effectRef>
+        <a:fontRef idx="minor">
+          <a:schemeClr val="tx1"/>
+        </a:fontRef>
+      </a:style>
+    </a:lnDef>
+  </a:objectDefaults>
+  <a:extraClrSchemeLst/>
+</a:theme>
 </file>
--- a/sunumlar/6-sinif-unite2-kelime-islemci-DETAYLI.pptx
+++ b/sunumlar/6-sinif-unite2-kelime-islemci-DETAYLI.pptx
@@ -4849,7 +4849,7 @@
           <a:noFill/>
         </p:spPr>
         <p:txBody>
-          <a:bodyPr wrap="none">
+          <a:bodyPr wrap="square">
             <a:spAutoFit/>
           </a:bodyPr>
           <a:lstStyle/>
@@ -4884,7 +4884,7 @@
           <a:noFill/>
         </p:spPr>
         <p:txBody>
-          <a:bodyPr wrap="none">
+          <a:bodyPr wrap="square">
             <a:spAutoFit/>
           </a:bodyPr>
           <a:lstStyle/>
@@ -4932,7 +4932,7 @@
         </p:nvSpPr>
         <p:spPr/>
         <p:txBody>
-          <a:bodyPr/>
+          <a:bodyPr wrap="square"/>
           <a:lstStyle/>
           <a:p>
             <a:pPr>
@@ -4986,284 +4986,368 @@
             <a:spAutoFit/>
           </a:bodyPr>
           <a:lstStyle/>
-          <a:p/>
-          <a:p>
-            <a:pPr>
-              <a:spcAft>
-                <a:spcPts val="1000"/>
-              </a:spcAft>
-              <a:defRPr sz="1900"/>
-            </a:pPr>
-            <a:r>
-              <a:rPr sz="1600"/>
+          <a:p>
+            <a:pPr>
+              <a:lnSpc>
+                <a:spcPct val="90000"/>
+              </a:lnSpc>
+              <a:spcAft>
+                <a:spcPts val="300"/>
+              </a:spcAft>
+            </a:pPr>
+          </a:p>
+          <a:p>
+            <a:pPr>
+              <a:lnSpc>
+                <a:spcPct val="90000"/>
+              </a:lnSpc>
+              <a:spcAft>
+                <a:spcPts val="300"/>
+              </a:spcAft>
+              <a:defRPr sz="1900"/>
+            </a:pPr>
+            <a:r>
+              <a:rPr sz="1400"/>
               <a:t>Birlikte belge oluşturmak</a:t>
             </a:r>
           </a:p>
           <a:p>
             <a:pPr>
-              <a:spcAft>
-                <a:spcPts val="1000"/>
-              </a:spcAft>
-              <a:defRPr sz="1900"/>
-            </a:pPr>
-          </a:p>
-          <a:p>
-            <a:pPr>
-              <a:spcAft>
-                <a:spcPts val="1000"/>
-              </a:spcAft>
-              <a:defRPr sz="1900"/>
-            </a:pPr>
-            <a:r>
-              <a:rPr sz="1600"/>
+              <a:lnSpc>
+                <a:spcPct val="90000"/>
+              </a:lnSpc>
+              <a:spcAft>
+                <a:spcPts val="300"/>
+              </a:spcAft>
+              <a:defRPr sz="1900"/>
+            </a:pPr>
+          </a:p>
+          <a:p>
+            <a:pPr>
+              <a:lnSpc>
+                <a:spcPct val="90000"/>
+              </a:lnSpc>
+              <a:spcAft>
+                <a:spcPts val="300"/>
+              </a:spcAft>
+              <a:defRPr sz="1900"/>
+            </a:pPr>
+            <a:r>
+              <a:rPr sz="1400"/>
               <a:t>✅ Google Docs ile İşbirliği:</a:t>
             </a:r>
           </a:p>
           <a:p>
             <a:pPr lvl="1">
-              <a:spcAft>
-                <a:spcPts val="1000"/>
+              <a:lnSpc>
+                <a:spcPct val="90000"/>
+              </a:lnSpc>
+              <a:spcAft>
+                <a:spcPts val="300"/>
               </a:spcAft>
               <a:defRPr sz="1700"/>
             </a:pPr>
             <a:r>
-              <a:rPr sz="1600"/>
+              <a:rPr sz="1400"/>
               <a:t>    • Aynı anda birden fazla kişi düzenler</a:t>
             </a:r>
           </a:p>
           <a:p>
             <a:pPr lvl="1">
-              <a:spcAft>
-                <a:spcPts val="1000"/>
+              <a:lnSpc>
+                <a:spcPct val="90000"/>
+              </a:lnSpc>
+              <a:spcAft>
+                <a:spcPts val="300"/>
               </a:spcAft>
               <a:defRPr sz="1700"/>
             </a:pPr>
             <a:r>
-              <a:rPr sz="1600"/>
+              <a:rPr sz="1400"/>
               <a:t>    • Her kişi farklı renk ile görünür</a:t>
             </a:r>
           </a:p>
           <a:p>
             <a:pPr lvl="1">
-              <a:spcAft>
-                <a:spcPts val="1000"/>
+              <a:lnSpc>
+                <a:spcPct val="90000"/>
+              </a:lnSpc>
+              <a:spcAft>
+                <a:spcPts val="300"/>
               </a:spcAft>
               <a:defRPr sz="1700"/>
             </a:pPr>
             <a:r>
-              <a:rPr sz="1600"/>
+              <a:rPr sz="1400"/>
               <a:t>    • Anlık değişiklikler</a:t>
             </a:r>
           </a:p>
           <a:p>
             <a:pPr>
-              <a:spcAft>
-                <a:spcPts val="1000"/>
-              </a:spcAft>
-              <a:defRPr sz="1900"/>
-            </a:pPr>
-          </a:p>
-          <a:p>
-            <a:pPr>
-              <a:spcAft>
-                <a:spcPts val="1000"/>
-              </a:spcAft>
-              <a:defRPr sz="1900"/>
-            </a:pPr>
-            <a:r>
-              <a:rPr sz="1600"/>
+              <a:lnSpc>
+                <a:spcPct val="90000"/>
+              </a:lnSpc>
+              <a:spcAft>
+                <a:spcPts val="300"/>
+              </a:spcAft>
+              <a:defRPr sz="1900"/>
+            </a:pPr>
+          </a:p>
+          <a:p>
+            <a:pPr>
+              <a:lnSpc>
+                <a:spcPct val="90000"/>
+              </a:lnSpc>
+              <a:spcAft>
+                <a:spcPts val="300"/>
+              </a:spcAft>
+              <a:defRPr sz="1900"/>
+            </a:pPr>
+            <a:r>
+              <a:rPr sz="1400"/>
               <a:t>✅ Yorumlar:</a:t>
             </a:r>
           </a:p>
           <a:p>
             <a:pPr lvl="1">
-              <a:spcAft>
-                <a:spcPts val="1000"/>
+              <a:lnSpc>
+                <a:spcPct val="90000"/>
+              </a:lnSpc>
+              <a:spcAft>
+                <a:spcPts val="300"/>
               </a:spcAft>
               <a:defRPr sz="1700"/>
             </a:pPr>
             <a:r>
-              <a:rPr sz="1600"/>
+              <a:rPr sz="1400"/>
               <a:t>    • Metin seç → Yorum ekle</a:t>
             </a:r>
           </a:p>
           <a:p>
             <a:pPr lvl="1">
-              <a:spcAft>
-                <a:spcPts val="1000"/>
+              <a:lnSpc>
+                <a:spcPct val="90000"/>
+              </a:lnSpc>
+              <a:spcAft>
+                <a:spcPts val="300"/>
               </a:spcAft>
               <a:defRPr sz="1700"/>
             </a:pPr>
             <a:r>
-              <a:rPr sz="1600"/>
+              <a:rPr sz="1400"/>
               <a:t>    • Geri bildirim ver</a:t>
             </a:r>
           </a:p>
           <a:p>
             <a:pPr lvl="1">
-              <a:spcAft>
-                <a:spcPts val="1000"/>
+              <a:lnSpc>
+                <a:spcPct val="90000"/>
+              </a:lnSpc>
+              <a:spcAft>
+                <a:spcPts val="300"/>
               </a:spcAft>
               <a:defRPr sz="1700"/>
             </a:pPr>
             <a:r>
-              <a:rPr sz="1600"/>
+              <a:rPr sz="1400"/>
               <a:t>    • Öneri yap</a:t>
             </a:r>
           </a:p>
           <a:p>
             <a:pPr>
-              <a:spcAft>
-                <a:spcPts val="1000"/>
-              </a:spcAft>
-              <a:defRPr sz="1900"/>
-            </a:pPr>
-          </a:p>
-          <a:p>
-            <a:pPr>
-              <a:spcAft>
-                <a:spcPts val="1000"/>
-              </a:spcAft>
-              <a:defRPr sz="1900"/>
-            </a:pPr>
-            <a:r>
-              <a:rPr sz="1600"/>
+              <a:lnSpc>
+                <a:spcPct val="90000"/>
+              </a:lnSpc>
+              <a:spcAft>
+                <a:spcPts val="300"/>
+              </a:spcAft>
+              <a:defRPr sz="1900"/>
+            </a:pPr>
+          </a:p>
+          <a:p>
+            <a:pPr>
+              <a:lnSpc>
+                <a:spcPct val="90000"/>
+              </a:lnSpc>
+              <a:spcAft>
+                <a:spcPts val="300"/>
+              </a:spcAft>
+              <a:defRPr sz="1900"/>
+            </a:pPr>
+            <a:r>
+              <a:rPr sz="1400"/>
               <a:t>✅ Sürüm Geçmişi:</a:t>
             </a:r>
           </a:p>
           <a:p>
             <a:pPr lvl="1">
-              <a:spcAft>
-                <a:spcPts val="1000"/>
+              <a:lnSpc>
+                <a:spcPct val="90000"/>
+              </a:lnSpc>
+              <a:spcAft>
+                <a:spcPts val="300"/>
               </a:spcAft>
               <a:defRPr sz="1700"/>
             </a:pPr>
             <a:r>
-              <a:rPr sz="1600"/>
+              <a:rPr sz="1400"/>
               <a:t>    • Dosya → Sürüm geçmişi</a:t>
             </a:r>
           </a:p>
           <a:p>
             <a:pPr lvl="1">
-              <a:spcAft>
-                <a:spcPts val="1000"/>
+              <a:lnSpc>
+                <a:spcPct val="90000"/>
+              </a:lnSpc>
+              <a:spcAft>
+                <a:spcPts val="300"/>
               </a:spcAft>
               <a:defRPr sz="1700"/>
             </a:pPr>
             <a:r>
-              <a:rPr sz="1600"/>
+              <a:rPr sz="1400"/>
               <a:t>    • Eski halini gör</a:t>
             </a:r>
           </a:p>
           <a:p>
             <a:pPr lvl="1">
-              <a:spcAft>
-                <a:spcPts val="1000"/>
+              <a:lnSpc>
+                <a:spcPct val="90000"/>
+              </a:lnSpc>
+              <a:spcAft>
+                <a:spcPts val="300"/>
               </a:spcAft>
               <a:defRPr sz="1700"/>
             </a:pPr>
             <a:r>
-              <a:rPr sz="1600"/>
+              <a:rPr sz="1400"/>
               <a:t>    • Geri dön</a:t>
             </a:r>
           </a:p>
           <a:p>
             <a:pPr>
-              <a:spcAft>
-                <a:spcPts val="1000"/>
-              </a:spcAft>
-              <a:defRPr sz="1900"/>
-            </a:pPr>
-          </a:p>
-          <a:p>
-            <a:pPr>
-              <a:spcAft>
-                <a:spcPts val="1000"/>
-              </a:spcAft>
-              <a:defRPr sz="1900"/>
-            </a:pPr>
-            <a:r>
-              <a:rPr sz="1600"/>
+              <a:lnSpc>
+                <a:spcPct val="90000"/>
+              </a:lnSpc>
+              <a:spcAft>
+                <a:spcPts val="300"/>
+              </a:spcAft>
+              <a:defRPr sz="1900"/>
+            </a:pPr>
+          </a:p>
+          <a:p>
+            <a:pPr>
+              <a:lnSpc>
+                <a:spcPct val="90000"/>
+              </a:lnSpc>
+              <a:spcAft>
+                <a:spcPts val="300"/>
+              </a:spcAft>
+              <a:defRPr sz="1900"/>
+            </a:pPr>
+            <a:r>
+              <a:rPr sz="1400"/>
               <a:t>✅ Etiket:</a:t>
             </a:r>
           </a:p>
           <a:p>
             <a:pPr lvl="1">
-              <a:spcAft>
-                <a:spcPts val="1000"/>
+              <a:lnSpc>
+                <a:spcPct val="90000"/>
+              </a:lnSpc>
+              <a:spcAft>
+                <a:spcPts val="300"/>
               </a:spcAft>
               <a:defRPr sz="1700"/>
             </a:pPr>
             <a:r>
-              <a:rPr sz="1600"/>
+              <a:rPr sz="1400"/>
               <a:t>    • @isim ile etiketle</a:t>
             </a:r>
           </a:p>
           <a:p>
             <a:pPr lvl="1">
-              <a:spcAft>
-                <a:spcPts val="1000"/>
+              <a:lnSpc>
+                <a:spcPct val="90000"/>
+              </a:lnSpc>
+              <a:spcAft>
+                <a:spcPts val="300"/>
               </a:spcAft>
               <a:defRPr sz="1700"/>
             </a:pPr>
             <a:r>
-              <a:rPr sz="1600"/>
+              <a:rPr sz="1400"/>
               <a:t>    • Bildirim gider</a:t>
             </a:r>
           </a:p>
           <a:p>
             <a:pPr>
-              <a:spcAft>
-                <a:spcPts val="1000"/>
-              </a:spcAft>
-              <a:defRPr sz="1900"/>
-            </a:pPr>
-          </a:p>
-          <a:p>
-            <a:pPr>
-              <a:spcAft>
-                <a:spcPts val="1000"/>
-              </a:spcAft>
-              <a:defRPr sz="1900"/>
-            </a:pPr>
-            <a:r>
-              <a:rPr sz="1600"/>
+              <a:lnSpc>
+                <a:spcPct val="90000"/>
+              </a:lnSpc>
+              <a:spcAft>
+                <a:spcPts val="300"/>
+              </a:spcAft>
+              <a:defRPr sz="1900"/>
+            </a:pPr>
+          </a:p>
+          <a:p>
+            <a:pPr>
+              <a:lnSpc>
+                <a:spcPct val="90000"/>
+              </a:lnSpc>
+              <a:spcAft>
+                <a:spcPts val="300"/>
+              </a:spcAft>
+              <a:defRPr sz="1900"/>
+            </a:pPr>
+            <a:r>
+              <a:rPr sz="1400"/>
               <a:t>💡 İşbirliği Kuralları:</a:t>
             </a:r>
           </a:p>
           <a:p>
             <a:pPr lvl="1">
-              <a:spcAft>
-                <a:spcPts val="1000"/>
+              <a:lnSpc>
+                <a:spcPct val="90000"/>
+              </a:lnSpc>
+              <a:spcAft>
+                <a:spcPts val="300"/>
               </a:spcAft>
               <a:defRPr sz="1700"/>
             </a:pPr>
             <a:r>
-              <a:rPr sz="1600"/>
+              <a:rPr sz="1400"/>
               <a:t>    • Başkasının yazısını silme</a:t>
             </a:r>
           </a:p>
           <a:p>
             <a:pPr lvl="1">
-              <a:spcAft>
-                <a:spcPts val="1000"/>
+              <a:lnSpc>
+                <a:spcPct val="90000"/>
+              </a:lnSpc>
+              <a:spcAft>
+                <a:spcPts val="300"/>
               </a:spcAft>
               <a:defRPr sz="1700"/>
             </a:pPr>
             <a:r>
-              <a:rPr sz="1600"/>
+              <a:rPr sz="1400"/>
               <a:t>    • Değişiklikleri yorum olarak öner</a:t>
             </a:r>
           </a:p>
           <a:p>
             <a:pPr lvl="1">
-              <a:spcAft>
-                <a:spcPts val="1000"/>
+              <a:lnSpc>
+                <a:spcPct val="90000"/>
+              </a:lnSpc>
+              <a:spcAft>
+                <a:spcPts val="300"/>
               </a:spcAft>
               <a:defRPr sz="1700"/>
             </a:pPr>
             <a:r>
-              <a:rPr sz="1600"/>
+              <a:rPr sz="1400"/>
               <a:t>    • İletişim kur</a:t>
             </a:r>
           </a:p>
@@ -5299,7 +5383,7 @@
         </p:nvSpPr>
         <p:spPr/>
         <p:txBody>
-          <a:bodyPr/>
+          <a:bodyPr wrap="square"/>
           <a:lstStyle/>
           <a:p>
             <a:pPr>
@@ -5353,171 +5437,241 @@
             <a:spAutoFit/>
           </a:bodyPr>
           <a:lstStyle/>
-          <a:p/>
-          <a:p>
-            <a:pPr>
-              <a:spcAft>
-                <a:spcPts val="1000"/>
-              </a:spcAft>
-              <a:defRPr sz="1900"/>
-            </a:pPr>
-            <a:r>
+          <a:p>
+            <a:pPr>
+              <a:lnSpc>
+                <a:spcPct val="90000"/>
+              </a:lnSpc>
+              <a:spcAft>
+                <a:spcPts val="300"/>
+              </a:spcAft>
+            </a:pPr>
+          </a:p>
+          <a:p>
+            <a:pPr>
+              <a:lnSpc>
+                <a:spcPct val="90000"/>
+              </a:lnSpc>
+              <a:spcAft>
+                <a:spcPts val="300"/>
+              </a:spcAft>
+              <a:defRPr sz="1900"/>
+            </a:pPr>
+            <a:r>
+              <a:rPr sz="1500"/>
               <a:t>Bu ünitede neler öğrendik?</a:t>
             </a:r>
           </a:p>
           <a:p>
             <a:pPr>
-              <a:spcAft>
-                <a:spcPts val="1000"/>
-              </a:spcAft>
-              <a:defRPr sz="1900"/>
-            </a:pPr>
-          </a:p>
-          <a:p>
-            <a:pPr>
-              <a:spcAft>
-                <a:spcPts val="1000"/>
-              </a:spcAft>
-              <a:defRPr sz="1900"/>
-            </a:pPr>
-            <a:r>
+              <a:lnSpc>
+                <a:spcPct val="90000"/>
+              </a:lnSpc>
+              <a:spcAft>
+                <a:spcPts val="300"/>
+              </a:spcAft>
+              <a:defRPr sz="1900"/>
+            </a:pPr>
+          </a:p>
+          <a:p>
+            <a:pPr>
+              <a:lnSpc>
+                <a:spcPct val="90000"/>
+              </a:lnSpc>
+              <a:spcAft>
+                <a:spcPts val="300"/>
+              </a:spcAft>
+              <a:defRPr sz="1900"/>
+            </a:pPr>
+            <a:r>
+              <a:rPr sz="1500"/>
               <a:t>✅ Kelime işlemci programları (Word, Google Docs)</a:t>
             </a:r>
           </a:p>
           <a:p>
             <a:pPr>
-              <a:spcAft>
-                <a:spcPts val="1000"/>
-              </a:spcAft>
-              <a:defRPr sz="1900"/>
-            </a:pPr>
-            <a:r>
+              <a:lnSpc>
+                <a:spcPct val="90000"/>
+              </a:lnSpc>
+              <a:spcAft>
+                <a:spcPts val="300"/>
+              </a:spcAft>
+              <a:defRPr sz="1900"/>
+            </a:pPr>
+            <a:r>
+              <a:rPr sz="1500"/>
               <a:t>✅ Metin biçimlendirme (font, boyut, stil)</a:t>
             </a:r>
           </a:p>
           <a:p>
             <a:pPr>
-              <a:spcAft>
-                <a:spcPts val="1000"/>
-              </a:spcAft>
-              <a:defRPr sz="1900"/>
-            </a:pPr>
-            <a:r>
+              <a:lnSpc>
+                <a:spcPct val="90000"/>
+              </a:lnSpc>
+              <a:spcAft>
+                <a:spcPts val="300"/>
+              </a:spcAft>
+              <a:defRPr sz="1900"/>
+            </a:pPr>
+            <a:r>
+              <a:rPr sz="1500"/>
               <a:t>✅ Paragraf ayarları (hizalama, aralık)</a:t>
             </a:r>
           </a:p>
           <a:p>
             <a:pPr>
-              <a:spcAft>
-                <a:spcPts val="1000"/>
-              </a:spcAft>
-              <a:defRPr sz="1900"/>
-            </a:pPr>
-            <a:r>
+              <a:lnSpc>
+                <a:spcPct val="90000"/>
+              </a:lnSpc>
+              <a:spcAft>
+                <a:spcPts val="300"/>
+              </a:spcAft>
+              <a:defRPr sz="1900"/>
+            </a:pPr>
+            <a:r>
+              <a:rPr sz="1500"/>
               <a:t>✅ Görsel ve şekil ekleme</a:t>
             </a:r>
           </a:p>
           <a:p>
             <a:pPr>
-              <a:spcAft>
-                <a:spcPts val="1000"/>
-              </a:spcAft>
-              <a:defRPr sz="1900"/>
-            </a:pPr>
-            <a:r>
+              <a:lnSpc>
+                <a:spcPct val="90000"/>
+              </a:lnSpc>
+              <a:spcAft>
+                <a:spcPts val="300"/>
+              </a:spcAft>
+              <a:defRPr sz="1900"/>
+            </a:pPr>
+            <a:r>
+              <a:rPr sz="1500"/>
               <a:t>✅ Tablo oluşturma ve düzenleme</a:t>
             </a:r>
           </a:p>
           <a:p>
             <a:pPr>
-              <a:spcAft>
-                <a:spcPts val="1000"/>
-              </a:spcAft>
-              <a:defRPr sz="1900"/>
-            </a:pPr>
-            <a:r>
+              <a:lnSpc>
+                <a:spcPct val="90000"/>
+              </a:lnSpc>
+              <a:spcAft>
+                <a:spcPts val="300"/>
+              </a:spcAft>
+              <a:defRPr sz="1900"/>
+            </a:pPr>
+            <a:r>
+              <a:rPr sz="1500"/>
               <a:t>✅ Sayfa düzeni ayarları</a:t>
             </a:r>
           </a:p>
           <a:p>
             <a:pPr>
-              <a:spcAft>
-                <a:spcPts val="1000"/>
-              </a:spcAft>
-              <a:defRPr sz="1900"/>
-            </a:pPr>
-            <a:r>
+              <a:lnSpc>
+                <a:spcPct val="90000"/>
+              </a:lnSpc>
+              <a:spcAft>
+                <a:spcPts val="300"/>
+              </a:spcAft>
+              <a:defRPr sz="1900"/>
+            </a:pPr>
+            <a:r>
+              <a:rPr sz="1500"/>
               <a:t>✅ Yazım denetimi</a:t>
             </a:r>
           </a:p>
           <a:p>
             <a:pPr>
-              <a:spcAft>
-                <a:spcPts val="1000"/>
-              </a:spcAft>
-              <a:defRPr sz="1900"/>
-            </a:pPr>
-            <a:r>
+              <a:lnSpc>
+                <a:spcPct val="90000"/>
+              </a:lnSpc>
+              <a:spcAft>
+                <a:spcPts val="300"/>
+              </a:spcAft>
+              <a:defRPr sz="1900"/>
+            </a:pPr>
+            <a:r>
+              <a:rPr sz="1500"/>
               <a:t>✅ Google Docs kullanımı</a:t>
             </a:r>
           </a:p>
           <a:p>
             <a:pPr>
-              <a:spcAft>
-                <a:spcPts val="1000"/>
-              </a:spcAft>
-              <a:defRPr sz="1900"/>
-            </a:pPr>
-            <a:r>
+              <a:lnSpc>
+                <a:spcPct val="90000"/>
+              </a:lnSpc>
+              <a:spcAft>
+                <a:spcPts val="300"/>
+              </a:spcAft>
+              <a:defRPr sz="1900"/>
+            </a:pPr>
+            <a:r>
+              <a:rPr sz="1500"/>
               <a:t>✅ İşbirlikli çalışma</a:t>
             </a:r>
           </a:p>
           <a:p>
             <a:pPr>
-              <a:spcAft>
-                <a:spcPts val="1000"/>
-              </a:spcAft>
-              <a:defRPr sz="1900"/>
-            </a:pPr>
-          </a:p>
-          <a:p>
-            <a:pPr>
-              <a:spcAft>
-                <a:spcPts val="1000"/>
-              </a:spcAft>
-              <a:defRPr sz="1900"/>
-            </a:pPr>
-            <a:r>
+              <a:lnSpc>
+                <a:spcPct val="90000"/>
+              </a:lnSpc>
+              <a:spcAft>
+                <a:spcPts val="300"/>
+              </a:spcAft>
+              <a:defRPr sz="1900"/>
+            </a:pPr>
+          </a:p>
+          <a:p>
+            <a:pPr>
+              <a:lnSpc>
+                <a:spcPct val="90000"/>
+              </a:lnSpc>
+              <a:spcAft>
+                <a:spcPts val="300"/>
+              </a:spcAft>
+              <a:defRPr sz="1900"/>
+            </a:pPr>
+            <a:r>
+              <a:rPr sz="1500"/>
               <a:t>💡 Anahtar Mesaj:</a:t>
             </a:r>
           </a:p>
           <a:p>
             <a:pPr>
-              <a:spcAft>
-                <a:spcPts val="1000"/>
-              </a:spcAft>
-              <a:defRPr sz="1900"/>
-            </a:pPr>
-            <a:r>
+              <a:lnSpc>
+                <a:spcPct val="90000"/>
+              </a:lnSpc>
+              <a:spcAft>
+                <a:spcPts val="300"/>
+              </a:spcAft>
+              <a:defRPr sz="1900"/>
+            </a:pPr>
+            <a:r>
+              <a:rPr sz="1500"/>
               <a:t>Profesyonel belgeler hazırlayabilirsin!</a:t>
             </a:r>
           </a:p>
           <a:p>
             <a:pPr>
-              <a:spcAft>
-                <a:spcPts val="1000"/>
-              </a:spcAft>
-              <a:defRPr sz="1900"/>
-            </a:pPr>
-          </a:p>
-          <a:p>
-            <a:pPr>
-              <a:spcAft>
-                <a:spcPts val="1000"/>
-              </a:spcAft>
-              <a:defRPr sz="1900"/>
-            </a:pPr>
-            <a:r>
+              <a:lnSpc>
+                <a:spcPct val="90000"/>
+              </a:lnSpc>
+              <a:spcAft>
+                <a:spcPts val="300"/>
+              </a:spcAft>
+              <a:defRPr sz="1900"/>
+            </a:pPr>
+          </a:p>
+          <a:p>
+            <a:pPr>
+              <a:lnSpc>
+                <a:spcPct val="90000"/>
+              </a:lnSpc>
+              <a:spcAft>
+                <a:spcPts val="300"/>
+              </a:spcAft>
+              <a:defRPr sz="1900"/>
+            </a:pPr>
+            <a:r>
+              <a:rPr sz="1500"/>
               <a:t>🎯 Artık bir ofis programları uzmanısın!</a:t>
             </a:r>
           </a:p>
@@ -5553,7 +5707,7 @@
         </p:nvSpPr>
         <p:spPr/>
         <p:txBody>
-          <a:bodyPr/>
+          <a:bodyPr wrap="square"/>
           <a:lstStyle/>
           <a:p>
             <a:pPr>
@@ -5607,174 +5761,245 @@
             <a:spAutoFit/>
           </a:bodyPr>
           <a:lstStyle/>
-          <a:p/>
-          <a:p>
-            <a:pPr>
-              <a:spcAft>
-                <a:spcPts val="1000"/>
-              </a:spcAft>
-              <a:defRPr sz="1900"/>
-            </a:pPr>
-            <a:r>
+          <a:p>
+            <a:pPr>
+              <a:lnSpc>
+                <a:spcPct val="90000"/>
+              </a:lnSpc>
+              <a:spcAft>
+                <a:spcPts val="300"/>
+              </a:spcAft>
+            </a:pPr>
+          </a:p>
+          <a:p>
+            <a:pPr>
+              <a:lnSpc>
+                <a:spcPct val="90000"/>
+              </a:lnSpc>
+              <a:spcAft>
+                <a:spcPts val="300"/>
+              </a:spcAft>
+              <a:defRPr sz="1900"/>
+            </a:pPr>
+            <a:r>
+              <a:rPr sz="1500"/>
               <a:t>Bu ünitede neler öğreneceğiz?</a:t>
             </a:r>
           </a:p>
           <a:p>
             <a:pPr>
-              <a:spcAft>
-                <a:spcPts val="1000"/>
-              </a:spcAft>
-              <a:defRPr sz="1900"/>
-            </a:pPr>
-          </a:p>
-          <a:p>
-            <a:pPr>
-              <a:spcAft>
-                <a:spcPts val="1000"/>
-              </a:spcAft>
-              <a:defRPr sz="1900"/>
-            </a:pPr>
-            <a:r>
+              <a:lnSpc>
+                <a:spcPct val="90000"/>
+              </a:lnSpc>
+              <a:spcAft>
+                <a:spcPts val="300"/>
+              </a:spcAft>
+              <a:defRPr sz="1900"/>
+            </a:pPr>
+          </a:p>
+          <a:p>
+            <a:pPr>
+              <a:lnSpc>
+                <a:spcPct val="90000"/>
+              </a:lnSpc>
+              <a:spcAft>
+                <a:spcPts val="300"/>
+              </a:spcAft>
+              <a:defRPr sz="1900"/>
+            </a:pPr>
+            <a:r>
+              <a:rPr sz="1500"/>
               <a:t>✅ 1. Ofis Programları Nedir?</a:t>
             </a:r>
           </a:p>
           <a:p>
             <a:pPr>
-              <a:spcAft>
-                <a:spcPts val="1000"/>
-              </a:spcAft>
-              <a:defRPr sz="1900"/>
-            </a:pPr>
-            <a:r>
+              <a:lnSpc>
+                <a:spcPct val="90000"/>
+              </a:lnSpc>
+              <a:spcAft>
+                <a:spcPts val="300"/>
+              </a:spcAft>
+              <a:defRPr sz="1900"/>
+            </a:pPr>
+            <a:r>
+              <a:rPr sz="1500"/>
               <a:t>✅ 2. Kelime İşlemci (Word)</a:t>
             </a:r>
           </a:p>
           <a:p>
             <a:pPr>
-              <a:spcAft>
-                <a:spcPts val="1000"/>
-              </a:spcAft>
-              <a:defRPr sz="1900"/>
-            </a:pPr>
-            <a:r>
+              <a:lnSpc>
+                <a:spcPct val="90000"/>
+              </a:lnSpc>
+              <a:spcAft>
+                <a:spcPts val="300"/>
+              </a:spcAft>
+              <a:defRPr sz="1900"/>
+            </a:pPr>
+            <a:r>
+              <a:rPr sz="1500"/>
               <a:t>✅ 3. Metin Biçimlendirme</a:t>
             </a:r>
           </a:p>
           <a:p>
             <a:pPr>
-              <a:spcAft>
-                <a:spcPts val="1000"/>
-              </a:spcAft>
-              <a:defRPr sz="1900"/>
-            </a:pPr>
-            <a:r>
+              <a:lnSpc>
+                <a:spcPct val="90000"/>
+              </a:lnSpc>
+              <a:spcAft>
+                <a:spcPts val="300"/>
+              </a:spcAft>
+              <a:defRPr sz="1900"/>
+            </a:pPr>
+            <a:r>
+              <a:rPr sz="1500"/>
               <a:t>✅ 4. Paragraf Ayarları</a:t>
             </a:r>
           </a:p>
           <a:p>
             <a:pPr>
-              <a:spcAft>
-                <a:spcPts val="1000"/>
-              </a:spcAft>
-              <a:defRPr sz="1900"/>
-            </a:pPr>
-            <a:r>
+              <a:lnSpc>
+                <a:spcPct val="90000"/>
+              </a:lnSpc>
+              <a:spcAft>
+                <a:spcPts val="300"/>
+              </a:spcAft>
+              <a:defRPr sz="1900"/>
+            </a:pPr>
+            <a:r>
+              <a:rPr sz="1500"/>
               <a:t>✅ 5. Görsel Ekleme</a:t>
             </a:r>
           </a:p>
           <a:p>
             <a:pPr>
-              <a:spcAft>
-                <a:spcPts val="1000"/>
-              </a:spcAft>
-              <a:defRPr sz="1900"/>
-            </a:pPr>
-            <a:r>
+              <a:lnSpc>
+                <a:spcPct val="90000"/>
+              </a:lnSpc>
+              <a:spcAft>
+                <a:spcPts val="300"/>
+              </a:spcAft>
+              <a:defRPr sz="1900"/>
+            </a:pPr>
+            <a:r>
+              <a:rPr sz="1500"/>
               <a:t>✅ 6. Tablo Oluşturma</a:t>
             </a:r>
           </a:p>
           <a:p>
             <a:pPr>
-              <a:spcAft>
-                <a:spcPts val="1000"/>
-              </a:spcAft>
-              <a:defRPr sz="1900"/>
-            </a:pPr>
-            <a:r>
+              <a:lnSpc>
+                <a:spcPct val="90000"/>
+              </a:lnSpc>
+              <a:spcAft>
+                <a:spcPts val="300"/>
+              </a:spcAft>
+              <a:defRPr sz="1900"/>
+            </a:pPr>
+            <a:r>
+              <a:rPr sz="1500"/>
               <a:t>✅ 7. Sayfa Düzeni</a:t>
             </a:r>
           </a:p>
           <a:p>
             <a:pPr>
-              <a:spcAft>
-                <a:spcPts val="1000"/>
-              </a:spcAft>
-              <a:defRPr sz="1900"/>
-            </a:pPr>
-            <a:r>
+              <a:lnSpc>
+                <a:spcPct val="90000"/>
+              </a:lnSpc>
+              <a:spcAft>
+                <a:spcPts val="300"/>
+              </a:spcAft>
+              <a:defRPr sz="1900"/>
+            </a:pPr>
+            <a:r>
+              <a:rPr sz="1500"/>
               <a:t>✅ 8. Yazım Denetimi</a:t>
             </a:r>
           </a:p>
           <a:p>
             <a:pPr>
-              <a:spcAft>
-                <a:spcPts val="1000"/>
-              </a:spcAft>
-              <a:defRPr sz="1900"/>
-            </a:pPr>
-            <a:r>
+              <a:lnSpc>
+                <a:spcPct val="90000"/>
+              </a:lnSpc>
+              <a:spcAft>
+                <a:spcPts val="300"/>
+              </a:spcAft>
+              <a:defRPr sz="1900"/>
+            </a:pPr>
+            <a:r>
+              <a:rPr sz="1500"/>
               <a:t>✅ 9. Yazdırma ve PDF</a:t>
             </a:r>
           </a:p>
           <a:p>
             <a:pPr>
-              <a:spcAft>
-                <a:spcPts val="1000"/>
-              </a:spcAft>
-              <a:defRPr sz="1900"/>
-            </a:pPr>
-            <a:r>
+              <a:lnSpc>
+                <a:spcPct val="90000"/>
+              </a:lnSpc>
+              <a:spcAft>
+                <a:spcPts val="300"/>
+              </a:spcAft>
+              <a:defRPr sz="1900"/>
+            </a:pPr>
+            <a:r>
+              <a:rPr sz="1500"/>
               <a:t>✅ 10. Google Docs Kullanımı</a:t>
             </a:r>
           </a:p>
           <a:p>
             <a:pPr>
-              <a:spcAft>
-                <a:spcPts val="1000"/>
-              </a:spcAft>
-              <a:defRPr sz="1900"/>
-            </a:pPr>
-            <a:r>
+              <a:lnSpc>
+                <a:spcPct val="90000"/>
+              </a:lnSpc>
+              <a:spcAft>
+                <a:spcPts val="300"/>
+              </a:spcAft>
+              <a:defRPr sz="1900"/>
+            </a:pPr>
+            <a:r>
+              <a:rPr sz="1500"/>
               <a:t>✅ 11. İşbirlikli Çalışma</a:t>
             </a:r>
           </a:p>
           <a:p>
             <a:pPr>
-              <a:spcAft>
-                <a:spcPts val="1000"/>
-              </a:spcAft>
-              <a:defRPr sz="1900"/>
-            </a:pPr>
-          </a:p>
-          <a:p>
-            <a:pPr>
-              <a:spcAft>
-                <a:spcPts val="1000"/>
-              </a:spcAft>
-              <a:defRPr sz="1900"/>
-            </a:pPr>
-            <a:r>
+              <a:lnSpc>
+                <a:spcPct val="90000"/>
+              </a:lnSpc>
+              <a:spcAft>
+                <a:spcPts val="300"/>
+              </a:spcAft>
+              <a:defRPr sz="1900"/>
+            </a:pPr>
+          </a:p>
+          <a:p>
+            <a:pPr>
+              <a:lnSpc>
+                <a:spcPct val="90000"/>
+              </a:lnSpc>
+              <a:spcAft>
+                <a:spcPts val="300"/>
+              </a:spcAft>
+              <a:defRPr sz="1900"/>
+            </a:pPr>
+            <a:r>
+              <a:rPr sz="1500"/>
               <a:t>⏰ Süre: 3 Hafta</a:t>
             </a:r>
           </a:p>
           <a:p>
             <a:pPr>
-              <a:spcAft>
-                <a:spcPts val="1000"/>
-              </a:spcAft>
-              <a:defRPr sz="1900"/>
-            </a:pPr>
-            <a:r>
+              <a:lnSpc>
+                <a:spcPct val="90000"/>
+              </a:lnSpc>
+              <a:spcAft>
+                <a:spcPts val="300"/>
+              </a:spcAft>
+              <a:defRPr sz="1900"/>
+            </a:pPr>
+            <a:r>
+              <a:rPr sz="1500"/>
               <a:t>🎯 Amaç: Profesyonel belgeler oluşturmak!</a:t>
             </a:r>
           </a:p>
@@ -5810,7 +6035,7 @@
         </p:nvSpPr>
         <p:spPr/>
         <p:txBody>
-          <a:bodyPr/>
+          <a:bodyPr wrap="square"/>
           <a:lstStyle/>
           <a:p>
             <a:pPr>
@@ -5864,220 +6089,286 @@
             <a:spAutoFit/>
           </a:bodyPr>
           <a:lstStyle/>
-          <a:p/>
-          <a:p>
-            <a:pPr>
-              <a:spcAft>
-                <a:spcPts val="1000"/>
-              </a:spcAft>
-              <a:defRPr sz="1900"/>
-            </a:pPr>
-            <a:r>
-              <a:rPr sz="1600"/>
+          <a:p>
+            <a:pPr>
+              <a:lnSpc>
+                <a:spcPct val="90000"/>
+              </a:lnSpc>
+              <a:spcAft>
+                <a:spcPts val="300"/>
+              </a:spcAft>
+            </a:pPr>
+          </a:p>
+          <a:p>
+            <a:pPr>
+              <a:lnSpc>
+                <a:spcPct val="90000"/>
+              </a:lnSpc>
+              <a:spcAft>
+                <a:spcPts val="300"/>
+              </a:spcAft>
+              <a:defRPr sz="1900"/>
+            </a:pPr>
+            <a:r>
+              <a:rPr sz="1400"/>
               <a:t>Kelime işlemci = Metin belgesi oluşturma programı</a:t>
             </a:r>
           </a:p>
           <a:p>
             <a:pPr>
-              <a:spcAft>
-                <a:spcPts val="1000"/>
-              </a:spcAft>
-              <a:defRPr sz="1900"/>
-            </a:pPr>
-          </a:p>
-          <a:p>
-            <a:pPr>
-              <a:spcAft>
-                <a:spcPts val="1000"/>
-              </a:spcAft>
-              <a:defRPr sz="1900"/>
-            </a:pPr>
-            <a:r>
-              <a:rPr sz="1600"/>
+              <a:lnSpc>
+                <a:spcPct val="90000"/>
+              </a:lnSpc>
+              <a:spcAft>
+                <a:spcPts val="300"/>
+              </a:spcAft>
+              <a:defRPr sz="1900"/>
+            </a:pPr>
+          </a:p>
+          <a:p>
+            <a:pPr>
+              <a:lnSpc>
+                <a:spcPct val="90000"/>
+              </a:lnSpc>
+              <a:spcAft>
+                <a:spcPts val="300"/>
+              </a:spcAft>
+              <a:defRPr sz="1900"/>
+            </a:pPr>
+            <a:r>
+              <a:rPr sz="1400"/>
               <a:t>✅ Popüler Kelime İşlemciler:</a:t>
             </a:r>
           </a:p>
           <a:p>
             <a:pPr lvl="1">
-              <a:spcAft>
-                <a:spcPts val="1000"/>
+              <a:lnSpc>
+                <a:spcPct val="90000"/>
+              </a:lnSpc>
+              <a:spcAft>
+                <a:spcPts val="300"/>
               </a:spcAft>
               <a:defRPr sz="1700"/>
             </a:pPr>
             <a:r>
-              <a:rPr sz="1600"/>
+              <a:rPr sz="1400"/>
               <a:t>    • Microsoft Word (ücretli)</a:t>
             </a:r>
           </a:p>
           <a:p>
             <a:pPr lvl="1">
-              <a:spcAft>
-                <a:spcPts val="1000"/>
+              <a:lnSpc>
+                <a:spcPct val="90000"/>
+              </a:lnSpc>
+              <a:spcAft>
+                <a:spcPts val="300"/>
               </a:spcAft>
               <a:defRPr sz="1700"/>
             </a:pPr>
             <a:r>
-              <a:rPr sz="1600"/>
+              <a:rPr sz="1400"/>
               <a:t>    • Google Docs (ücretsiz, online)</a:t>
             </a:r>
           </a:p>
           <a:p>
             <a:pPr lvl="1">
-              <a:spcAft>
-                <a:spcPts val="1000"/>
+              <a:lnSpc>
+                <a:spcPct val="90000"/>
+              </a:lnSpc>
+              <a:spcAft>
+                <a:spcPts val="300"/>
               </a:spcAft>
               <a:defRPr sz="1700"/>
             </a:pPr>
             <a:r>
-              <a:rPr sz="1600"/>
+              <a:rPr sz="1400"/>
               <a:t>    • LibreOffice Writer (ücretsiz)</a:t>
             </a:r>
           </a:p>
           <a:p>
             <a:pPr lvl="1">
-              <a:spcAft>
-                <a:spcPts val="1000"/>
+              <a:lnSpc>
+                <a:spcPct val="90000"/>
+              </a:lnSpc>
+              <a:spcAft>
+                <a:spcPts val="300"/>
               </a:spcAft>
               <a:defRPr sz="1700"/>
             </a:pPr>
             <a:r>
-              <a:rPr sz="1600"/>
+              <a:rPr sz="1400"/>
               <a:t>    • Pages (Apple)</a:t>
             </a:r>
           </a:p>
           <a:p>
             <a:pPr>
-              <a:spcAft>
-                <a:spcPts val="1000"/>
-              </a:spcAft>
-              <a:defRPr sz="1900"/>
-            </a:pPr>
-          </a:p>
-          <a:p>
-            <a:pPr>
-              <a:spcAft>
-                <a:spcPts val="1000"/>
-              </a:spcAft>
-              <a:defRPr sz="1900"/>
-            </a:pPr>
-            <a:r>
-              <a:rPr sz="1600"/>
+              <a:lnSpc>
+                <a:spcPct val="90000"/>
+              </a:lnSpc>
+              <a:spcAft>
+                <a:spcPts val="300"/>
+              </a:spcAft>
+              <a:defRPr sz="1900"/>
+            </a:pPr>
+          </a:p>
+          <a:p>
+            <a:pPr>
+              <a:lnSpc>
+                <a:spcPct val="90000"/>
+              </a:lnSpc>
+              <a:spcAft>
+                <a:spcPts val="300"/>
+              </a:spcAft>
+              <a:defRPr sz="1900"/>
+            </a:pPr>
+            <a:r>
+              <a:rPr sz="1400"/>
               <a:t>📌 Ne İçin Kullanılır?</a:t>
             </a:r>
           </a:p>
           <a:p>
             <a:pPr lvl="1">
-              <a:spcAft>
-                <a:spcPts val="1000"/>
+              <a:lnSpc>
+                <a:spcPct val="90000"/>
+              </a:lnSpc>
+              <a:spcAft>
+                <a:spcPts val="300"/>
               </a:spcAft>
               <a:defRPr sz="1700"/>
             </a:pPr>
             <a:r>
-              <a:rPr sz="1600"/>
+              <a:rPr sz="1400"/>
               <a:t>    • Ödev yazmak</a:t>
             </a:r>
           </a:p>
           <a:p>
             <a:pPr lvl="1">
-              <a:spcAft>
-                <a:spcPts val="1000"/>
+              <a:lnSpc>
+                <a:spcPct val="90000"/>
+              </a:lnSpc>
+              <a:spcAft>
+                <a:spcPts val="300"/>
               </a:spcAft>
               <a:defRPr sz="1700"/>
             </a:pPr>
             <a:r>
-              <a:rPr sz="1600"/>
+              <a:rPr sz="1400"/>
               <a:t>    • Rapor hazırlamak</a:t>
             </a:r>
           </a:p>
           <a:p>
             <a:pPr lvl="1">
-              <a:spcAft>
-                <a:spcPts val="1000"/>
+              <a:lnSpc>
+                <a:spcPct val="90000"/>
+              </a:lnSpc>
+              <a:spcAft>
+                <a:spcPts val="300"/>
               </a:spcAft>
               <a:defRPr sz="1700"/>
             </a:pPr>
             <a:r>
-              <a:rPr sz="1600"/>
+              <a:rPr sz="1400"/>
               <a:t>    • Mektup yazmak</a:t>
             </a:r>
           </a:p>
           <a:p>
             <a:pPr lvl="1">
-              <a:spcAft>
-                <a:spcPts val="1000"/>
+              <a:lnSpc>
+                <a:spcPct val="90000"/>
+              </a:lnSpc>
+              <a:spcAft>
+                <a:spcPts val="300"/>
               </a:spcAft>
               <a:defRPr sz="1700"/>
             </a:pPr>
             <a:r>
-              <a:rPr sz="1600"/>
+              <a:rPr sz="1400"/>
               <a:t>    • Poster tasarlamak</a:t>
             </a:r>
           </a:p>
           <a:p>
             <a:pPr>
-              <a:spcAft>
-                <a:spcPts val="1000"/>
-              </a:spcAft>
-              <a:defRPr sz="1900"/>
-            </a:pPr>
-          </a:p>
-          <a:p>
-            <a:pPr>
-              <a:spcAft>
-                <a:spcPts val="1000"/>
-              </a:spcAft>
-              <a:defRPr sz="1900"/>
-            </a:pPr>
-            <a:r>
-              <a:rPr sz="1600"/>
+              <a:lnSpc>
+                <a:spcPct val="90000"/>
+              </a:lnSpc>
+              <a:spcAft>
+                <a:spcPts val="300"/>
+              </a:spcAft>
+              <a:defRPr sz="1900"/>
+            </a:pPr>
+          </a:p>
+          <a:p>
+            <a:pPr>
+              <a:lnSpc>
+                <a:spcPct val="90000"/>
+              </a:lnSpc>
+              <a:spcAft>
+                <a:spcPts val="300"/>
+              </a:spcAft>
+              <a:defRPr sz="1900"/>
+            </a:pPr>
+            <a:r>
+              <a:rPr sz="1400"/>
               <a:t>💡 Avantajları:</a:t>
             </a:r>
           </a:p>
           <a:p>
             <a:pPr lvl="1">
-              <a:spcAft>
-                <a:spcPts val="1000"/>
+              <a:lnSpc>
+                <a:spcPct val="90000"/>
+              </a:lnSpc>
+              <a:spcAft>
+                <a:spcPts val="300"/>
               </a:spcAft>
               <a:defRPr sz="1700"/>
             </a:pPr>
             <a:r>
-              <a:rPr sz="1600"/>
+              <a:rPr sz="1400"/>
               <a:t>    • Düzenleme kolay</a:t>
             </a:r>
           </a:p>
           <a:p>
             <a:pPr lvl="1">
-              <a:spcAft>
-                <a:spcPts val="1000"/>
+              <a:lnSpc>
+                <a:spcPct val="90000"/>
+              </a:lnSpc>
+              <a:spcAft>
+                <a:spcPts val="300"/>
               </a:spcAft>
               <a:defRPr sz="1700"/>
             </a:pPr>
             <a:r>
-              <a:rPr sz="1600"/>
+              <a:rPr sz="1400"/>
               <a:t>    • Yazım hatalarını bulur</a:t>
             </a:r>
           </a:p>
           <a:p>
             <a:pPr lvl="1">
-              <a:spcAft>
-                <a:spcPts val="1000"/>
+              <a:lnSpc>
+                <a:spcPct val="90000"/>
+              </a:lnSpc>
+              <a:spcAft>
+                <a:spcPts val="300"/>
               </a:spcAft>
               <a:defRPr sz="1700"/>
             </a:pPr>
             <a:r>
-              <a:rPr sz="1600"/>
+              <a:rPr sz="1400"/>
               <a:t>    • Güzel görünüm</a:t>
             </a:r>
           </a:p>
           <a:p>
             <a:pPr lvl="1">
-              <a:spcAft>
-                <a:spcPts val="1000"/>
+              <a:lnSpc>
+                <a:spcPct val="90000"/>
+              </a:lnSpc>
+              <a:spcAft>
+                <a:spcPts val="300"/>
               </a:spcAft>
               <a:defRPr sz="1700"/>
             </a:pPr>
             <a:r>
-              <a:rPr sz="1600"/>
+              <a:rPr sz="1400"/>
               <a:t>    • Yazdırma/paylaşma kolay</a:t>
             </a:r>
           </a:p>
@@ -6113,7 +6404,7 @@
         </p:nvSpPr>
         <p:spPr/>
         <p:txBody>
-          <a:bodyPr/>
+          <a:bodyPr wrap="square"/>
           <a:lstStyle/>
           <a:p>
             <a:pPr>
@@ -6167,220 +6458,308 @@
             <a:spAutoFit/>
           </a:bodyPr>
           <a:lstStyle/>
-          <a:p/>
-          <a:p>
-            <a:pPr>
-              <a:spcAft>
-                <a:spcPts val="1000"/>
-              </a:spcAft>
-              <a:defRPr sz="1900"/>
-            </a:pPr>
-            <a:r>
+          <a:p>
+            <a:pPr>
+              <a:lnSpc>
+                <a:spcPct val="90000"/>
+              </a:lnSpc>
+              <a:spcAft>
+                <a:spcPts val="300"/>
+              </a:spcAft>
+            </a:pPr>
+          </a:p>
+          <a:p>
+            <a:pPr>
+              <a:lnSpc>
+                <a:spcPct val="90000"/>
+              </a:lnSpc>
+              <a:spcAft>
+                <a:spcPts val="300"/>
+              </a:spcAft>
+              <a:defRPr sz="1900"/>
+            </a:pPr>
+            <a:r>
+              <a:rPr sz="1500"/>
               <a:t>Metni güzelleştirmek ve vurgu yapmak</a:t>
             </a:r>
           </a:p>
           <a:p>
             <a:pPr>
-              <a:spcAft>
-                <a:spcPts val="1000"/>
-              </a:spcAft>
-              <a:defRPr sz="1900"/>
-            </a:pPr>
-          </a:p>
-          <a:p>
-            <a:pPr>
-              <a:spcAft>
-                <a:spcPts val="1000"/>
-              </a:spcAft>
-              <a:defRPr sz="1900"/>
-            </a:pPr>
-            <a:r>
+              <a:lnSpc>
+                <a:spcPct val="90000"/>
+              </a:lnSpc>
+              <a:spcAft>
+                <a:spcPts val="300"/>
+              </a:spcAft>
+              <a:defRPr sz="1900"/>
+            </a:pPr>
+          </a:p>
+          <a:p>
+            <a:pPr>
+              <a:lnSpc>
+                <a:spcPct val="90000"/>
+              </a:lnSpc>
+              <a:spcAft>
+                <a:spcPts val="300"/>
+              </a:spcAft>
+              <a:defRPr sz="1900"/>
+            </a:pPr>
+            <a:r>
+              <a:rPr sz="1500"/>
               <a:t>✅ Yazı Tipi (Font):</a:t>
             </a:r>
           </a:p>
           <a:p>
             <a:pPr lvl="1">
-              <a:spcAft>
-                <a:spcPts val="1000"/>
+              <a:lnSpc>
+                <a:spcPct val="90000"/>
+              </a:lnSpc>
+              <a:spcAft>
+                <a:spcPts val="300"/>
               </a:spcAft>
               <a:defRPr sz="1700"/>
             </a:pPr>
             <a:r>
+              <a:rPr sz="1500"/>
               <a:t>    • Arial, Times New Roman, Calibri</a:t>
             </a:r>
           </a:p>
           <a:p>
             <a:pPr lvl="1">
-              <a:spcAft>
-                <a:spcPts val="1000"/>
+              <a:lnSpc>
+                <a:spcPct val="90000"/>
+              </a:lnSpc>
+              <a:spcAft>
+                <a:spcPts val="300"/>
               </a:spcAft>
               <a:defRPr sz="1700"/>
             </a:pPr>
             <a:r>
+              <a:rPr sz="1500"/>
               <a:t>    • Resmi belgeler: Times New Roman</a:t>
             </a:r>
           </a:p>
           <a:p>
             <a:pPr lvl="1">
-              <a:spcAft>
-                <a:spcPts val="1000"/>
+              <a:lnSpc>
+                <a:spcPct val="90000"/>
+              </a:lnSpc>
+              <a:spcAft>
+                <a:spcPts val="300"/>
               </a:spcAft>
               <a:defRPr sz="1700"/>
             </a:pPr>
             <a:r>
+              <a:rPr sz="1500"/>
               <a:t>    • Modern: Calibri, Arial</a:t>
             </a:r>
           </a:p>
           <a:p>
             <a:pPr>
-              <a:spcAft>
-                <a:spcPts val="1000"/>
-              </a:spcAft>
-              <a:defRPr sz="1900"/>
-            </a:pPr>
-          </a:p>
-          <a:p>
-            <a:pPr>
-              <a:spcAft>
-                <a:spcPts val="1000"/>
-              </a:spcAft>
-              <a:defRPr sz="1900"/>
-            </a:pPr>
-            <a:r>
+              <a:lnSpc>
+                <a:spcPct val="90000"/>
+              </a:lnSpc>
+              <a:spcAft>
+                <a:spcPts val="300"/>
+              </a:spcAft>
+              <a:defRPr sz="1900"/>
+            </a:pPr>
+          </a:p>
+          <a:p>
+            <a:pPr>
+              <a:lnSpc>
+                <a:spcPct val="90000"/>
+              </a:lnSpc>
+              <a:spcAft>
+                <a:spcPts val="300"/>
+              </a:spcAft>
+              <a:defRPr sz="1900"/>
+            </a:pPr>
+            <a:r>
+              <a:rPr sz="1500"/>
               <a:t>✅ Boyut:</a:t>
             </a:r>
           </a:p>
           <a:p>
             <a:pPr lvl="1">
-              <a:spcAft>
-                <a:spcPts val="1000"/>
+              <a:lnSpc>
+                <a:spcPct val="90000"/>
+              </a:lnSpc>
+              <a:spcAft>
+                <a:spcPts val="300"/>
               </a:spcAft>
               <a:defRPr sz="1700"/>
             </a:pPr>
             <a:r>
+              <a:rPr sz="1500"/>
               <a:t>    • Başlıklar: 14-18 pt</a:t>
             </a:r>
           </a:p>
           <a:p>
             <a:pPr lvl="1">
-              <a:spcAft>
-                <a:spcPts val="1000"/>
+              <a:lnSpc>
+                <a:spcPct val="90000"/>
+              </a:lnSpc>
+              <a:spcAft>
+                <a:spcPts val="300"/>
               </a:spcAft>
               <a:defRPr sz="1700"/>
             </a:pPr>
             <a:r>
+              <a:rPr sz="1500"/>
               <a:t>    • Normal metin: 11-12 pt</a:t>
             </a:r>
           </a:p>
           <a:p>
             <a:pPr>
-              <a:spcAft>
-                <a:spcPts val="1000"/>
-              </a:spcAft>
-              <a:defRPr sz="1900"/>
-            </a:pPr>
-          </a:p>
-          <a:p>
-            <a:pPr>
-              <a:spcAft>
-                <a:spcPts val="1000"/>
-              </a:spcAft>
-              <a:defRPr sz="1900"/>
-            </a:pPr>
-            <a:r>
+              <a:lnSpc>
+                <a:spcPct val="90000"/>
+              </a:lnSpc>
+              <a:spcAft>
+                <a:spcPts val="300"/>
+              </a:spcAft>
+              <a:defRPr sz="1900"/>
+            </a:pPr>
+          </a:p>
+          <a:p>
+            <a:pPr>
+              <a:lnSpc>
+                <a:spcPct val="90000"/>
+              </a:lnSpc>
+              <a:spcAft>
+                <a:spcPts val="300"/>
+              </a:spcAft>
+              <a:defRPr sz="1900"/>
+            </a:pPr>
+            <a:r>
+              <a:rPr sz="1500"/>
               <a:t>✅ Stil:</a:t>
             </a:r>
           </a:p>
           <a:p>
             <a:pPr lvl="1">
-              <a:spcAft>
-                <a:spcPts val="1000"/>
+              <a:lnSpc>
+                <a:spcPct val="90000"/>
+              </a:lnSpc>
+              <a:spcAft>
+                <a:spcPts val="300"/>
               </a:spcAft>
               <a:defRPr sz="1700"/>
             </a:pPr>
             <a:r>
+              <a:rPr sz="1500"/>
               <a:t>    • Kalın (Bold): Ctrl+B</a:t>
             </a:r>
           </a:p>
           <a:p>
             <a:pPr lvl="1">
-              <a:spcAft>
-                <a:spcPts val="1000"/>
+              <a:lnSpc>
+                <a:spcPct val="90000"/>
+              </a:lnSpc>
+              <a:spcAft>
+                <a:spcPts val="300"/>
               </a:spcAft>
               <a:defRPr sz="1700"/>
             </a:pPr>
             <a:r>
+              <a:rPr sz="1500"/>
               <a:t>    • İtalik: Ctrl+I</a:t>
             </a:r>
           </a:p>
           <a:p>
             <a:pPr lvl="1">
-              <a:spcAft>
-                <a:spcPts val="1000"/>
+              <a:lnSpc>
+                <a:spcPct val="90000"/>
+              </a:lnSpc>
+              <a:spcAft>
+                <a:spcPts val="300"/>
               </a:spcAft>
               <a:defRPr sz="1700"/>
             </a:pPr>
             <a:r>
+              <a:rPr sz="1500"/>
               <a:t>    • Altı Çizili: Ctrl+U</a:t>
             </a:r>
           </a:p>
           <a:p>
             <a:pPr>
-              <a:spcAft>
-                <a:spcPts val="1000"/>
-              </a:spcAft>
-              <a:defRPr sz="1900"/>
-            </a:pPr>
-          </a:p>
-          <a:p>
-            <a:pPr>
-              <a:spcAft>
-                <a:spcPts val="1000"/>
-              </a:spcAft>
-              <a:defRPr sz="1900"/>
-            </a:pPr>
-            <a:r>
+              <a:lnSpc>
+                <a:spcPct val="90000"/>
+              </a:lnSpc>
+              <a:spcAft>
+                <a:spcPts val="300"/>
+              </a:spcAft>
+              <a:defRPr sz="1900"/>
+            </a:pPr>
+          </a:p>
+          <a:p>
+            <a:pPr>
+              <a:lnSpc>
+                <a:spcPct val="90000"/>
+              </a:lnSpc>
+              <a:spcAft>
+                <a:spcPts val="300"/>
+              </a:spcAft>
+              <a:defRPr sz="1900"/>
+            </a:pPr>
+            <a:r>
+              <a:rPr sz="1500"/>
               <a:t>✅ Renk:</a:t>
             </a:r>
           </a:p>
           <a:p>
             <a:pPr lvl="1">
-              <a:spcAft>
-                <a:spcPts val="1000"/>
+              <a:lnSpc>
+                <a:spcPct val="90000"/>
+              </a:lnSpc>
+              <a:spcAft>
+                <a:spcPts val="300"/>
               </a:spcAft>
               <a:defRPr sz="1700"/>
             </a:pPr>
             <a:r>
+              <a:rPr sz="1500"/>
               <a:t>    • Siyah = Normal</a:t>
             </a:r>
           </a:p>
           <a:p>
             <a:pPr lvl="1">
-              <a:spcAft>
-                <a:spcPts val="1000"/>
+              <a:lnSpc>
+                <a:spcPct val="90000"/>
+              </a:lnSpc>
+              <a:spcAft>
+                <a:spcPts val="300"/>
               </a:spcAft>
               <a:defRPr sz="1700"/>
             </a:pPr>
             <a:r>
+              <a:rPr sz="1500"/>
               <a:t>    • Renkler = Vurgu için</a:t>
             </a:r>
           </a:p>
           <a:p>
             <a:pPr>
-              <a:spcAft>
-                <a:spcPts val="1000"/>
-              </a:spcAft>
-              <a:defRPr sz="1900"/>
-            </a:pPr>
-          </a:p>
-          <a:p>
-            <a:pPr>
-              <a:spcAft>
-                <a:spcPts val="1000"/>
-              </a:spcAft>
-              <a:defRPr sz="1900"/>
-            </a:pPr>
-            <a:r>
+              <a:lnSpc>
+                <a:spcPct val="90000"/>
+              </a:lnSpc>
+              <a:spcAft>
+                <a:spcPts val="300"/>
+              </a:spcAft>
+              <a:defRPr sz="1900"/>
+            </a:pPr>
+          </a:p>
+          <a:p>
+            <a:pPr>
+              <a:lnSpc>
+                <a:spcPct val="90000"/>
+              </a:lnSpc>
+              <a:spcAft>
+                <a:spcPts val="300"/>
+              </a:spcAft>
+              <a:defRPr sz="1900"/>
+            </a:pPr>
+            <a:r>
+              <a:rPr sz="1500"/>
               <a:t>💡 Fazla biçimlendirme karmaşık görünür!</a:t>
             </a:r>
           </a:p>
@@ -6416,7 +6795,7 @@
         </p:nvSpPr>
         <p:spPr/>
         <p:txBody>
-          <a:bodyPr/>
+          <a:bodyPr wrap="square"/>
           <a:lstStyle/>
           <a:p>
             <a:pPr>
@@ -6470,231 +6849,323 @@
             <a:spAutoFit/>
           </a:bodyPr>
           <a:lstStyle/>
-          <a:p/>
-          <a:p>
-            <a:pPr>
-              <a:spcAft>
-                <a:spcPts val="1000"/>
-              </a:spcAft>
-              <a:defRPr sz="1900"/>
-            </a:pPr>
-            <a:r>
+          <a:p>
+            <a:pPr>
+              <a:lnSpc>
+                <a:spcPct val="90000"/>
+              </a:lnSpc>
+              <a:spcAft>
+                <a:spcPts val="300"/>
+              </a:spcAft>
+            </a:pPr>
+          </a:p>
+          <a:p>
+            <a:pPr>
+              <a:lnSpc>
+                <a:spcPct val="90000"/>
+              </a:lnSpc>
+              <a:spcAft>
+                <a:spcPts val="300"/>
+              </a:spcAft>
+              <a:defRPr sz="1900"/>
+            </a:pPr>
+            <a:r>
+              <a:rPr sz="1500"/>
               <a:t>Paragrafları düzenlemek</a:t>
             </a:r>
           </a:p>
           <a:p>
             <a:pPr>
-              <a:spcAft>
-                <a:spcPts val="1000"/>
-              </a:spcAft>
-              <a:defRPr sz="1900"/>
-            </a:pPr>
-          </a:p>
-          <a:p>
-            <a:pPr>
-              <a:spcAft>
-                <a:spcPts val="1000"/>
-              </a:spcAft>
-              <a:defRPr sz="1900"/>
-            </a:pPr>
-            <a:r>
+              <a:lnSpc>
+                <a:spcPct val="90000"/>
+              </a:lnSpc>
+              <a:spcAft>
+                <a:spcPts val="300"/>
+              </a:spcAft>
+              <a:defRPr sz="1900"/>
+            </a:pPr>
+          </a:p>
+          <a:p>
+            <a:pPr>
+              <a:lnSpc>
+                <a:spcPct val="90000"/>
+              </a:lnSpc>
+              <a:spcAft>
+                <a:spcPts val="300"/>
+              </a:spcAft>
+              <a:defRPr sz="1900"/>
+            </a:pPr>
+            <a:r>
+              <a:rPr sz="1500"/>
               <a:t>✅ Hizalama:</a:t>
             </a:r>
           </a:p>
           <a:p>
             <a:pPr lvl="1">
-              <a:spcAft>
-                <a:spcPts val="1000"/>
+              <a:lnSpc>
+                <a:spcPct val="90000"/>
+              </a:lnSpc>
+              <a:spcAft>
+                <a:spcPts val="300"/>
               </a:spcAft>
               <a:defRPr sz="1700"/>
             </a:pPr>
             <a:r>
+              <a:rPr sz="1500"/>
               <a:t>    • Sola: Ctrl+L</a:t>
             </a:r>
           </a:p>
           <a:p>
             <a:pPr lvl="1">
-              <a:spcAft>
-                <a:spcPts val="1000"/>
+              <a:lnSpc>
+                <a:spcPct val="90000"/>
+              </a:lnSpc>
+              <a:spcAft>
+                <a:spcPts val="300"/>
               </a:spcAft>
               <a:defRPr sz="1700"/>
             </a:pPr>
             <a:r>
+              <a:rPr sz="1500"/>
               <a:t>    • Ortala: Ctrl+E</a:t>
             </a:r>
           </a:p>
           <a:p>
             <a:pPr lvl="1">
-              <a:spcAft>
-                <a:spcPts val="1000"/>
+              <a:lnSpc>
+                <a:spcPct val="90000"/>
+              </a:lnSpc>
+              <a:spcAft>
+                <a:spcPts val="300"/>
               </a:spcAft>
               <a:defRPr sz="1700"/>
             </a:pPr>
             <a:r>
+              <a:rPr sz="1500"/>
               <a:t>    • Sağa: Ctrl+R</a:t>
             </a:r>
           </a:p>
           <a:p>
             <a:pPr lvl="1">
-              <a:spcAft>
-                <a:spcPts val="1000"/>
+              <a:lnSpc>
+                <a:spcPct val="90000"/>
+              </a:lnSpc>
+              <a:spcAft>
+                <a:spcPts val="300"/>
               </a:spcAft>
               <a:defRPr sz="1700"/>
             </a:pPr>
             <a:r>
+              <a:rPr sz="1500"/>
               <a:t>    • İki Yana Yasla: Ctrl+J (resmi belgeler)</a:t>
             </a:r>
           </a:p>
           <a:p>
             <a:pPr>
-              <a:spcAft>
-                <a:spcPts val="1000"/>
-              </a:spcAft>
-              <a:defRPr sz="1900"/>
-            </a:pPr>
-          </a:p>
-          <a:p>
-            <a:pPr>
-              <a:spcAft>
-                <a:spcPts val="1000"/>
-              </a:spcAft>
-              <a:defRPr sz="1900"/>
-            </a:pPr>
-            <a:r>
+              <a:lnSpc>
+                <a:spcPct val="90000"/>
+              </a:lnSpc>
+              <a:spcAft>
+                <a:spcPts val="300"/>
+              </a:spcAft>
+              <a:defRPr sz="1900"/>
+            </a:pPr>
+          </a:p>
+          <a:p>
+            <a:pPr>
+              <a:lnSpc>
+                <a:spcPct val="90000"/>
+              </a:lnSpc>
+              <a:spcAft>
+                <a:spcPts val="300"/>
+              </a:spcAft>
+              <a:defRPr sz="1900"/>
+            </a:pPr>
+            <a:r>
+              <a:rPr sz="1500"/>
               <a:t>✅ Satır Aralığı:</a:t>
             </a:r>
           </a:p>
           <a:p>
             <a:pPr lvl="1">
-              <a:spcAft>
-                <a:spcPts val="1000"/>
+              <a:lnSpc>
+                <a:spcPct val="90000"/>
+              </a:lnSpc>
+              <a:spcAft>
+                <a:spcPts val="300"/>
               </a:spcAft>
               <a:defRPr sz="1700"/>
             </a:pPr>
             <a:r>
+              <a:rPr sz="1500"/>
               <a:t>    • Tek: Normal</a:t>
             </a:r>
           </a:p>
           <a:p>
             <a:pPr lvl="1">
-              <a:spcAft>
-                <a:spcPts val="1000"/>
+              <a:lnSpc>
+                <a:spcPct val="90000"/>
+              </a:lnSpc>
+              <a:spcAft>
+                <a:spcPts val="300"/>
               </a:spcAft>
               <a:defRPr sz="1700"/>
             </a:pPr>
             <a:r>
+              <a:rPr sz="1500"/>
               <a:t>    • 1.5: Ödev</a:t>
             </a:r>
           </a:p>
           <a:p>
             <a:pPr lvl="1">
-              <a:spcAft>
-                <a:spcPts val="1000"/>
+              <a:lnSpc>
+                <a:spcPct val="90000"/>
+              </a:lnSpc>
+              <a:spcAft>
+                <a:spcPts val="300"/>
               </a:spcAft>
               <a:defRPr sz="1700"/>
             </a:pPr>
             <a:r>
+              <a:rPr sz="1500"/>
               <a:t>    • 2: Çift aralık</a:t>
             </a:r>
           </a:p>
           <a:p>
             <a:pPr>
-              <a:spcAft>
-                <a:spcPts val="1000"/>
-              </a:spcAft>
-              <a:defRPr sz="1900"/>
-            </a:pPr>
-          </a:p>
-          <a:p>
-            <a:pPr>
-              <a:spcAft>
-                <a:spcPts val="1000"/>
-              </a:spcAft>
-              <a:defRPr sz="1900"/>
-            </a:pPr>
-            <a:r>
+              <a:lnSpc>
+                <a:spcPct val="90000"/>
+              </a:lnSpc>
+              <a:spcAft>
+                <a:spcPts val="300"/>
+              </a:spcAft>
+              <a:defRPr sz="1900"/>
+            </a:pPr>
+          </a:p>
+          <a:p>
+            <a:pPr>
+              <a:lnSpc>
+                <a:spcPct val="90000"/>
+              </a:lnSpc>
+              <a:spcAft>
+                <a:spcPts val="300"/>
+              </a:spcAft>
+              <a:defRPr sz="1900"/>
+            </a:pPr>
+            <a:r>
+              <a:rPr sz="1500"/>
               <a:t>✅ Girintiler:</a:t>
             </a:r>
           </a:p>
           <a:p>
             <a:pPr lvl="1">
-              <a:spcAft>
-                <a:spcPts val="1000"/>
+              <a:lnSpc>
+                <a:spcPct val="90000"/>
+              </a:lnSpc>
+              <a:spcAft>
+                <a:spcPts val="300"/>
               </a:spcAft>
               <a:defRPr sz="1700"/>
             </a:pPr>
             <a:r>
+              <a:rPr sz="1500"/>
               <a:t>    • İlk satır girintisi</a:t>
             </a:r>
           </a:p>
           <a:p>
             <a:pPr lvl="1">
-              <a:spcAft>
-                <a:spcPts val="1000"/>
+              <a:lnSpc>
+                <a:spcPct val="90000"/>
+              </a:lnSpc>
+              <a:spcAft>
+                <a:spcPts val="300"/>
               </a:spcAft>
               <a:defRPr sz="1700"/>
             </a:pPr>
             <a:r>
+              <a:rPr sz="1500"/>
               <a:t>    • Sol/Sağ girinti</a:t>
             </a:r>
           </a:p>
           <a:p>
             <a:pPr>
-              <a:spcAft>
-                <a:spcPts val="1000"/>
-              </a:spcAft>
-              <a:defRPr sz="1900"/>
-            </a:pPr>
-          </a:p>
-          <a:p>
-            <a:pPr>
-              <a:spcAft>
-                <a:spcPts val="1000"/>
-              </a:spcAft>
-              <a:defRPr sz="1900"/>
-            </a:pPr>
-            <a:r>
+              <a:lnSpc>
+                <a:spcPct val="90000"/>
+              </a:lnSpc>
+              <a:spcAft>
+                <a:spcPts val="300"/>
+              </a:spcAft>
+              <a:defRPr sz="1900"/>
+            </a:pPr>
+          </a:p>
+          <a:p>
+            <a:pPr>
+              <a:lnSpc>
+                <a:spcPct val="90000"/>
+              </a:lnSpc>
+              <a:spcAft>
+                <a:spcPts val="300"/>
+              </a:spcAft>
+              <a:defRPr sz="1900"/>
+            </a:pPr>
+            <a:r>
+              <a:rPr sz="1500"/>
               <a:t>✅ Madde İşaretleri:</a:t>
             </a:r>
           </a:p>
           <a:p>
             <a:pPr lvl="1">
-              <a:spcAft>
-                <a:spcPts val="1000"/>
+              <a:lnSpc>
+                <a:spcPct val="90000"/>
+              </a:lnSpc>
+              <a:spcAft>
+                <a:spcPts val="300"/>
               </a:spcAft>
               <a:defRPr sz="1700"/>
             </a:pPr>
             <a:r>
+              <a:rPr sz="1500"/>
               <a:t>    • Madde listesi</a:t>
             </a:r>
           </a:p>
           <a:p>
             <a:pPr lvl="1">
-              <a:spcAft>
-                <a:spcPts val="1000"/>
+              <a:lnSpc>
+                <a:spcPct val="90000"/>
+              </a:lnSpc>
+              <a:spcAft>
+                <a:spcPts val="300"/>
               </a:spcAft>
               <a:defRPr sz="1700"/>
             </a:pPr>
             <a:r>
+              <a:rPr sz="1500"/>
               <a:t>    • Numaralı liste</a:t>
             </a:r>
           </a:p>
           <a:p>
             <a:pPr>
-              <a:spcAft>
-                <a:spcPts val="1000"/>
-              </a:spcAft>
-              <a:defRPr sz="1900"/>
-            </a:pPr>
-          </a:p>
-          <a:p>
-            <a:pPr>
-              <a:spcAft>
-                <a:spcPts val="1000"/>
-              </a:spcAft>
-              <a:defRPr sz="1900"/>
-            </a:pPr>
-            <a:r>
+              <a:lnSpc>
+                <a:spcPct val="90000"/>
+              </a:lnSpc>
+              <a:spcAft>
+                <a:spcPts val="300"/>
+              </a:spcAft>
+              <a:defRPr sz="1900"/>
+            </a:pPr>
+          </a:p>
+          <a:p>
+            <a:pPr>
+              <a:lnSpc>
+                <a:spcPct val="90000"/>
+              </a:lnSpc>
+              <a:spcAft>
+                <a:spcPts val="300"/>
+              </a:spcAft>
+              <a:defRPr sz="1900"/>
+            </a:pPr>
+            <a:r>
+              <a:rPr sz="1500"/>
               <a:t>💡 Resmi belgeler: İki yana yaslı, 1.5 satır aralığı</a:t>
             </a:r>
           </a:p>
@@ -6730,7 +7201,7 @@
         </p:nvSpPr>
         <p:spPr/>
         <p:txBody>
-          <a:bodyPr/>
+          <a:bodyPr wrap="square"/>
           <a:lstStyle/>
           <a:p>
             <a:pPr>
@@ -6784,248 +7255,323 @@
             <a:spAutoFit/>
           </a:bodyPr>
           <a:lstStyle/>
-          <a:p/>
-          <a:p>
-            <a:pPr>
-              <a:spcAft>
-                <a:spcPts val="1000"/>
-              </a:spcAft>
-              <a:defRPr sz="1900"/>
-            </a:pPr>
-            <a:r>
-              <a:rPr sz="1600"/>
+          <a:p>
+            <a:pPr>
+              <a:lnSpc>
+                <a:spcPct val="90000"/>
+              </a:lnSpc>
+              <a:spcAft>
+                <a:spcPts val="300"/>
+              </a:spcAft>
+            </a:pPr>
+          </a:p>
+          <a:p>
+            <a:pPr>
+              <a:lnSpc>
+                <a:spcPct val="90000"/>
+              </a:lnSpc>
+              <a:spcAft>
+                <a:spcPts val="300"/>
+              </a:spcAft>
+              <a:defRPr sz="1900"/>
+            </a:pPr>
+            <a:r>
+              <a:rPr sz="1400"/>
               <a:t>Belgeye görsel katmak</a:t>
             </a:r>
           </a:p>
           <a:p>
             <a:pPr>
-              <a:spcAft>
-                <a:spcPts val="1000"/>
-              </a:spcAft>
-              <a:defRPr sz="1900"/>
-            </a:pPr>
-          </a:p>
-          <a:p>
-            <a:pPr>
-              <a:spcAft>
-                <a:spcPts val="1000"/>
-              </a:spcAft>
-              <a:defRPr sz="1900"/>
-            </a:pPr>
-            <a:r>
-              <a:rPr sz="1600"/>
+              <a:lnSpc>
+                <a:spcPct val="90000"/>
+              </a:lnSpc>
+              <a:spcAft>
+                <a:spcPts val="300"/>
+              </a:spcAft>
+              <a:defRPr sz="1900"/>
+            </a:pPr>
+          </a:p>
+          <a:p>
+            <a:pPr>
+              <a:lnSpc>
+                <a:spcPct val="90000"/>
+              </a:lnSpc>
+              <a:spcAft>
+                <a:spcPts val="300"/>
+              </a:spcAft>
+              <a:defRPr sz="1900"/>
+            </a:pPr>
+            <a:r>
+              <a:rPr sz="1400"/>
               <a:t>✅ Resim Ekleme:</a:t>
             </a:r>
           </a:p>
           <a:p>
             <a:pPr lvl="1">
-              <a:spcAft>
-                <a:spcPts val="1000"/>
+              <a:lnSpc>
+                <a:spcPct val="90000"/>
+              </a:lnSpc>
+              <a:spcAft>
+                <a:spcPts val="300"/>
               </a:spcAft>
               <a:defRPr sz="1700"/>
             </a:pPr>
             <a:r>
-              <a:rPr sz="1600"/>
+              <a:rPr sz="1400"/>
               <a:t>    • Ekle → Resim</a:t>
             </a:r>
           </a:p>
           <a:p>
             <a:pPr lvl="1">
-              <a:spcAft>
-                <a:spcPts val="1000"/>
+              <a:lnSpc>
+                <a:spcPct val="90000"/>
+              </a:lnSpc>
+              <a:spcAft>
+                <a:spcPts val="300"/>
               </a:spcAft>
               <a:defRPr sz="1700"/>
             </a:pPr>
             <a:r>
-              <a:rPr sz="1600"/>
+              <a:rPr sz="1400"/>
               <a:t>    • Bilgisayardan yükle</a:t>
             </a:r>
           </a:p>
           <a:p>
             <a:pPr lvl="1">
-              <a:spcAft>
-                <a:spcPts val="1000"/>
+              <a:lnSpc>
+                <a:spcPct val="90000"/>
+              </a:lnSpc>
+              <a:spcAft>
+                <a:spcPts val="300"/>
               </a:spcAft>
               <a:defRPr sz="1700"/>
             </a:pPr>
             <a:r>
-              <a:rPr sz="1600"/>
+              <a:rPr sz="1400"/>
               <a:t>    • İnternetten ara (dikkat: telif!)</a:t>
             </a:r>
           </a:p>
           <a:p>
             <a:pPr>
-              <a:spcAft>
-                <a:spcPts val="1000"/>
-              </a:spcAft>
-              <a:defRPr sz="1900"/>
-            </a:pPr>
-          </a:p>
-          <a:p>
-            <a:pPr>
-              <a:spcAft>
-                <a:spcPts val="1000"/>
-              </a:spcAft>
-              <a:defRPr sz="1900"/>
-            </a:pPr>
-            <a:r>
-              <a:rPr sz="1600"/>
+              <a:lnSpc>
+                <a:spcPct val="90000"/>
+              </a:lnSpc>
+              <a:spcAft>
+                <a:spcPts val="300"/>
+              </a:spcAft>
+              <a:defRPr sz="1900"/>
+            </a:pPr>
+          </a:p>
+          <a:p>
+            <a:pPr>
+              <a:lnSpc>
+                <a:spcPct val="90000"/>
+              </a:lnSpc>
+              <a:spcAft>
+                <a:spcPts val="300"/>
+              </a:spcAft>
+              <a:defRPr sz="1900"/>
+            </a:pPr>
+            <a:r>
+              <a:rPr sz="1400"/>
               <a:t>✅ Resim Düzenleme:</a:t>
             </a:r>
           </a:p>
           <a:p>
             <a:pPr lvl="1">
-              <a:spcAft>
-                <a:spcPts val="1000"/>
+              <a:lnSpc>
+                <a:spcPct val="90000"/>
+              </a:lnSpc>
+              <a:spcAft>
+                <a:spcPts val="300"/>
               </a:spcAft>
               <a:defRPr sz="1700"/>
             </a:pPr>
             <a:r>
-              <a:rPr sz="1600"/>
+              <a:rPr sz="1400"/>
               <a:t>    • Boyutlandır</a:t>
             </a:r>
           </a:p>
           <a:p>
             <a:pPr lvl="1">
-              <a:spcAft>
-                <a:spcPts val="1000"/>
+              <a:lnSpc>
+                <a:spcPct val="90000"/>
+              </a:lnSpc>
+              <a:spcAft>
+                <a:spcPts val="300"/>
               </a:spcAft>
               <a:defRPr sz="1700"/>
             </a:pPr>
             <a:r>
-              <a:rPr sz="1600"/>
+              <a:rPr sz="1400"/>
               <a:t>    • Kırp</a:t>
             </a:r>
           </a:p>
           <a:p>
             <a:pPr lvl="1">
-              <a:spcAft>
-                <a:spcPts val="1000"/>
+              <a:lnSpc>
+                <a:spcPct val="90000"/>
+              </a:lnSpc>
+              <a:spcAft>
+                <a:spcPts val="300"/>
               </a:spcAft>
               <a:defRPr sz="1700"/>
             </a:pPr>
             <a:r>
-              <a:rPr sz="1600"/>
+              <a:rPr sz="1400"/>
               <a:t>    • Metin sarma (çevreleme)</a:t>
             </a:r>
           </a:p>
           <a:p>
             <a:pPr>
-              <a:spcAft>
-                <a:spcPts val="1000"/>
-              </a:spcAft>
-              <a:defRPr sz="1900"/>
-            </a:pPr>
-          </a:p>
-          <a:p>
-            <a:pPr>
-              <a:spcAft>
-                <a:spcPts val="1000"/>
-              </a:spcAft>
-              <a:defRPr sz="1900"/>
-            </a:pPr>
-            <a:r>
-              <a:rPr sz="1600"/>
+              <a:lnSpc>
+                <a:spcPct val="90000"/>
+              </a:lnSpc>
+              <a:spcAft>
+                <a:spcPts val="300"/>
+              </a:spcAft>
+              <a:defRPr sz="1900"/>
+            </a:pPr>
+          </a:p>
+          <a:p>
+            <a:pPr>
+              <a:lnSpc>
+                <a:spcPct val="90000"/>
+              </a:lnSpc>
+              <a:spcAft>
+                <a:spcPts val="300"/>
+              </a:spcAft>
+              <a:defRPr sz="1900"/>
+            </a:pPr>
+            <a:r>
+              <a:rPr sz="1400"/>
               <a:t>✅ Şekiller:</a:t>
             </a:r>
           </a:p>
           <a:p>
             <a:pPr lvl="1">
-              <a:spcAft>
-                <a:spcPts val="1000"/>
+              <a:lnSpc>
+                <a:spcPct val="90000"/>
+              </a:lnSpc>
+              <a:spcAft>
+                <a:spcPts val="300"/>
               </a:spcAft>
               <a:defRPr sz="1700"/>
             </a:pPr>
             <a:r>
-              <a:rPr sz="1600"/>
+              <a:rPr sz="1400"/>
               <a:t>    • Dikdörtgen, daire, ok</a:t>
             </a:r>
           </a:p>
           <a:p>
             <a:pPr lvl="1">
-              <a:spcAft>
-                <a:spcPts val="1000"/>
+              <a:lnSpc>
+                <a:spcPct val="90000"/>
+              </a:lnSpc>
+              <a:spcAft>
+                <a:spcPts val="300"/>
               </a:spcAft>
               <a:defRPr sz="1700"/>
             </a:pPr>
             <a:r>
-              <a:rPr sz="1600"/>
+              <a:rPr sz="1400"/>
               <a:t>    • Akış diyagramı şekilleri</a:t>
             </a:r>
           </a:p>
           <a:p>
             <a:pPr>
-              <a:spcAft>
-                <a:spcPts val="1000"/>
-              </a:spcAft>
-              <a:defRPr sz="1900"/>
-            </a:pPr>
-          </a:p>
-          <a:p>
-            <a:pPr>
-              <a:spcAft>
-                <a:spcPts val="1000"/>
-              </a:spcAft>
-              <a:defRPr sz="1900"/>
-            </a:pPr>
-            <a:r>
-              <a:rPr sz="1600"/>
+              <a:lnSpc>
+                <a:spcPct val="90000"/>
+              </a:lnSpc>
+              <a:spcAft>
+                <a:spcPts val="300"/>
+              </a:spcAft>
+              <a:defRPr sz="1900"/>
+            </a:pPr>
+          </a:p>
+          <a:p>
+            <a:pPr>
+              <a:lnSpc>
+                <a:spcPct val="90000"/>
+              </a:lnSpc>
+              <a:spcAft>
+                <a:spcPts val="300"/>
+              </a:spcAft>
+              <a:defRPr sz="1900"/>
+            </a:pPr>
+            <a:r>
+              <a:rPr sz="1400"/>
               <a:t>✅ SmartArt:</a:t>
             </a:r>
           </a:p>
           <a:p>
             <a:pPr lvl="1">
-              <a:spcAft>
-                <a:spcPts val="1000"/>
+              <a:lnSpc>
+                <a:spcPct val="90000"/>
+              </a:lnSpc>
+              <a:spcAft>
+                <a:spcPts val="300"/>
               </a:spcAft>
               <a:defRPr sz="1700"/>
             </a:pPr>
             <a:r>
-              <a:rPr sz="1600"/>
+              <a:rPr sz="1400"/>
               <a:t>    • Şemalar, grafikler</a:t>
             </a:r>
           </a:p>
           <a:p>
             <a:pPr>
-              <a:spcAft>
-                <a:spcPts val="1000"/>
-              </a:spcAft>
-              <a:defRPr sz="1900"/>
-            </a:pPr>
-          </a:p>
-          <a:p>
-            <a:pPr>
-              <a:spcAft>
-                <a:spcPts val="1000"/>
-              </a:spcAft>
-              <a:defRPr sz="1900"/>
-            </a:pPr>
-            <a:r>
-              <a:rPr sz="1600"/>
+              <a:lnSpc>
+                <a:spcPct val="90000"/>
+              </a:lnSpc>
+              <a:spcAft>
+                <a:spcPts val="300"/>
+              </a:spcAft>
+              <a:defRPr sz="1900"/>
+            </a:pPr>
+          </a:p>
+          <a:p>
+            <a:pPr>
+              <a:lnSpc>
+                <a:spcPct val="90000"/>
+              </a:lnSpc>
+              <a:spcAft>
+                <a:spcPts val="300"/>
+              </a:spcAft>
+              <a:defRPr sz="1900"/>
+            </a:pPr>
+            <a:r>
+              <a:rPr sz="1400"/>
               <a:t>⚠️ Telif Hakkı:</a:t>
             </a:r>
           </a:p>
           <a:p>
             <a:pPr lvl="1">
-              <a:spcAft>
-                <a:spcPts val="1000"/>
+              <a:lnSpc>
+                <a:spcPct val="90000"/>
+              </a:lnSpc>
+              <a:spcAft>
+                <a:spcPts val="300"/>
               </a:spcAft>
               <a:defRPr sz="1700"/>
             </a:pPr>
             <a:r>
-              <a:rPr sz="1600"/>
+              <a:rPr sz="1400"/>
               <a:t>    • Başkasının resmini kullanırken kaynak göster</a:t>
             </a:r>
           </a:p>
           <a:p>
             <a:pPr lvl="1">
-              <a:spcAft>
-                <a:spcPts val="1000"/>
+              <a:lnSpc>
+                <a:spcPct val="90000"/>
+              </a:lnSpc>
+              <a:spcAft>
+                <a:spcPts val="300"/>
               </a:spcAft>
               <a:defRPr sz="1700"/>
             </a:pPr>
             <a:r>
-              <a:rPr sz="1600"/>
+              <a:rPr sz="1400"/>
               <a:t>    • Ücretsiz resim siteleri: Unsplash, Pixabay</a:t>
             </a:r>
           </a:p>
@@ -7061,7 +7607,7 @@
         </p:nvSpPr>
         <p:spPr/>
         <p:txBody>
-          <a:bodyPr/>
+          <a:bodyPr wrap="square"/>
           <a:lstStyle/>
           <a:p>
             <a:pPr>
@@ -7115,242 +7661,338 @@
             <a:spAutoFit/>
           </a:bodyPr>
           <a:lstStyle/>
-          <a:p/>
-          <a:p>
-            <a:pPr>
-              <a:spcAft>
-                <a:spcPts val="1000"/>
-              </a:spcAft>
-              <a:defRPr sz="1900"/>
-            </a:pPr>
-            <a:r>
+          <a:p>
+            <a:pPr>
+              <a:lnSpc>
+                <a:spcPct val="90000"/>
+              </a:lnSpc>
+              <a:spcAft>
+                <a:spcPts val="300"/>
+              </a:spcAft>
+            </a:pPr>
+          </a:p>
+          <a:p>
+            <a:pPr>
+              <a:lnSpc>
+                <a:spcPct val="90000"/>
+              </a:lnSpc>
+              <a:spcAft>
+                <a:spcPts val="300"/>
+              </a:spcAft>
+              <a:defRPr sz="1900"/>
+            </a:pPr>
+            <a:r>
+              <a:rPr sz="1500"/>
               <a:t>Word'de tablo yapmak</a:t>
             </a:r>
           </a:p>
           <a:p>
             <a:pPr>
-              <a:spcAft>
-                <a:spcPts val="1000"/>
-              </a:spcAft>
-              <a:defRPr sz="1900"/>
-            </a:pPr>
-          </a:p>
-          <a:p>
-            <a:pPr>
-              <a:spcAft>
-                <a:spcPts val="1000"/>
-              </a:spcAft>
-              <a:defRPr sz="1900"/>
-            </a:pPr>
-            <a:r>
+              <a:lnSpc>
+                <a:spcPct val="90000"/>
+              </a:lnSpc>
+              <a:spcAft>
+                <a:spcPts val="300"/>
+              </a:spcAft>
+              <a:defRPr sz="1900"/>
+            </a:pPr>
+          </a:p>
+          <a:p>
+            <a:pPr>
+              <a:lnSpc>
+                <a:spcPct val="90000"/>
+              </a:lnSpc>
+              <a:spcAft>
+                <a:spcPts val="300"/>
+              </a:spcAft>
+              <a:defRPr sz="1900"/>
+            </a:pPr>
+            <a:r>
+              <a:rPr sz="1500"/>
               <a:t>✅ Tablo Ekleme:</a:t>
             </a:r>
           </a:p>
           <a:p>
             <a:pPr lvl="1">
-              <a:spcAft>
-                <a:spcPts val="1000"/>
+              <a:lnSpc>
+                <a:spcPct val="90000"/>
+              </a:lnSpc>
+              <a:spcAft>
+                <a:spcPts val="300"/>
               </a:spcAft>
               <a:defRPr sz="1700"/>
             </a:pPr>
             <a:r>
+              <a:rPr sz="1500"/>
               <a:t>    • Ekle → Tablo</a:t>
             </a:r>
           </a:p>
           <a:p>
             <a:pPr lvl="1">
-              <a:spcAft>
-                <a:spcPts val="1000"/>
+              <a:lnSpc>
+                <a:spcPct val="90000"/>
+              </a:lnSpc>
+              <a:spcAft>
+                <a:spcPts val="300"/>
               </a:spcAft>
               <a:defRPr sz="1700"/>
             </a:pPr>
             <a:r>
+              <a:rPr sz="1500"/>
               <a:t>    • Satır ve sütun sayısı seç</a:t>
             </a:r>
           </a:p>
           <a:p>
             <a:pPr>
-              <a:spcAft>
-                <a:spcPts val="1000"/>
-              </a:spcAft>
-              <a:defRPr sz="1900"/>
-            </a:pPr>
-          </a:p>
-          <a:p>
-            <a:pPr>
-              <a:spcAft>
-                <a:spcPts val="1000"/>
-              </a:spcAft>
-              <a:defRPr sz="1900"/>
-            </a:pPr>
-            <a:r>
+              <a:lnSpc>
+                <a:spcPct val="90000"/>
+              </a:lnSpc>
+              <a:spcAft>
+                <a:spcPts val="300"/>
+              </a:spcAft>
+              <a:defRPr sz="1900"/>
+            </a:pPr>
+          </a:p>
+          <a:p>
+            <a:pPr>
+              <a:lnSpc>
+                <a:spcPct val="90000"/>
+              </a:lnSpc>
+              <a:spcAft>
+                <a:spcPts val="300"/>
+              </a:spcAft>
+              <a:defRPr sz="1900"/>
+            </a:pPr>
+            <a:r>
+              <a:rPr sz="1500"/>
               <a:t>✅ Tablo Düzenleme:</a:t>
             </a:r>
           </a:p>
           <a:p>
             <a:pPr lvl="1">
-              <a:spcAft>
-                <a:spcPts val="1000"/>
+              <a:lnSpc>
+                <a:spcPct val="90000"/>
+              </a:lnSpc>
+              <a:spcAft>
+                <a:spcPts val="300"/>
               </a:spcAft>
               <a:defRPr sz="1700"/>
             </a:pPr>
             <a:r>
+              <a:rPr sz="1500"/>
               <a:t>    • Satır/Sütun ekle</a:t>
             </a:r>
           </a:p>
           <a:p>
             <a:pPr lvl="1">
-              <a:spcAft>
-                <a:spcPts val="1000"/>
+              <a:lnSpc>
+                <a:spcPct val="90000"/>
+              </a:lnSpc>
+              <a:spcAft>
+                <a:spcPts val="300"/>
               </a:spcAft>
               <a:defRPr sz="1700"/>
             </a:pPr>
             <a:r>
+              <a:rPr sz="1500"/>
               <a:t>    • Satır/Sütun sil</a:t>
             </a:r>
           </a:p>
           <a:p>
             <a:pPr lvl="1">
-              <a:spcAft>
-                <a:spcPts val="1000"/>
+              <a:lnSpc>
+                <a:spcPct val="90000"/>
+              </a:lnSpc>
+              <a:spcAft>
+                <a:spcPts val="300"/>
               </a:spcAft>
               <a:defRPr sz="1700"/>
             </a:pPr>
             <a:r>
+              <a:rPr sz="1500"/>
               <a:t>    • Hücreleri birleştir</a:t>
             </a:r>
           </a:p>
           <a:p>
             <a:pPr lvl="1">
-              <a:spcAft>
-                <a:spcPts val="1000"/>
+              <a:lnSpc>
+                <a:spcPct val="90000"/>
+              </a:lnSpc>
+              <a:spcAft>
+                <a:spcPts val="300"/>
               </a:spcAft>
               <a:defRPr sz="1700"/>
             </a:pPr>
             <a:r>
+              <a:rPr sz="1500"/>
               <a:t>    • Hücreleri böl</a:t>
             </a:r>
           </a:p>
           <a:p>
             <a:pPr>
-              <a:spcAft>
-                <a:spcPts val="1000"/>
-              </a:spcAft>
-              <a:defRPr sz="1900"/>
-            </a:pPr>
-          </a:p>
-          <a:p>
-            <a:pPr>
-              <a:spcAft>
-                <a:spcPts val="1000"/>
-              </a:spcAft>
-              <a:defRPr sz="1900"/>
-            </a:pPr>
-            <a:r>
+              <a:lnSpc>
+                <a:spcPct val="90000"/>
+              </a:lnSpc>
+              <a:spcAft>
+                <a:spcPts val="300"/>
+              </a:spcAft>
+              <a:defRPr sz="1900"/>
+            </a:pPr>
+          </a:p>
+          <a:p>
+            <a:pPr>
+              <a:lnSpc>
+                <a:spcPct val="90000"/>
+              </a:lnSpc>
+              <a:spcAft>
+                <a:spcPts val="300"/>
+              </a:spcAft>
+              <a:defRPr sz="1900"/>
+            </a:pPr>
+            <a:r>
+              <a:rPr sz="1500"/>
               <a:t>✅ Tablo Biçimlendirme:</a:t>
             </a:r>
           </a:p>
           <a:p>
             <a:pPr lvl="1">
-              <a:spcAft>
-                <a:spcPts val="1000"/>
+              <a:lnSpc>
+                <a:spcPct val="90000"/>
+              </a:lnSpc>
+              <a:spcAft>
+                <a:spcPts val="300"/>
               </a:spcAft>
               <a:defRPr sz="1700"/>
             </a:pPr>
             <a:r>
+              <a:rPr sz="1500"/>
               <a:t>    • Kenarlıklar</a:t>
             </a:r>
           </a:p>
           <a:p>
             <a:pPr lvl="1">
-              <a:spcAft>
-                <a:spcPts val="1000"/>
+              <a:lnSpc>
+                <a:spcPct val="90000"/>
+              </a:lnSpc>
+              <a:spcAft>
+                <a:spcPts val="300"/>
               </a:spcAft>
               <a:defRPr sz="1700"/>
             </a:pPr>
             <a:r>
+              <a:rPr sz="1500"/>
               <a:t>    • Arka plan rengi</a:t>
             </a:r>
           </a:p>
           <a:p>
             <a:pPr lvl="1">
-              <a:spcAft>
-                <a:spcPts val="1000"/>
+              <a:lnSpc>
+                <a:spcPct val="90000"/>
+              </a:lnSpc>
+              <a:spcAft>
+                <a:spcPts val="300"/>
               </a:spcAft>
               <a:defRPr sz="1700"/>
             </a:pPr>
             <a:r>
+              <a:rPr sz="1500"/>
               <a:t>    • Tablo stilleri (hazır)</a:t>
             </a:r>
           </a:p>
           <a:p>
             <a:pPr>
-              <a:spcAft>
-                <a:spcPts val="1000"/>
-              </a:spcAft>
-              <a:defRPr sz="1900"/>
-            </a:pPr>
-          </a:p>
-          <a:p>
-            <a:pPr>
-              <a:spcAft>
-                <a:spcPts val="1000"/>
-              </a:spcAft>
-              <a:defRPr sz="1900"/>
-            </a:pPr>
-            <a:r>
+              <a:lnSpc>
+                <a:spcPct val="90000"/>
+              </a:lnSpc>
+              <a:spcAft>
+                <a:spcPts val="300"/>
+              </a:spcAft>
+              <a:defRPr sz="1900"/>
+            </a:pPr>
+          </a:p>
+          <a:p>
+            <a:pPr>
+              <a:lnSpc>
+                <a:spcPct val="90000"/>
+              </a:lnSpc>
+              <a:spcAft>
+                <a:spcPts val="300"/>
+              </a:spcAft>
+              <a:defRPr sz="1900"/>
+            </a:pPr>
+            <a:r>
+              <a:rPr sz="1500"/>
               <a:t>📌 Örnek Kullanım:</a:t>
             </a:r>
           </a:p>
           <a:p>
             <a:pPr lvl="1">
-              <a:spcAft>
-                <a:spcPts val="1000"/>
+              <a:lnSpc>
+                <a:spcPct val="90000"/>
+              </a:lnSpc>
+              <a:spcAft>
+                <a:spcPts val="300"/>
               </a:spcAft>
               <a:defRPr sz="1700"/>
             </a:pPr>
             <a:r>
+              <a:rPr sz="1500"/>
               <a:t>    • Ders programı</a:t>
             </a:r>
           </a:p>
           <a:p>
             <a:pPr lvl="1">
-              <a:spcAft>
-                <a:spcPts val="1000"/>
+              <a:lnSpc>
+                <a:spcPct val="90000"/>
+              </a:lnSpc>
+              <a:spcAft>
+                <a:spcPts val="300"/>
               </a:spcAft>
               <a:defRPr sz="1700"/>
             </a:pPr>
             <a:r>
+              <a:rPr sz="1500"/>
               <a:t>    • Karşılaştırma tablosu</a:t>
             </a:r>
           </a:p>
           <a:p>
             <a:pPr lvl="1">
-              <a:spcAft>
-                <a:spcPts val="1000"/>
+              <a:lnSpc>
+                <a:spcPct val="90000"/>
+              </a:lnSpc>
+              <a:spcAft>
+                <a:spcPts val="300"/>
               </a:spcAft>
               <a:defRPr sz="1700"/>
             </a:pPr>
             <a:r>
+              <a:rPr sz="1500"/>
               <a:t>    • Veri gösterimi</a:t>
             </a:r>
           </a:p>
           <a:p>
             <a:pPr>
-              <a:spcAft>
-                <a:spcPts val="1000"/>
-              </a:spcAft>
-              <a:defRPr sz="1900"/>
-            </a:pPr>
-          </a:p>
-          <a:p>
-            <a:pPr>
-              <a:spcAft>
-                <a:spcPts val="1000"/>
-              </a:spcAft>
-              <a:defRPr sz="1900"/>
-            </a:pPr>
-            <a:r>
+              <a:lnSpc>
+                <a:spcPct val="90000"/>
+              </a:lnSpc>
+              <a:spcAft>
+                <a:spcPts val="300"/>
+              </a:spcAft>
+              <a:defRPr sz="1900"/>
+            </a:pPr>
+          </a:p>
+          <a:p>
+            <a:pPr>
+              <a:lnSpc>
+                <a:spcPct val="90000"/>
+              </a:lnSpc>
+              <a:spcAft>
+                <a:spcPts val="300"/>
+              </a:spcAft>
+              <a:defRPr sz="1900"/>
+            </a:pPr>
+            <a:r>
+              <a:rPr sz="1500"/>
               <a:t>💡 Excel'den tablo kopyalayabilirsin</a:t>
             </a:r>
           </a:p>
@@ -7386,7 +8028,7 @@
         </p:nvSpPr>
         <p:spPr/>
         <p:txBody>
-          <a:bodyPr/>
+          <a:bodyPr wrap="square"/>
           <a:lstStyle/>
           <a:p>
             <a:pPr>
@@ -7440,250 +8082,349 @@
             <a:spAutoFit/>
           </a:bodyPr>
           <a:lstStyle/>
-          <a:p/>
-          <a:p>
-            <a:pPr>
-              <a:spcAft>
-                <a:spcPts val="1000"/>
-              </a:spcAft>
-              <a:defRPr sz="1900"/>
-            </a:pPr>
-            <a:r>
+          <a:p>
+            <a:pPr>
+              <a:lnSpc>
+                <a:spcPct val="90000"/>
+              </a:lnSpc>
+              <a:spcAft>
+                <a:spcPts val="300"/>
+              </a:spcAft>
+            </a:pPr>
+          </a:p>
+          <a:p>
+            <a:pPr>
+              <a:lnSpc>
+                <a:spcPct val="90000"/>
+              </a:lnSpc>
+              <a:spcAft>
+                <a:spcPts val="300"/>
+              </a:spcAft>
+              <a:defRPr sz="1900"/>
+            </a:pPr>
+            <a:r>
+              <a:rPr sz="1500"/>
               <a:t>Sayfayı ayarlamak</a:t>
             </a:r>
           </a:p>
           <a:p>
             <a:pPr>
-              <a:spcAft>
-                <a:spcPts val="1000"/>
-              </a:spcAft>
-              <a:defRPr sz="1900"/>
-            </a:pPr>
-          </a:p>
-          <a:p>
-            <a:pPr>
-              <a:spcAft>
-                <a:spcPts val="1000"/>
-              </a:spcAft>
-              <a:defRPr sz="1900"/>
-            </a:pPr>
-            <a:r>
+              <a:lnSpc>
+                <a:spcPct val="90000"/>
+              </a:lnSpc>
+              <a:spcAft>
+                <a:spcPts val="300"/>
+              </a:spcAft>
+              <a:defRPr sz="1900"/>
+            </a:pPr>
+          </a:p>
+          <a:p>
+            <a:pPr>
+              <a:lnSpc>
+                <a:spcPct val="90000"/>
+              </a:lnSpc>
+              <a:spcAft>
+                <a:spcPts val="300"/>
+              </a:spcAft>
+              <a:defRPr sz="1900"/>
+            </a:pPr>
+            <a:r>
+              <a:rPr sz="1500"/>
               <a:t>✅ Sayfa Boyutu:</a:t>
             </a:r>
           </a:p>
           <a:p>
             <a:pPr lvl="1">
-              <a:spcAft>
-                <a:spcPts val="1000"/>
+              <a:lnSpc>
+                <a:spcPct val="90000"/>
+              </a:lnSpc>
+              <a:spcAft>
+                <a:spcPts val="300"/>
               </a:spcAft>
               <a:defRPr sz="1700"/>
             </a:pPr>
             <a:r>
+              <a:rPr sz="1500"/>
               <a:t>    • A4 (standart)</a:t>
             </a:r>
           </a:p>
           <a:p>
             <a:pPr lvl="1">
-              <a:spcAft>
-                <a:spcPts val="1000"/>
+              <a:lnSpc>
+                <a:spcPct val="90000"/>
+              </a:lnSpc>
+              <a:spcAft>
+                <a:spcPts val="300"/>
               </a:spcAft>
               <a:defRPr sz="1700"/>
             </a:pPr>
             <a:r>
+              <a:rPr sz="1500"/>
               <a:t>    • Letter</a:t>
             </a:r>
           </a:p>
           <a:p>
             <a:pPr>
-              <a:spcAft>
-                <a:spcPts val="1000"/>
-              </a:spcAft>
-              <a:defRPr sz="1900"/>
-            </a:pPr>
-          </a:p>
-          <a:p>
-            <a:pPr>
-              <a:spcAft>
-                <a:spcPts val="1000"/>
-              </a:spcAft>
-              <a:defRPr sz="1900"/>
-            </a:pPr>
-            <a:r>
+              <a:lnSpc>
+                <a:spcPct val="90000"/>
+              </a:lnSpc>
+              <a:spcAft>
+                <a:spcPts val="300"/>
+              </a:spcAft>
+              <a:defRPr sz="1900"/>
+            </a:pPr>
+          </a:p>
+          <a:p>
+            <a:pPr>
+              <a:lnSpc>
+                <a:spcPct val="90000"/>
+              </a:lnSpc>
+              <a:spcAft>
+                <a:spcPts val="300"/>
+              </a:spcAft>
+              <a:defRPr sz="1900"/>
+            </a:pPr>
+            <a:r>
+              <a:rPr sz="1500"/>
               <a:t>✅ Yönlendirme:</a:t>
             </a:r>
           </a:p>
           <a:p>
             <a:pPr lvl="1">
-              <a:spcAft>
-                <a:spcPts val="1000"/>
+              <a:lnSpc>
+                <a:spcPct val="90000"/>
+              </a:lnSpc>
+              <a:spcAft>
+                <a:spcPts val="300"/>
               </a:spcAft>
               <a:defRPr sz="1700"/>
             </a:pPr>
             <a:r>
+              <a:rPr sz="1500"/>
               <a:t>    • Dikey (Portrait) - Normal</a:t>
             </a:r>
           </a:p>
           <a:p>
             <a:pPr lvl="1">
-              <a:spcAft>
-                <a:spcPts val="1000"/>
+              <a:lnSpc>
+                <a:spcPct val="90000"/>
+              </a:lnSpc>
+              <a:spcAft>
+                <a:spcPts val="300"/>
               </a:spcAft>
               <a:defRPr sz="1700"/>
             </a:pPr>
             <a:r>
+              <a:rPr sz="1500"/>
               <a:t>    • Yatay (Landscape) - Geniş tablolar</a:t>
             </a:r>
           </a:p>
           <a:p>
             <a:pPr>
-              <a:spcAft>
-                <a:spcPts val="1000"/>
-              </a:spcAft>
-              <a:defRPr sz="1900"/>
-            </a:pPr>
-          </a:p>
-          <a:p>
-            <a:pPr>
-              <a:spcAft>
-                <a:spcPts val="1000"/>
-              </a:spcAft>
-              <a:defRPr sz="1900"/>
-            </a:pPr>
-            <a:r>
+              <a:lnSpc>
+                <a:spcPct val="90000"/>
+              </a:lnSpc>
+              <a:spcAft>
+                <a:spcPts val="300"/>
+              </a:spcAft>
+              <a:defRPr sz="1900"/>
+            </a:pPr>
+          </a:p>
+          <a:p>
+            <a:pPr>
+              <a:lnSpc>
+                <a:spcPct val="90000"/>
+              </a:lnSpc>
+              <a:spcAft>
+                <a:spcPts val="300"/>
+              </a:spcAft>
+              <a:defRPr sz="1900"/>
+            </a:pPr>
+            <a:r>
+              <a:rPr sz="1500"/>
               <a:t>✅ Kenar Boşlukları:</a:t>
             </a:r>
           </a:p>
           <a:p>
             <a:pPr lvl="1">
-              <a:spcAft>
-                <a:spcPts val="1000"/>
+              <a:lnSpc>
+                <a:spcPct val="90000"/>
+              </a:lnSpc>
+              <a:spcAft>
+                <a:spcPts val="300"/>
               </a:spcAft>
               <a:defRPr sz="1700"/>
             </a:pPr>
             <a:r>
+              <a:rPr sz="1500"/>
               <a:t>    • Normal: 2.5 cm</a:t>
             </a:r>
           </a:p>
           <a:p>
             <a:pPr lvl="1">
-              <a:spcAft>
-                <a:spcPts val="1000"/>
+              <a:lnSpc>
+                <a:spcPct val="90000"/>
+              </a:lnSpc>
+              <a:spcAft>
+                <a:spcPts val="300"/>
               </a:spcAft>
               <a:defRPr sz="1700"/>
             </a:pPr>
             <a:r>
+              <a:rPr sz="1500"/>
               <a:t>    • Dar: 1.27 cm</a:t>
             </a:r>
           </a:p>
           <a:p>
             <a:pPr lvl="1">
-              <a:spcAft>
-                <a:spcPts val="1000"/>
+              <a:lnSpc>
+                <a:spcPct val="90000"/>
+              </a:lnSpc>
+              <a:spcAft>
+                <a:spcPts val="300"/>
               </a:spcAft>
               <a:defRPr sz="1700"/>
             </a:pPr>
             <a:r>
+              <a:rPr sz="1500"/>
               <a:t>    • Geniş: 5 cm</a:t>
             </a:r>
           </a:p>
           <a:p>
             <a:pPr>
-              <a:spcAft>
-                <a:spcPts val="1000"/>
-              </a:spcAft>
-              <a:defRPr sz="1900"/>
-            </a:pPr>
-          </a:p>
-          <a:p>
-            <a:pPr>
-              <a:spcAft>
-                <a:spcPts val="1000"/>
-              </a:spcAft>
-              <a:defRPr sz="1900"/>
-            </a:pPr>
-            <a:r>
+              <a:lnSpc>
+                <a:spcPct val="90000"/>
+              </a:lnSpc>
+              <a:spcAft>
+                <a:spcPts val="300"/>
+              </a:spcAft>
+              <a:defRPr sz="1900"/>
+            </a:pPr>
+          </a:p>
+          <a:p>
+            <a:pPr>
+              <a:lnSpc>
+                <a:spcPct val="90000"/>
+              </a:lnSpc>
+              <a:spcAft>
+                <a:spcPts val="300"/>
+              </a:spcAft>
+              <a:defRPr sz="1900"/>
+            </a:pPr>
+            <a:r>
+              <a:rPr sz="1500"/>
               <a:t>✅ Üstbilgi/Altbilgi:</a:t>
             </a:r>
           </a:p>
           <a:p>
             <a:pPr lvl="1">
-              <a:spcAft>
-                <a:spcPts val="1000"/>
+              <a:lnSpc>
+                <a:spcPct val="90000"/>
+              </a:lnSpc>
+              <a:spcAft>
+                <a:spcPts val="300"/>
               </a:spcAft>
               <a:defRPr sz="1700"/>
             </a:pPr>
             <a:r>
+              <a:rPr sz="1500"/>
               <a:t>    • Başlık, tarih</a:t>
             </a:r>
           </a:p>
           <a:p>
             <a:pPr lvl="1">
-              <a:spcAft>
-                <a:spcPts val="1000"/>
+              <a:lnSpc>
+                <a:spcPct val="90000"/>
+              </a:lnSpc>
+              <a:spcAft>
+                <a:spcPts val="300"/>
               </a:spcAft>
               <a:defRPr sz="1700"/>
             </a:pPr>
             <a:r>
+              <a:rPr sz="1500"/>
               <a:t>    • Sayfa numarası</a:t>
             </a:r>
           </a:p>
           <a:p>
             <a:pPr>
-              <a:spcAft>
-                <a:spcPts val="1000"/>
-              </a:spcAft>
-              <a:defRPr sz="1900"/>
-            </a:pPr>
-          </a:p>
-          <a:p>
-            <a:pPr>
-              <a:spcAft>
-                <a:spcPts val="1000"/>
-              </a:spcAft>
-              <a:defRPr sz="1900"/>
-            </a:pPr>
-            <a:r>
+              <a:lnSpc>
+                <a:spcPct val="90000"/>
+              </a:lnSpc>
+              <a:spcAft>
+                <a:spcPts val="300"/>
+              </a:spcAft>
+              <a:defRPr sz="1900"/>
+            </a:pPr>
+          </a:p>
+          <a:p>
+            <a:pPr>
+              <a:lnSpc>
+                <a:spcPct val="90000"/>
+              </a:lnSpc>
+              <a:spcAft>
+                <a:spcPts val="300"/>
+              </a:spcAft>
+              <a:defRPr sz="1900"/>
+            </a:pPr>
+            <a:r>
+              <a:rPr sz="1500"/>
               <a:t>✅ Sütunlar:</a:t>
             </a:r>
           </a:p>
           <a:p>
             <a:pPr lvl="1">
-              <a:spcAft>
-                <a:spcPts val="1000"/>
+              <a:lnSpc>
+                <a:spcPct val="90000"/>
+              </a:lnSpc>
+              <a:spcAft>
+                <a:spcPts val="300"/>
               </a:spcAft>
               <a:defRPr sz="1700"/>
             </a:pPr>
             <a:r>
+              <a:rPr sz="1500"/>
               <a:t>    • Tek sütun: Normal</a:t>
             </a:r>
           </a:p>
           <a:p>
             <a:pPr lvl="1">
-              <a:spcAft>
-                <a:spcPts val="1000"/>
+              <a:lnSpc>
+                <a:spcPct val="90000"/>
+              </a:lnSpc>
+              <a:spcAft>
+                <a:spcPts val="300"/>
               </a:spcAft>
               <a:defRPr sz="1700"/>
             </a:pPr>
             <a:r>
+              <a:rPr sz="1500"/>
               <a:t>    • İki sütun: Gazete formatı</a:t>
             </a:r>
           </a:p>
           <a:p>
             <a:pPr>
-              <a:spcAft>
-                <a:spcPts val="1000"/>
-              </a:spcAft>
-              <a:defRPr sz="1900"/>
-            </a:pPr>
-          </a:p>
-          <a:p>
-            <a:pPr>
-              <a:spcAft>
-                <a:spcPts val="1000"/>
-              </a:spcAft>
-              <a:defRPr sz="1900"/>
-            </a:pPr>
-            <a:r>
+              <a:lnSpc>
+                <a:spcPct val="90000"/>
+              </a:lnSpc>
+              <a:spcAft>
+                <a:spcPts val="300"/>
+              </a:spcAft>
+              <a:defRPr sz="1900"/>
+            </a:pPr>
+          </a:p>
+          <a:p>
+            <a:pPr>
+              <a:lnSpc>
+                <a:spcPct val="90000"/>
+              </a:lnSpc>
+              <a:spcAft>
+                <a:spcPts val="300"/>
+              </a:spcAft>
+              <a:defRPr sz="1900"/>
+            </a:pPr>
+            <a:r>
+              <a:rPr sz="1500"/>
               <a:t>💡 Resmi ödevler için standart A4, dikey</a:t>
             </a:r>
           </a:p>
@@ -7719,7 +8460,7 @@
         </p:nvSpPr>
         <p:spPr/>
         <p:txBody>
-          <a:bodyPr/>
+          <a:bodyPr wrap="square"/>
           <a:lstStyle/>
           <a:p>
             <a:pPr>
@@ -7773,252 +8514,327 @@
             <a:spAutoFit/>
           </a:bodyPr>
           <a:lstStyle/>
-          <a:p/>
-          <a:p>
-            <a:pPr>
-              <a:spcAft>
-                <a:spcPts val="1000"/>
-              </a:spcAft>
-              <a:defRPr sz="1900"/>
-            </a:pPr>
-            <a:r>
-              <a:rPr sz="1600"/>
+          <a:p>
+            <a:pPr>
+              <a:lnSpc>
+                <a:spcPct val="90000"/>
+              </a:lnSpc>
+              <a:spcAft>
+                <a:spcPts val="300"/>
+              </a:spcAft>
+            </a:pPr>
+          </a:p>
+          <a:p>
+            <a:pPr>
+              <a:lnSpc>
+                <a:spcPct val="90000"/>
+              </a:lnSpc>
+              <a:spcAft>
+                <a:spcPts val="300"/>
+              </a:spcAft>
+              <a:defRPr sz="1900"/>
+            </a:pPr>
+            <a:r>
+              <a:rPr sz="1400"/>
               <a:t>Online kelime işlemci</a:t>
             </a:r>
           </a:p>
           <a:p>
             <a:pPr>
-              <a:spcAft>
-                <a:spcPts val="1000"/>
-              </a:spcAft>
-              <a:defRPr sz="1900"/>
-            </a:pPr>
-          </a:p>
-          <a:p>
-            <a:pPr>
-              <a:spcAft>
-                <a:spcPts val="1000"/>
-              </a:spcAft>
-              <a:defRPr sz="1900"/>
-            </a:pPr>
-            <a:r>
-              <a:rPr sz="1600"/>
+              <a:lnSpc>
+                <a:spcPct val="90000"/>
+              </a:lnSpc>
+              <a:spcAft>
+                <a:spcPts val="300"/>
+              </a:spcAft>
+              <a:defRPr sz="1900"/>
+            </a:pPr>
+          </a:p>
+          <a:p>
+            <a:pPr>
+              <a:lnSpc>
+                <a:spcPct val="90000"/>
+              </a:lnSpc>
+              <a:spcAft>
+                <a:spcPts val="300"/>
+              </a:spcAft>
+              <a:defRPr sz="1900"/>
+            </a:pPr>
+            <a:r>
+              <a:rPr sz="1400"/>
               <a:t>✅ Google Docs Avantajları:</a:t>
             </a:r>
           </a:p>
           <a:p>
             <a:pPr lvl="1">
-              <a:spcAft>
-                <a:spcPts val="1000"/>
+              <a:lnSpc>
+                <a:spcPct val="90000"/>
+              </a:lnSpc>
+              <a:spcAft>
+                <a:spcPts val="300"/>
               </a:spcAft>
               <a:defRPr sz="1700"/>
             </a:pPr>
             <a:r>
-              <a:rPr sz="1600"/>
+              <a:rPr sz="1400"/>
               <a:t>    • Ücretsiz</a:t>
             </a:r>
           </a:p>
           <a:p>
             <a:pPr lvl="1">
-              <a:spcAft>
-                <a:spcPts val="1000"/>
+              <a:lnSpc>
+                <a:spcPct val="90000"/>
+              </a:lnSpc>
+              <a:spcAft>
+                <a:spcPts val="300"/>
               </a:spcAft>
               <a:defRPr sz="1700"/>
             </a:pPr>
             <a:r>
-              <a:rPr sz="1600"/>
+              <a:rPr sz="1400"/>
               <a:t>    • Her yerden erişim (internet ile)</a:t>
             </a:r>
           </a:p>
           <a:p>
             <a:pPr lvl="1">
-              <a:spcAft>
-                <a:spcPts val="1000"/>
+              <a:lnSpc>
+                <a:spcPct val="90000"/>
+              </a:lnSpc>
+              <a:spcAft>
+                <a:spcPts val="300"/>
               </a:spcAft>
               <a:defRPr sz="1700"/>
             </a:pPr>
             <a:r>
-              <a:rPr sz="1600"/>
+              <a:rPr sz="1400"/>
               <a:t>    • Otomatik kaydetme</a:t>
             </a:r>
           </a:p>
           <a:p>
             <a:pPr lvl="1">
-              <a:spcAft>
-                <a:spcPts val="1000"/>
+              <a:lnSpc>
+                <a:spcPct val="90000"/>
+              </a:lnSpc>
+              <a:spcAft>
+                <a:spcPts val="300"/>
               </a:spcAft>
               <a:defRPr sz="1700"/>
             </a:pPr>
             <a:r>
-              <a:rPr sz="1600"/>
+              <a:rPr sz="1400"/>
               <a:t>    • İşbirlikli çalışma</a:t>
             </a:r>
           </a:p>
           <a:p>
             <a:pPr lvl="1">
-              <a:spcAft>
-                <a:spcPts val="1000"/>
+              <a:lnSpc>
+                <a:spcPct val="90000"/>
+              </a:lnSpc>
+              <a:spcAft>
+                <a:spcPts val="300"/>
               </a:spcAft>
               <a:defRPr sz="1700"/>
             </a:pPr>
             <a:r>
-              <a:rPr sz="1600"/>
+              <a:rPr sz="1400"/>
               <a:t>    • Yorum yapma</a:t>
             </a:r>
           </a:p>
           <a:p>
             <a:pPr>
-              <a:spcAft>
-                <a:spcPts val="1000"/>
-              </a:spcAft>
-              <a:defRPr sz="1900"/>
-            </a:pPr>
-          </a:p>
-          <a:p>
-            <a:pPr>
-              <a:spcAft>
-                <a:spcPts val="1000"/>
-              </a:spcAft>
-              <a:defRPr sz="1900"/>
-            </a:pPr>
-            <a:r>
-              <a:rPr sz="1600"/>
+              <a:lnSpc>
+                <a:spcPct val="90000"/>
+              </a:lnSpc>
+              <a:spcAft>
+                <a:spcPts val="300"/>
+              </a:spcAft>
+              <a:defRPr sz="1900"/>
+            </a:pPr>
+          </a:p>
+          <a:p>
+            <a:pPr>
+              <a:lnSpc>
+                <a:spcPct val="90000"/>
+              </a:lnSpc>
+              <a:spcAft>
+                <a:spcPts val="300"/>
+              </a:spcAft>
+              <a:defRPr sz="1900"/>
+            </a:pPr>
+            <a:r>
+              <a:rPr sz="1400"/>
               <a:t>✅ Nasıl Kullanılır?</a:t>
             </a:r>
           </a:p>
           <a:p>
             <a:pPr lvl="1">
-              <a:spcAft>
-                <a:spcPts val="1000"/>
+              <a:lnSpc>
+                <a:spcPct val="90000"/>
+              </a:lnSpc>
+              <a:spcAft>
+                <a:spcPts val="300"/>
               </a:spcAft>
               <a:defRPr sz="1700"/>
             </a:pPr>
             <a:r>
-              <a:rPr sz="1600"/>
+              <a:rPr sz="1400"/>
               <a:t>    • docs.google.com</a:t>
             </a:r>
           </a:p>
           <a:p>
             <a:pPr lvl="1">
-              <a:spcAft>
-                <a:spcPts val="1000"/>
+              <a:lnSpc>
+                <a:spcPct val="90000"/>
+              </a:lnSpc>
+              <a:spcAft>
+                <a:spcPts val="300"/>
               </a:spcAft>
               <a:defRPr sz="1700"/>
             </a:pPr>
             <a:r>
-              <a:rPr sz="1600"/>
+              <a:rPr sz="1400"/>
               <a:t>    • Google hesabı ile giriş</a:t>
             </a:r>
           </a:p>
           <a:p>
             <a:pPr lvl="1">
-              <a:spcAft>
-                <a:spcPts val="1000"/>
+              <a:lnSpc>
+                <a:spcPct val="90000"/>
+              </a:lnSpc>
+              <a:spcAft>
+                <a:spcPts val="300"/>
               </a:spcAft>
               <a:defRPr sz="1700"/>
             </a:pPr>
             <a:r>
-              <a:rPr sz="1600"/>
+              <a:rPr sz="1400"/>
               <a:t>    • Yeni belge oluştur</a:t>
             </a:r>
           </a:p>
           <a:p>
             <a:pPr>
-              <a:spcAft>
-                <a:spcPts val="1000"/>
-              </a:spcAft>
-              <a:defRPr sz="1900"/>
-            </a:pPr>
-          </a:p>
-          <a:p>
-            <a:pPr>
-              <a:spcAft>
-                <a:spcPts val="1000"/>
-              </a:spcAft>
-              <a:defRPr sz="1900"/>
-            </a:pPr>
-            <a:r>
-              <a:rPr sz="1600"/>
+              <a:lnSpc>
+                <a:spcPct val="90000"/>
+              </a:lnSpc>
+              <a:spcAft>
+                <a:spcPts val="300"/>
+              </a:spcAft>
+              <a:defRPr sz="1900"/>
+            </a:pPr>
+          </a:p>
+          <a:p>
+            <a:pPr>
+              <a:lnSpc>
+                <a:spcPct val="90000"/>
+              </a:lnSpc>
+              <a:spcAft>
+                <a:spcPts val="300"/>
+              </a:spcAft>
+              <a:defRPr sz="1900"/>
+            </a:pPr>
+            <a:r>
+              <a:rPr sz="1400"/>
               <a:t>✅ Paylaşma:</a:t>
             </a:r>
           </a:p>
           <a:p>
             <a:pPr lvl="1">
-              <a:spcAft>
-                <a:spcPts val="1000"/>
+              <a:lnSpc>
+                <a:spcPct val="90000"/>
+              </a:lnSpc>
+              <a:spcAft>
+                <a:spcPts val="300"/>
               </a:spcAft>
               <a:defRPr sz="1700"/>
             </a:pPr>
             <a:r>
-              <a:rPr sz="1600"/>
+              <a:rPr sz="1400"/>
               <a:t>    • Paylaş butonu</a:t>
             </a:r>
           </a:p>
           <a:p>
             <a:pPr lvl="1">
-              <a:spcAft>
-                <a:spcPts val="1000"/>
+              <a:lnSpc>
+                <a:spcPct val="90000"/>
+              </a:lnSpc>
+              <a:spcAft>
+                <a:spcPts val="300"/>
               </a:spcAft>
               <a:defRPr sz="1700"/>
             </a:pPr>
             <a:r>
-              <a:rPr sz="1600"/>
+              <a:rPr sz="1400"/>
               <a:t>    • E-posta ile paylaş</a:t>
             </a:r>
           </a:p>
           <a:p>
             <a:pPr lvl="1">
-              <a:spcAft>
-                <a:spcPts val="1000"/>
+              <a:lnSpc>
+                <a:spcPct val="90000"/>
+              </a:lnSpc>
+              <a:spcAft>
+                <a:spcPts val="300"/>
               </a:spcAft>
               <a:defRPr sz="1700"/>
             </a:pPr>
             <a:r>
-              <a:rPr sz="1600"/>
+              <a:rPr sz="1400"/>
               <a:t>    • Link ile paylaş</a:t>
             </a:r>
           </a:p>
           <a:p>
             <a:pPr lvl="1">
-              <a:spcAft>
-                <a:spcPts val="1000"/>
+              <a:lnSpc>
+                <a:spcPct val="90000"/>
+              </a:lnSpc>
+              <a:spcAft>
+                <a:spcPts val="300"/>
               </a:spcAft>
               <a:defRPr sz="1700"/>
             </a:pPr>
             <a:r>
-              <a:rPr sz="1600"/>
+              <a:rPr sz="1400"/>
               <a:t>    • İzinler: Görüntüleme, Yorum, Düzenleme</a:t>
             </a:r>
           </a:p>
           <a:p>
             <a:pPr>
-              <a:spcAft>
-                <a:spcPts val="1000"/>
-              </a:spcAft>
-              <a:defRPr sz="1900"/>
-            </a:pPr>
-          </a:p>
-          <a:p>
-            <a:pPr>
-              <a:spcAft>
-                <a:spcPts val="1000"/>
-              </a:spcAft>
-              <a:defRPr sz="1900"/>
-            </a:pPr>
-            <a:r>
-              <a:rPr sz="1600"/>
+              <a:lnSpc>
+                <a:spcPct val="90000"/>
+              </a:lnSpc>
+              <a:spcAft>
+                <a:spcPts val="300"/>
+              </a:spcAft>
+              <a:defRPr sz="1900"/>
+            </a:pPr>
+          </a:p>
+          <a:p>
+            <a:pPr>
+              <a:lnSpc>
+                <a:spcPct val="90000"/>
+              </a:lnSpc>
+              <a:spcAft>
+                <a:spcPts val="300"/>
+              </a:spcAft>
+              <a:defRPr sz="1900"/>
+            </a:pPr>
+            <a:r>
+              <a:rPr sz="1400"/>
               <a:t>💡 Grup ödevlerinde çok kullanışlı!</a:t>
             </a:r>
           </a:p>
           <a:p>
             <a:pPr>
-              <a:spcAft>
-                <a:spcPts val="1000"/>
-              </a:spcAft>
-              <a:defRPr sz="1900"/>
-            </a:pPr>
-            <a:r>
-              <a:rPr sz="1600"/>
+              <a:lnSpc>
+                <a:spcPct val="90000"/>
+              </a:lnSpc>
+              <a:spcAft>
+                <a:spcPts val="300"/>
+              </a:spcAft>
+              <a:defRPr sz="1900"/>
+            </a:pPr>
+            <a:r>
+              <a:rPr sz="1400"/>
               <a:t>Herkes aynı anda çalışabilir</a:t>
             </a:r>
           </a:p>

--- a/sunumlar/6-sinif-unite2-kelime-islemci-DETAYLI.pptx
+++ b/sunumlar/6-sinif-unite2-kelime-islemci-DETAYLI.pptx
@@ -4849,12 +4849,21 @@
           <a:noFill/>
         </p:spPr>
         <p:txBody>
-          <a:bodyPr wrap="square">
+          <a:bodyPr wrap="square" tIns="25400" bIns="25400" lIns="63500" rIns="63500">
             <a:spAutoFit/>
           </a:bodyPr>
           <a:lstStyle/>
           <a:p>
             <a:pPr algn="ctr">
+              <a:lnSpc>
+                <a:spcPct val="85000"/>
+              </a:lnSpc>
+              <a:spcBef>
+                <a:spcPts val="200"/>
+              </a:spcBef>
+              <a:spcAft>
+                <a:spcPts val="200"/>
+              </a:spcAft>
               <a:defRPr sz="5400" b="1">
                 <a:solidFill>
                   <a:srgbClr val="FFFFFF"/>
@@ -4862,6 +4871,7 @@
               </a:defRPr>
             </a:pPr>
             <a:r>
+              <a:rPr/>
               <a:t>6. SINIF - ÜNİTE 2</a:t>
             </a:r>
           </a:p>
@@ -4884,12 +4894,21 @@
           <a:noFill/>
         </p:spPr>
         <p:txBody>
-          <a:bodyPr wrap="square">
+          <a:bodyPr wrap="square" tIns="25400" bIns="25400" lIns="63500" rIns="63500">
             <a:spAutoFit/>
           </a:bodyPr>
           <a:lstStyle/>
           <a:p>
             <a:pPr algn="ctr">
+              <a:lnSpc>
+                <a:spcPct val="85000"/>
+              </a:lnSpc>
+              <a:spcBef>
+                <a:spcPts val="200"/>
+              </a:spcBef>
+              <a:spcAft>
+                <a:spcPts val="200"/>
+              </a:spcAft>
               <a:defRPr sz="2800">
                 <a:solidFill>
                   <a:srgbClr val="FFFFFF"/>
@@ -4897,6 +4916,7 @@
               </a:defRPr>
             </a:pPr>
             <a:r>
+              <a:rPr/>
               <a:t>Kelime İşlemci Programları</a:t>
             </a:r>
           </a:p>
@@ -4932,10 +4952,19 @@
         </p:nvSpPr>
         <p:spPr/>
         <p:txBody>
-          <a:bodyPr wrap="square"/>
+          <a:bodyPr wrap="square" tIns="25400" bIns="25400" lIns="63500" rIns="63500"/>
           <a:lstStyle/>
           <a:p>
             <a:pPr>
+              <a:lnSpc>
+                <a:spcPct val="85000"/>
+              </a:lnSpc>
+              <a:spcBef>
+                <a:spcPts val="200"/>
+              </a:spcBef>
+              <a:spcAft>
+                <a:spcPts val="200"/>
+              </a:spcAft>
               <a:defRPr sz="3800" b="1">
                 <a:solidFill>
                   <a:srgbClr val="764BA2"/>
@@ -4943,6 +4972,7 @@
               </a:defRPr>
             </a:pPr>
             <a:r>
+              <a:rPr/>
               <a:t>🤝 İşbirlikli Çalışma</a:t>
             </a:r>
           </a:p>
@@ -4982,7 +5012,7 @@
           <a:noFill/>
         </p:spPr>
         <p:txBody>
-          <a:bodyPr wrap="square">
+          <a:bodyPr wrap="square" tIns="25400" bIns="25400" lIns="63500" rIns="63500">
             <a:spAutoFit/>
           </a:bodyPr>
           <a:lstStyle/>
@@ -4999,10 +5029,13 @@
           <a:p>
             <a:pPr>
               <a:lnSpc>
-                <a:spcPct val="90000"/>
-              </a:lnSpc>
-              <a:spcAft>
-                <a:spcPts val="300"/>
+                <a:spcPct val="85000"/>
+              </a:lnSpc>
+              <a:spcBef>
+                <a:spcPts val="200"/>
+              </a:spcBef>
+              <a:spcAft>
+                <a:spcPts val="200"/>
               </a:spcAft>
               <a:defRPr sz="1900"/>
             </a:pPr>
@@ -5025,10 +5058,13 @@
           <a:p>
             <a:pPr>
               <a:lnSpc>
-                <a:spcPct val="90000"/>
-              </a:lnSpc>
-              <a:spcAft>
-                <a:spcPts val="300"/>
+                <a:spcPct val="85000"/>
+              </a:lnSpc>
+              <a:spcBef>
+                <a:spcPts val="200"/>
+              </a:spcBef>
+              <a:spcAft>
+                <a:spcPts val="200"/>
               </a:spcAft>
               <a:defRPr sz="1900"/>
             </a:pPr>
@@ -5040,10 +5076,13 @@
           <a:p>
             <a:pPr lvl="1">
               <a:lnSpc>
-                <a:spcPct val="90000"/>
-              </a:lnSpc>
-              <a:spcAft>
-                <a:spcPts val="300"/>
+                <a:spcPct val="85000"/>
+              </a:lnSpc>
+              <a:spcBef>
+                <a:spcPts val="200"/>
+              </a:spcBef>
+              <a:spcAft>
+                <a:spcPts val="200"/>
               </a:spcAft>
               <a:defRPr sz="1700"/>
             </a:pPr>
@@ -5055,10 +5094,13 @@
           <a:p>
             <a:pPr lvl="1">
               <a:lnSpc>
-                <a:spcPct val="90000"/>
-              </a:lnSpc>
-              <a:spcAft>
-                <a:spcPts val="300"/>
+                <a:spcPct val="85000"/>
+              </a:lnSpc>
+              <a:spcBef>
+                <a:spcPts val="200"/>
+              </a:spcBef>
+              <a:spcAft>
+                <a:spcPts val="200"/>
               </a:spcAft>
               <a:defRPr sz="1700"/>
             </a:pPr>
@@ -5070,10 +5112,13 @@
           <a:p>
             <a:pPr lvl="1">
               <a:lnSpc>
-                <a:spcPct val="90000"/>
-              </a:lnSpc>
-              <a:spcAft>
-                <a:spcPts val="300"/>
+                <a:spcPct val="85000"/>
+              </a:lnSpc>
+              <a:spcBef>
+                <a:spcPts val="200"/>
+              </a:spcBef>
+              <a:spcAft>
+                <a:spcPts val="200"/>
               </a:spcAft>
               <a:defRPr sz="1700"/>
             </a:pPr>
@@ -5096,10 +5141,13 @@
           <a:p>
             <a:pPr>
               <a:lnSpc>
-                <a:spcPct val="90000"/>
-              </a:lnSpc>
-              <a:spcAft>
-                <a:spcPts val="300"/>
+                <a:spcPct val="85000"/>
+              </a:lnSpc>
+              <a:spcBef>
+                <a:spcPts val="200"/>
+              </a:spcBef>
+              <a:spcAft>
+                <a:spcPts val="200"/>
               </a:spcAft>
               <a:defRPr sz="1900"/>
             </a:pPr>
@@ -5111,10 +5159,13 @@
           <a:p>
             <a:pPr lvl="1">
               <a:lnSpc>
-                <a:spcPct val="90000"/>
-              </a:lnSpc>
-              <a:spcAft>
-                <a:spcPts val="300"/>
+                <a:spcPct val="85000"/>
+              </a:lnSpc>
+              <a:spcBef>
+                <a:spcPts val="200"/>
+              </a:spcBef>
+              <a:spcAft>
+                <a:spcPts val="200"/>
               </a:spcAft>
               <a:defRPr sz="1700"/>
             </a:pPr>
@@ -5126,10 +5177,13 @@
           <a:p>
             <a:pPr lvl="1">
               <a:lnSpc>
-                <a:spcPct val="90000"/>
-              </a:lnSpc>
-              <a:spcAft>
-                <a:spcPts val="300"/>
+                <a:spcPct val="85000"/>
+              </a:lnSpc>
+              <a:spcBef>
+                <a:spcPts val="200"/>
+              </a:spcBef>
+              <a:spcAft>
+                <a:spcPts val="200"/>
               </a:spcAft>
               <a:defRPr sz="1700"/>
             </a:pPr>
@@ -5141,10 +5195,13 @@
           <a:p>
             <a:pPr lvl="1">
               <a:lnSpc>
-                <a:spcPct val="90000"/>
-              </a:lnSpc>
-              <a:spcAft>
-                <a:spcPts val="300"/>
+                <a:spcPct val="85000"/>
+              </a:lnSpc>
+              <a:spcBef>
+                <a:spcPts val="200"/>
+              </a:spcBef>
+              <a:spcAft>
+                <a:spcPts val="200"/>
               </a:spcAft>
               <a:defRPr sz="1700"/>
             </a:pPr>
@@ -5167,10 +5224,13 @@
           <a:p>
             <a:pPr>
               <a:lnSpc>
-                <a:spcPct val="90000"/>
-              </a:lnSpc>
-              <a:spcAft>
-                <a:spcPts val="300"/>
+                <a:spcPct val="85000"/>
+              </a:lnSpc>
+              <a:spcBef>
+                <a:spcPts val="200"/>
+              </a:spcBef>
+              <a:spcAft>
+                <a:spcPts val="200"/>
               </a:spcAft>
               <a:defRPr sz="1900"/>
             </a:pPr>
@@ -5182,10 +5242,13 @@
           <a:p>
             <a:pPr lvl="1">
               <a:lnSpc>
-                <a:spcPct val="90000"/>
-              </a:lnSpc>
-              <a:spcAft>
-                <a:spcPts val="300"/>
+                <a:spcPct val="85000"/>
+              </a:lnSpc>
+              <a:spcBef>
+                <a:spcPts val="200"/>
+              </a:spcBef>
+              <a:spcAft>
+                <a:spcPts val="200"/>
               </a:spcAft>
               <a:defRPr sz="1700"/>
             </a:pPr>
@@ -5197,10 +5260,13 @@
           <a:p>
             <a:pPr lvl="1">
               <a:lnSpc>
-                <a:spcPct val="90000"/>
-              </a:lnSpc>
-              <a:spcAft>
-                <a:spcPts val="300"/>
+                <a:spcPct val="85000"/>
+              </a:lnSpc>
+              <a:spcBef>
+                <a:spcPts val="200"/>
+              </a:spcBef>
+              <a:spcAft>
+                <a:spcPts val="200"/>
               </a:spcAft>
               <a:defRPr sz="1700"/>
             </a:pPr>
@@ -5212,10 +5278,13 @@
           <a:p>
             <a:pPr lvl="1">
               <a:lnSpc>
-                <a:spcPct val="90000"/>
-              </a:lnSpc>
-              <a:spcAft>
-                <a:spcPts val="300"/>
+                <a:spcPct val="85000"/>
+              </a:lnSpc>
+              <a:spcBef>
+                <a:spcPts val="200"/>
+              </a:spcBef>
+              <a:spcAft>
+                <a:spcPts val="200"/>
               </a:spcAft>
               <a:defRPr sz="1700"/>
             </a:pPr>
@@ -5238,10 +5307,13 @@
           <a:p>
             <a:pPr>
               <a:lnSpc>
-                <a:spcPct val="90000"/>
-              </a:lnSpc>
-              <a:spcAft>
-                <a:spcPts val="300"/>
+                <a:spcPct val="85000"/>
+              </a:lnSpc>
+              <a:spcBef>
+                <a:spcPts val="200"/>
+              </a:spcBef>
+              <a:spcAft>
+                <a:spcPts val="200"/>
               </a:spcAft>
               <a:defRPr sz="1900"/>
             </a:pPr>
@@ -5253,10 +5325,13 @@
           <a:p>
             <a:pPr lvl="1">
               <a:lnSpc>
-                <a:spcPct val="90000"/>
-              </a:lnSpc>
-              <a:spcAft>
-                <a:spcPts val="300"/>
+                <a:spcPct val="85000"/>
+              </a:lnSpc>
+              <a:spcBef>
+                <a:spcPts val="200"/>
+              </a:spcBef>
+              <a:spcAft>
+                <a:spcPts val="200"/>
               </a:spcAft>
               <a:defRPr sz="1700"/>
             </a:pPr>
@@ -5268,10 +5343,13 @@
           <a:p>
             <a:pPr lvl="1">
               <a:lnSpc>
-                <a:spcPct val="90000"/>
-              </a:lnSpc>
-              <a:spcAft>
-                <a:spcPts val="300"/>
+                <a:spcPct val="85000"/>
+              </a:lnSpc>
+              <a:spcBef>
+                <a:spcPts val="200"/>
+              </a:spcBef>
+              <a:spcAft>
+                <a:spcPts val="200"/>
               </a:spcAft>
               <a:defRPr sz="1700"/>
             </a:pPr>
@@ -5294,10 +5372,13 @@
           <a:p>
             <a:pPr>
               <a:lnSpc>
-                <a:spcPct val="90000"/>
-              </a:lnSpc>
-              <a:spcAft>
-                <a:spcPts val="300"/>
+                <a:spcPct val="85000"/>
+              </a:lnSpc>
+              <a:spcBef>
+                <a:spcPts val="200"/>
+              </a:spcBef>
+              <a:spcAft>
+                <a:spcPts val="200"/>
               </a:spcAft>
               <a:defRPr sz="1900"/>
             </a:pPr>
@@ -5309,10 +5390,13 @@
           <a:p>
             <a:pPr lvl="1">
               <a:lnSpc>
-                <a:spcPct val="90000"/>
-              </a:lnSpc>
-              <a:spcAft>
-                <a:spcPts val="300"/>
+                <a:spcPct val="85000"/>
+              </a:lnSpc>
+              <a:spcBef>
+                <a:spcPts val="200"/>
+              </a:spcBef>
+              <a:spcAft>
+                <a:spcPts val="200"/>
               </a:spcAft>
               <a:defRPr sz="1700"/>
             </a:pPr>
@@ -5324,10 +5408,13 @@
           <a:p>
             <a:pPr lvl="1">
               <a:lnSpc>
-                <a:spcPct val="90000"/>
-              </a:lnSpc>
-              <a:spcAft>
-                <a:spcPts val="300"/>
+                <a:spcPct val="85000"/>
+              </a:lnSpc>
+              <a:spcBef>
+                <a:spcPts val="200"/>
+              </a:spcBef>
+              <a:spcAft>
+                <a:spcPts val="200"/>
               </a:spcAft>
               <a:defRPr sz="1700"/>
             </a:pPr>
@@ -5339,10 +5426,13 @@
           <a:p>
             <a:pPr lvl="1">
               <a:lnSpc>
-                <a:spcPct val="90000"/>
-              </a:lnSpc>
-              <a:spcAft>
-                <a:spcPts val="300"/>
+                <a:spcPct val="85000"/>
+              </a:lnSpc>
+              <a:spcBef>
+                <a:spcPts val="200"/>
+              </a:spcBef>
+              <a:spcAft>
+                <a:spcPts val="200"/>
               </a:spcAft>
               <a:defRPr sz="1700"/>
             </a:pPr>
@@ -5383,10 +5473,19 @@
         </p:nvSpPr>
         <p:spPr/>
         <p:txBody>
-          <a:bodyPr wrap="square"/>
+          <a:bodyPr wrap="square" tIns="25400" bIns="25400" lIns="63500" rIns="63500"/>
           <a:lstStyle/>
           <a:p>
             <a:pPr>
+              <a:lnSpc>
+                <a:spcPct val="85000"/>
+              </a:lnSpc>
+              <a:spcBef>
+                <a:spcPts val="200"/>
+              </a:spcBef>
+              <a:spcAft>
+                <a:spcPts val="200"/>
+              </a:spcAft>
               <a:defRPr sz="3800" b="1">
                 <a:solidFill>
                   <a:srgbClr val="764BA2"/>
@@ -5394,6 +5493,7 @@
               </a:defRPr>
             </a:pPr>
             <a:r>
+              <a:rPr/>
               <a:t>📝 Ünite Özeti</a:t>
             </a:r>
           </a:p>
@@ -5433,7 +5533,7 @@
           <a:noFill/>
         </p:spPr>
         <p:txBody>
-          <a:bodyPr wrap="square">
+          <a:bodyPr wrap="square" tIns="25400" bIns="25400" lIns="63500" rIns="63500">
             <a:spAutoFit/>
           </a:bodyPr>
           <a:lstStyle/>
@@ -5450,10 +5550,13 @@
           <a:p>
             <a:pPr>
               <a:lnSpc>
-                <a:spcPct val="90000"/>
-              </a:lnSpc>
-              <a:spcAft>
-                <a:spcPts val="300"/>
+                <a:spcPct val="85000"/>
+              </a:lnSpc>
+              <a:spcBef>
+                <a:spcPts val="200"/>
+              </a:spcBef>
+              <a:spcAft>
+                <a:spcPts val="200"/>
               </a:spcAft>
               <a:defRPr sz="1900"/>
             </a:pPr>
@@ -5476,10 +5579,13 @@
           <a:p>
             <a:pPr>
               <a:lnSpc>
-                <a:spcPct val="90000"/>
-              </a:lnSpc>
-              <a:spcAft>
-                <a:spcPts val="300"/>
+                <a:spcPct val="85000"/>
+              </a:lnSpc>
+              <a:spcBef>
+                <a:spcPts val="200"/>
+              </a:spcBef>
+              <a:spcAft>
+                <a:spcPts val="200"/>
               </a:spcAft>
               <a:defRPr sz="1900"/>
             </a:pPr>
@@ -5491,10 +5597,13 @@
           <a:p>
             <a:pPr>
               <a:lnSpc>
-                <a:spcPct val="90000"/>
-              </a:lnSpc>
-              <a:spcAft>
-                <a:spcPts val="300"/>
+                <a:spcPct val="85000"/>
+              </a:lnSpc>
+              <a:spcBef>
+                <a:spcPts val="200"/>
+              </a:spcBef>
+              <a:spcAft>
+                <a:spcPts val="200"/>
               </a:spcAft>
               <a:defRPr sz="1900"/>
             </a:pPr>
@@ -5506,10 +5615,13 @@
           <a:p>
             <a:pPr>
               <a:lnSpc>
-                <a:spcPct val="90000"/>
-              </a:lnSpc>
-              <a:spcAft>
-                <a:spcPts val="300"/>
+                <a:spcPct val="85000"/>
+              </a:lnSpc>
+              <a:spcBef>
+                <a:spcPts val="200"/>
+              </a:spcBef>
+              <a:spcAft>
+                <a:spcPts val="200"/>
               </a:spcAft>
               <a:defRPr sz="1900"/>
             </a:pPr>
@@ -5521,10 +5633,13 @@
           <a:p>
             <a:pPr>
               <a:lnSpc>
-                <a:spcPct val="90000"/>
-              </a:lnSpc>
-              <a:spcAft>
-                <a:spcPts val="300"/>
+                <a:spcPct val="85000"/>
+              </a:lnSpc>
+              <a:spcBef>
+                <a:spcPts val="200"/>
+              </a:spcBef>
+              <a:spcAft>
+                <a:spcPts val="200"/>
               </a:spcAft>
               <a:defRPr sz="1900"/>
             </a:pPr>
@@ -5536,10 +5651,13 @@
           <a:p>
             <a:pPr>
               <a:lnSpc>
-                <a:spcPct val="90000"/>
-              </a:lnSpc>
-              <a:spcAft>
-                <a:spcPts val="300"/>
+                <a:spcPct val="85000"/>
+              </a:lnSpc>
+              <a:spcBef>
+                <a:spcPts val="200"/>
+              </a:spcBef>
+              <a:spcAft>
+                <a:spcPts val="200"/>
               </a:spcAft>
               <a:defRPr sz="1900"/>
             </a:pPr>
@@ -5551,10 +5669,13 @@
           <a:p>
             <a:pPr>
               <a:lnSpc>
-                <a:spcPct val="90000"/>
-              </a:lnSpc>
-              <a:spcAft>
-                <a:spcPts val="300"/>
+                <a:spcPct val="85000"/>
+              </a:lnSpc>
+              <a:spcBef>
+                <a:spcPts val="200"/>
+              </a:spcBef>
+              <a:spcAft>
+                <a:spcPts val="200"/>
               </a:spcAft>
               <a:defRPr sz="1900"/>
             </a:pPr>
@@ -5566,10 +5687,13 @@
           <a:p>
             <a:pPr>
               <a:lnSpc>
-                <a:spcPct val="90000"/>
-              </a:lnSpc>
-              <a:spcAft>
-                <a:spcPts val="300"/>
+                <a:spcPct val="85000"/>
+              </a:lnSpc>
+              <a:spcBef>
+                <a:spcPts val="200"/>
+              </a:spcBef>
+              <a:spcAft>
+                <a:spcPts val="200"/>
               </a:spcAft>
               <a:defRPr sz="1900"/>
             </a:pPr>
@@ -5581,10 +5705,13 @@
           <a:p>
             <a:pPr>
               <a:lnSpc>
-                <a:spcPct val="90000"/>
-              </a:lnSpc>
-              <a:spcAft>
-                <a:spcPts val="300"/>
+                <a:spcPct val="85000"/>
+              </a:lnSpc>
+              <a:spcBef>
+                <a:spcPts val="200"/>
+              </a:spcBef>
+              <a:spcAft>
+                <a:spcPts val="200"/>
               </a:spcAft>
               <a:defRPr sz="1900"/>
             </a:pPr>
@@ -5596,10 +5723,13 @@
           <a:p>
             <a:pPr>
               <a:lnSpc>
-                <a:spcPct val="90000"/>
-              </a:lnSpc>
-              <a:spcAft>
-                <a:spcPts val="300"/>
+                <a:spcPct val="85000"/>
+              </a:lnSpc>
+              <a:spcBef>
+                <a:spcPts val="200"/>
+              </a:spcBef>
+              <a:spcAft>
+                <a:spcPts val="200"/>
               </a:spcAft>
               <a:defRPr sz="1900"/>
             </a:pPr>
@@ -5622,10 +5752,13 @@
           <a:p>
             <a:pPr>
               <a:lnSpc>
-                <a:spcPct val="90000"/>
-              </a:lnSpc>
-              <a:spcAft>
-                <a:spcPts val="300"/>
+                <a:spcPct val="85000"/>
+              </a:lnSpc>
+              <a:spcBef>
+                <a:spcPts val="200"/>
+              </a:spcBef>
+              <a:spcAft>
+                <a:spcPts val="200"/>
               </a:spcAft>
               <a:defRPr sz="1900"/>
             </a:pPr>
@@ -5637,10 +5770,13 @@
           <a:p>
             <a:pPr>
               <a:lnSpc>
-                <a:spcPct val="90000"/>
-              </a:lnSpc>
-              <a:spcAft>
-                <a:spcPts val="300"/>
+                <a:spcPct val="85000"/>
+              </a:lnSpc>
+              <a:spcBef>
+                <a:spcPts val="200"/>
+              </a:spcBef>
+              <a:spcAft>
+                <a:spcPts val="200"/>
               </a:spcAft>
               <a:defRPr sz="1900"/>
             </a:pPr>
@@ -5663,10 +5799,13 @@
           <a:p>
             <a:pPr>
               <a:lnSpc>
-                <a:spcPct val="90000"/>
-              </a:lnSpc>
-              <a:spcAft>
-                <a:spcPts val="300"/>
+                <a:spcPct val="85000"/>
+              </a:lnSpc>
+              <a:spcBef>
+                <a:spcPts val="200"/>
+              </a:spcBef>
+              <a:spcAft>
+                <a:spcPts val="200"/>
               </a:spcAft>
               <a:defRPr sz="1900"/>
             </a:pPr>
@@ -5707,10 +5846,19 @@
         </p:nvSpPr>
         <p:spPr/>
         <p:txBody>
-          <a:bodyPr wrap="square"/>
+          <a:bodyPr wrap="square" tIns="25400" bIns="25400" lIns="63500" rIns="63500"/>
           <a:lstStyle/>
           <a:p>
             <a:pPr>
+              <a:lnSpc>
+                <a:spcPct val="85000"/>
+              </a:lnSpc>
+              <a:spcBef>
+                <a:spcPts val="200"/>
+              </a:spcBef>
+              <a:spcAft>
+                <a:spcPts val="200"/>
+              </a:spcAft>
               <a:defRPr sz="3800" b="1">
                 <a:solidFill>
                   <a:srgbClr val="764BA2"/>
@@ -5718,6 +5866,7 @@
               </a:defRPr>
             </a:pPr>
             <a:r>
+              <a:rPr/>
               <a:t>📚 Ünitenin Konuları</a:t>
             </a:r>
           </a:p>
@@ -5757,7 +5906,7 @@
           <a:noFill/>
         </p:spPr>
         <p:txBody>
-          <a:bodyPr wrap="square">
+          <a:bodyPr wrap="square" tIns="25400" bIns="25400" lIns="63500" rIns="63500">
             <a:spAutoFit/>
           </a:bodyPr>
           <a:lstStyle/>
@@ -5774,10 +5923,13 @@
           <a:p>
             <a:pPr>
               <a:lnSpc>
-                <a:spcPct val="90000"/>
-              </a:lnSpc>
-              <a:spcAft>
-                <a:spcPts val="300"/>
+                <a:spcPct val="85000"/>
+              </a:lnSpc>
+              <a:spcBef>
+                <a:spcPts val="200"/>
+              </a:spcBef>
+              <a:spcAft>
+                <a:spcPts val="200"/>
               </a:spcAft>
               <a:defRPr sz="1900"/>
             </a:pPr>
@@ -5800,10 +5952,13 @@
           <a:p>
             <a:pPr>
               <a:lnSpc>
-                <a:spcPct val="90000"/>
-              </a:lnSpc>
-              <a:spcAft>
-                <a:spcPts val="300"/>
+                <a:spcPct val="85000"/>
+              </a:lnSpc>
+              <a:spcBef>
+                <a:spcPts val="200"/>
+              </a:spcBef>
+              <a:spcAft>
+                <a:spcPts val="200"/>
               </a:spcAft>
               <a:defRPr sz="1900"/>
             </a:pPr>
@@ -5815,10 +5970,13 @@
           <a:p>
             <a:pPr>
               <a:lnSpc>
-                <a:spcPct val="90000"/>
-              </a:lnSpc>
-              <a:spcAft>
-                <a:spcPts val="300"/>
+                <a:spcPct val="85000"/>
+              </a:lnSpc>
+              <a:spcBef>
+                <a:spcPts val="200"/>
+              </a:spcBef>
+              <a:spcAft>
+                <a:spcPts val="200"/>
               </a:spcAft>
               <a:defRPr sz="1900"/>
             </a:pPr>
@@ -5830,10 +5988,13 @@
           <a:p>
             <a:pPr>
               <a:lnSpc>
-                <a:spcPct val="90000"/>
-              </a:lnSpc>
-              <a:spcAft>
-                <a:spcPts val="300"/>
+                <a:spcPct val="85000"/>
+              </a:lnSpc>
+              <a:spcBef>
+                <a:spcPts val="200"/>
+              </a:spcBef>
+              <a:spcAft>
+                <a:spcPts val="200"/>
               </a:spcAft>
               <a:defRPr sz="1900"/>
             </a:pPr>
@@ -5845,10 +6006,13 @@
           <a:p>
             <a:pPr>
               <a:lnSpc>
-                <a:spcPct val="90000"/>
-              </a:lnSpc>
-              <a:spcAft>
-                <a:spcPts val="300"/>
+                <a:spcPct val="85000"/>
+              </a:lnSpc>
+              <a:spcBef>
+                <a:spcPts val="200"/>
+              </a:spcBef>
+              <a:spcAft>
+                <a:spcPts val="200"/>
               </a:spcAft>
               <a:defRPr sz="1900"/>
             </a:pPr>
@@ -5860,10 +6024,13 @@
           <a:p>
             <a:pPr>
               <a:lnSpc>
-                <a:spcPct val="90000"/>
-              </a:lnSpc>
-              <a:spcAft>
-                <a:spcPts val="300"/>
+                <a:spcPct val="85000"/>
+              </a:lnSpc>
+              <a:spcBef>
+                <a:spcPts val="200"/>
+              </a:spcBef>
+              <a:spcAft>
+                <a:spcPts val="200"/>
               </a:spcAft>
               <a:defRPr sz="1900"/>
             </a:pPr>
@@ -5875,10 +6042,13 @@
           <a:p>
             <a:pPr>
               <a:lnSpc>
-                <a:spcPct val="90000"/>
-              </a:lnSpc>
-              <a:spcAft>
-                <a:spcPts val="300"/>
+                <a:spcPct val="85000"/>
+              </a:lnSpc>
+              <a:spcBef>
+                <a:spcPts val="200"/>
+              </a:spcBef>
+              <a:spcAft>
+                <a:spcPts val="200"/>
               </a:spcAft>
               <a:defRPr sz="1900"/>
             </a:pPr>
@@ -5890,10 +6060,13 @@
           <a:p>
             <a:pPr>
               <a:lnSpc>
-                <a:spcPct val="90000"/>
-              </a:lnSpc>
-              <a:spcAft>
-                <a:spcPts val="300"/>
+                <a:spcPct val="85000"/>
+              </a:lnSpc>
+              <a:spcBef>
+                <a:spcPts val="200"/>
+              </a:spcBef>
+              <a:spcAft>
+                <a:spcPts val="200"/>
               </a:spcAft>
               <a:defRPr sz="1900"/>
             </a:pPr>
@@ -5905,10 +6078,13 @@
           <a:p>
             <a:pPr>
               <a:lnSpc>
-                <a:spcPct val="90000"/>
-              </a:lnSpc>
-              <a:spcAft>
-                <a:spcPts val="300"/>
+                <a:spcPct val="85000"/>
+              </a:lnSpc>
+              <a:spcBef>
+                <a:spcPts val="200"/>
+              </a:spcBef>
+              <a:spcAft>
+                <a:spcPts val="200"/>
               </a:spcAft>
               <a:defRPr sz="1900"/>
             </a:pPr>
@@ -5920,10 +6096,13 @@
           <a:p>
             <a:pPr>
               <a:lnSpc>
-                <a:spcPct val="90000"/>
-              </a:lnSpc>
-              <a:spcAft>
-                <a:spcPts val="300"/>
+                <a:spcPct val="85000"/>
+              </a:lnSpc>
+              <a:spcBef>
+                <a:spcPts val="200"/>
+              </a:spcBef>
+              <a:spcAft>
+                <a:spcPts val="200"/>
               </a:spcAft>
               <a:defRPr sz="1900"/>
             </a:pPr>
@@ -5935,10 +6114,13 @@
           <a:p>
             <a:pPr>
               <a:lnSpc>
-                <a:spcPct val="90000"/>
-              </a:lnSpc>
-              <a:spcAft>
-                <a:spcPts val="300"/>
+                <a:spcPct val="85000"/>
+              </a:lnSpc>
+              <a:spcBef>
+                <a:spcPts val="200"/>
+              </a:spcBef>
+              <a:spcAft>
+                <a:spcPts val="200"/>
               </a:spcAft>
               <a:defRPr sz="1900"/>
             </a:pPr>
@@ -5950,10 +6132,13 @@
           <a:p>
             <a:pPr>
               <a:lnSpc>
-                <a:spcPct val="90000"/>
-              </a:lnSpc>
-              <a:spcAft>
-                <a:spcPts val="300"/>
+                <a:spcPct val="85000"/>
+              </a:lnSpc>
+              <a:spcBef>
+                <a:spcPts val="200"/>
+              </a:spcBef>
+              <a:spcAft>
+                <a:spcPts val="200"/>
               </a:spcAft>
               <a:defRPr sz="1900"/>
             </a:pPr>
@@ -5976,10 +6161,13 @@
           <a:p>
             <a:pPr>
               <a:lnSpc>
-                <a:spcPct val="90000"/>
-              </a:lnSpc>
-              <a:spcAft>
-                <a:spcPts val="300"/>
+                <a:spcPct val="85000"/>
+              </a:lnSpc>
+              <a:spcBef>
+                <a:spcPts val="200"/>
+              </a:spcBef>
+              <a:spcAft>
+                <a:spcPts val="200"/>
               </a:spcAft>
               <a:defRPr sz="1900"/>
             </a:pPr>
@@ -5991,10 +6179,13 @@
           <a:p>
             <a:pPr>
               <a:lnSpc>
-                <a:spcPct val="90000"/>
-              </a:lnSpc>
-              <a:spcAft>
-                <a:spcPts val="300"/>
+                <a:spcPct val="85000"/>
+              </a:lnSpc>
+              <a:spcBef>
+                <a:spcPts val="200"/>
+              </a:spcBef>
+              <a:spcAft>
+                <a:spcPts val="200"/>
               </a:spcAft>
               <a:defRPr sz="1900"/>
             </a:pPr>
@@ -6035,10 +6226,19 @@
         </p:nvSpPr>
         <p:spPr/>
         <p:txBody>
-          <a:bodyPr wrap="square"/>
+          <a:bodyPr wrap="square" tIns="25400" bIns="25400" lIns="63500" rIns="63500"/>
           <a:lstStyle/>
           <a:p>
             <a:pPr>
+              <a:lnSpc>
+                <a:spcPct val="85000"/>
+              </a:lnSpc>
+              <a:spcBef>
+                <a:spcPts val="200"/>
+              </a:spcBef>
+              <a:spcAft>
+                <a:spcPts val="200"/>
+              </a:spcAft>
               <a:defRPr sz="3800" b="1">
                 <a:solidFill>
                   <a:srgbClr val="764BA2"/>
@@ -6046,6 +6246,7 @@
               </a:defRPr>
             </a:pPr>
             <a:r>
+              <a:rPr/>
               <a:t>📝 Kelime İşlemci Nedir?</a:t>
             </a:r>
           </a:p>
@@ -6085,7 +6286,7 @@
           <a:noFill/>
         </p:spPr>
         <p:txBody>
-          <a:bodyPr wrap="square">
+          <a:bodyPr wrap="square" tIns="25400" bIns="25400" lIns="63500" rIns="63500">
             <a:spAutoFit/>
           </a:bodyPr>
           <a:lstStyle/>
@@ -6102,10 +6303,13 @@
           <a:p>
             <a:pPr>
               <a:lnSpc>
-                <a:spcPct val="90000"/>
-              </a:lnSpc>
-              <a:spcAft>
-                <a:spcPts val="300"/>
+                <a:spcPct val="85000"/>
+              </a:lnSpc>
+              <a:spcBef>
+                <a:spcPts val="200"/>
+              </a:spcBef>
+              <a:spcAft>
+                <a:spcPts val="200"/>
               </a:spcAft>
               <a:defRPr sz="1900"/>
             </a:pPr>
@@ -6128,10 +6332,13 @@
           <a:p>
             <a:pPr>
               <a:lnSpc>
-                <a:spcPct val="90000"/>
-              </a:lnSpc>
-              <a:spcAft>
-                <a:spcPts val="300"/>
+                <a:spcPct val="85000"/>
+              </a:lnSpc>
+              <a:spcBef>
+                <a:spcPts val="200"/>
+              </a:spcBef>
+              <a:spcAft>
+                <a:spcPts val="200"/>
               </a:spcAft>
               <a:defRPr sz="1900"/>
             </a:pPr>
@@ -6143,10 +6350,13 @@
           <a:p>
             <a:pPr lvl="1">
               <a:lnSpc>
-                <a:spcPct val="90000"/>
-              </a:lnSpc>
-              <a:spcAft>
-                <a:spcPts val="300"/>
+                <a:spcPct val="85000"/>
+              </a:lnSpc>
+              <a:spcBef>
+                <a:spcPts val="200"/>
+              </a:spcBef>
+              <a:spcAft>
+                <a:spcPts val="200"/>
               </a:spcAft>
               <a:defRPr sz="1700"/>
             </a:pPr>
@@ -6158,10 +6368,13 @@
           <a:p>
             <a:pPr lvl="1">
               <a:lnSpc>
-                <a:spcPct val="90000"/>
-              </a:lnSpc>
-              <a:spcAft>
-                <a:spcPts val="300"/>
+                <a:spcPct val="85000"/>
+              </a:lnSpc>
+              <a:spcBef>
+                <a:spcPts val="200"/>
+              </a:spcBef>
+              <a:spcAft>
+                <a:spcPts val="200"/>
               </a:spcAft>
               <a:defRPr sz="1700"/>
             </a:pPr>
@@ -6173,10 +6386,13 @@
           <a:p>
             <a:pPr lvl="1">
               <a:lnSpc>
-                <a:spcPct val="90000"/>
-              </a:lnSpc>
-              <a:spcAft>
-                <a:spcPts val="300"/>
+                <a:spcPct val="85000"/>
+              </a:lnSpc>
+              <a:spcBef>
+                <a:spcPts val="200"/>
+              </a:spcBef>
+              <a:spcAft>
+                <a:spcPts val="200"/>
               </a:spcAft>
               <a:defRPr sz="1700"/>
             </a:pPr>
@@ -6188,10 +6404,13 @@
           <a:p>
             <a:pPr lvl="1">
               <a:lnSpc>
-                <a:spcPct val="90000"/>
-              </a:lnSpc>
-              <a:spcAft>
-                <a:spcPts val="300"/>
+                <a:spcPct val="85000"/>
+              </a:lnSpc>
+              <a:spcBef>
+                <a:spcPts val="200"/>
+              </a:spcBef>
+              <a:spcAft>
+                <a:spcPts val="200"/>
               </a:spcAft>
               <a:defRPr sz="1700"/>
             </a:pPr>
@@ -6214,10 +6433,13 @@
           <a:p>
             <a:pPr>
               <a:lnSpc>
-                <a:spcPct val="90000"/>
-              </a:lnSpc>
-              <a:spcAft>
-                <a:spcPts val="300"/>
+                <a:spcPct val="85000"/>
+              </a:lnSpc>
+              <a:spcBef>
+                <a:spcPts val="200"/>
+              </a:spcBef>
+              <a:spcAft>
+                <a:spcPts val="200"/>
               </a:spcAft>
               <a:defRPr sz="1900"/>
             </a:pPr>
@@ -6229,10 +6451,13 @@
           <a:p>
             <a:pPr lvl="1">
               <a:lnSpc>
-                <a:spcPct val="90000"/>
-              </a:lnSpc>
-              <a:spcAft>
-                <a:spcPts val="300"/>
+                <a:spcPct val="85000"/>
+              </a:lnSpc>
+              <a:spcBef>
+                <a:spcPts val="200"/>
+              </a:spcBef>
+              <a:spcAft>
+                <a:spcPts val="200"/>
               </a:spcAft>
               <a:defRPr sz="1700"/>
             </a:pPr>
@@ -6244,10 +6469,13 @@
           <a:p>
             <a:pPr lvl="1">
               <a:lnSpc>
-                <a:spcPct val="90000"/>
-              </a:lnSpc>
-              <a:spcAft>
-                <a:spcPts val="300"/>
+                <a:spcPct val="85000"/>
+              </a:lnSpc>
+              <a:spcBef>
+                <a:spcPts val="200"/>
+              </a:spcBef>
+              <a:spcAft>
+                <a:spcPts val="200"/>
               </a:spcAft>
               <a:defRPr sz="1700"/>
             </a:pPr>
@@ -6259,10 +6487,13 @@
           <a:p>
             <a:pPr lvl="1">
               <a:lnSpc>
-                <a:spcPct val="90000"/>
-              </a:lnSpc>
-              <a:spcAft>
-                <a:spcPts val="300"/>
+                <a:spcPct val="85000"/>
+              </a:lnSpc>
+              <a:spcBef>
+                <a:spcPts val="200"/>
+              </a:spcBef>
+              <a:spcAft>
+                <a:spcPts val="200"/>
               </a:spcAft>
               <a:defRPr sz="1700"/>
             </a:pPr>
@@ -6274,10 +6505,13 @@
           <a:p>
             <a:pPr lvl="1">
               <a:lnSpc>
-                <a:spcPct val="90000"/>
-              </a:lnSpc>
-              <a:spcAft>
-                <a:spcPts val="300"/>
+                <a:spcPct val="85000"/>
+              </a:lnSpc>
+              <a:spcBef>
+                <a:spcPts val="200"/>
+              </a:spcBef>
+              <a:spcAft>
+                <a:spcPts val="200"/>
               </a:spcAft>
               <a:defRPr sz="1700"/>
             </a:pPr>
@@ -6300,10 +6534,13 @@
           <a:p>
             <a:pPr>
               <a:lnSpc>
-                <a:spcPct val="90000"/>
-              </a:lnSpc>
-              <a:spcAft>
-                <a:spcPts val="300"/>
+                <a:spcPct val="85000"/>
+              </a:lnSpc>
+              <a:spcBef>
+                <a:spcPts val="200"/>
+              </a:spcBef>
+              <a:spcAft>
+                <a:spcPts val="200"/>
               </a:spcAft>
               <a:defRPr sz="1900"/>
             </a:pPr>
@@ -6315,10 +6552,13 @@
           <a:p>
             <a:pPr lvl="1">
               <a:lnSpc>
-                <a:spcPct val="90000"/>
-              </a:lnSpc>
-              <a:spcAft>
-                <a:spcPts val="300"/>
+                <a:spcPct val="85000"/>
+              </a:lnSpc>
+              <a:spcBef>
+                <a:spcPts val="200"/>
+              </a:spcBef>
+              <a:spcAft>
+                <a:spcPts val="200"/>
               </a:spcAft>
               <a:defRPr sz="1700"/>
             </a:pPr>
@@ -6330,10 +6570,13 @@
           <a:p>
             <a:pPr lvl="1">
               <a:lnSpc>
-                <a:spcPct val="90000"/>
-              </a:lnSpc>
-              <a:spcAft>
-                <a:spcPts val="300"/>
+                <a:spcPct val="85000"/>
+              </a:lnSpc>
+              <a:spcBef>
+                <a:spcPts val="200"/>
+              </a:spcBef>
+              <a:spcAft>
+                <a:spcPts val="200"/>
               </a:spcAft>
               <a:defRPr sz="1700"/>
             </a:pPr>
@@ -6345,10 +6588,13 @@
           <a:p>
             <a:pPr lvl="1">
               <a:lnSpc>
-                <a:spcPct val="90000"/>
-              </a:lnSpc>
-              <a:spcAft>
-                <a:spcPts val="300"/>
+                <a:spcPct val="85000"/>
+              </a:lnSpc>
+              <a:spcBef>
+                <a:spcPts val="200"/>
+              </a:spcBef>
+              <a:spcAft>
+                <a:spcPts val="200"/>
               </a:spcAft>
               <a:defRPr sz="1700"/>
             </a:pPr>
@@ -6360,10 +6606,13 @@
           <a:p>
             <a:pPr lvl="1">
               <a:lnSpc>
-                <a:spcPct val="90000"/>
-              </a:lnSpc>
-              <a:spcAft>
-                <a:spcPts val="300"/>
+                <a:spcPct val="85000"/>
+              </a:lnSpc>
+              <a:spcBef>
+                <a:spcPts val="200"/>
+              </a:spcBef>
+              <a:spcAft>
+                <a:spcPts val="200"/>
               </a:spcAft>
               <a:defRPr sz="1700"/>
             </a:pPr>
@@ -6404,10 +6653,19 @@
         </p:nvSpPr>
         <p:spPr/>
         <p:txBody>
-          <a:bodyPr wrap="square"/>
+          <a:bodyPr wrap="square" tIns="25400" bIns="25400" lIns="63500" rIns="63500"/>
           <a:lstStyle/>
           <a:p>
             <a:pPr>
+              <a:lnSpc>
+                <a:spcPct val="85000"/>
+              </a:lnSpc>
+              <a:spcBef>
+                <a:spcPts val="200"/>
+              </a:spcBef>
+              <a:spcAft>
+                <a:spcPts val="200"/>
+              </a:spcAft>
               <a:defRPr sz="3800" b="1">
                 <a:solidFill>
                   <a:srgbClr val="764BA2"/>
@@ -6415,6 +6673,7 @@
               </a:defRPr>
             </a:pPr>
             <a:r>
+              <a:rPr/>
               <a:t>🎨 Metin Biçimlendirme</a:t>
             </a:r>
           </a:p>
@@ -6454,7 +6713,7 @@
           <a:noFill/>
         </p:spPr>
         <p:txBody>
-          <a:bodyPr wrap="square">
+          <a:bodyPr wrap="square" tIns="25400" bIns="25400" lIns="63500" rIns="63500">
             <a:spAutoFit/>
           </a:bodyPr>
           <a:lstStyle/>
@@ -6471,10 +6730,13 @@
           <a:p>
             <a:pPr>
               <a:lnSpc>
-                <a:spcPct val="90000"/>
-              </a:lnSpc>
-              <a:spcAft>
-                <a:spcPts val="300"/>
+                <a:spcPct val="85000"/>
+              </a:lnSpc>
+              <a:spcBef>
+                <a:spcPts val="200"/>
+              </a:spcBef>
+              <a:spcAft>
+                <a:spcPts val="200"/>
               </a:spcAft>
               <a:defRPr sz="1900"/>
             </a:pPr>
@@ -6497,10 +6759,13 @@
           <a:p>
             <a:pPr>
               <a:lnSpc>
-                <a:spcPct val="90000"/>
-              </a:lnSpc>
-              <a:spcAft>
-                <a:spcPts val="300"/>
+                <a:spcPct val="85000"/>
+              </a:lnSpc>
+              <a:spcBef>
+                <a:spcPts val="200"/>
+              </a:spcBef>
+              <a:spcAft>
+                <a:spcPts val="200"/>
               </a:spcAft>
               <a:defRPr sz="1900"/>
             </a:pPr>
@@ -6512,10 +6777,13 @@
           <a:p>
             <a:pPr lvl="1">
               <a:lnSpc>
-                <a:spcPct val="90000"/>
-              </a:lnSpc>
-              <a:spcAft>
-                <a:spcPts val="300"/>
+                <a:spcPct val="85000"/>
+              </a:lnSpc>
+              <a:spcBef>
+                <a:spcPts val="200"/>
+              </a:spcBef>
+              <a:spcAft>
+                <a:spcPts val="200"/>
               </a:spcAft>
               <a:defRPr sz="1700"/>
             </a:pPr>
@@ -6527,10 +6795,13 @@
           <a:p>
             <a:pPr lvl="1">
               <a:lnSpc>
-                <a:spcPct val="90000"/>
-              </a:lnSpc>
-              <a:spcAft>
-                <a:spcPts val="300"/>
+                <a:spcPct val="85000"/>
+              </a:lnSpc>
+              <a:spcBef>
+                <a:spcPts val="200"/>
+              </a:spcBef>
+              <a:spcAft>
+                <a:spcPts val="200"/>
               </a:spcAft>
               <a:defRPr sz="1700"/>
             </a:pPr>
@@ -6542,10 +6813,13 @@
           <a:p>
             <a:pPr lvl="1">
               <a:lnSpc>
-                <a:spcPct val="90000"/>
-              </a:lnSpc>
-              <a:spcAft>
-                <a:spcPts val="300"/>
+                <a:spcPct val="85000"/>
+              </a:lnSpc>
+              <a:spcBef>
+                <a:spcPts val="200"/>
+              </a:spcBef>
+              <a:spcAft>
+                <a:spcPts val="200"/>
               </a:spcAft>
               <a:defRPr sz="1700"/>
             </a:pPr>
@@ -6568,10 +6842,13 @@
           <a:p>
             <a:pPr>
               <a:lnSpc>
-                <a:spcPct val="90000"/>
-              </a:lnSpc>
-              <a:spcAft>
-                <a:spcPts val="300"/>
+                <a:spcPct val="85000"/>
+              </a:lnSpc>
+              <a:spcBef>
+                <a:spcPts val="200"/>
+              </a:spcBef>
+              <a:spcAft>
+                <a:spcPts val="200"/>
               </a:spcAft>
               <a:defRPr sz="1900"/>
             </a:pPr>
@@ -6583,10 +6860,13 @@
           <a:p>
             <a:pPr lvl="1">
               <a:lnSpc>
-                <a:spcPct val="90000"/>
-              </a:lnSpc>
-              <a:spcAft>
-                <a:spcPts val="300"/>
+                <a:spcPct val="85000"/>
+              </a:lnSpc>
+              <a:spcBef>
+                <a:spcPts val="200"/>
+              </a:spcBef>
+              <a:spcAft>
+                <a:spcPts val="200"/>
               </a:spcAft>
               <a:defRPr sz="1700"/>
             </a:pPr>
@@ -6598,10 +6878,13 @@
           <a:p>
             <a:pPr lvl="1">
               <a:lnSpc>
-                <a:spcPct val="90000"/>
-              </a:lnSpc>
-              <a:spcAft>
-                <a:spcPts val="300"/>
+                <a:spcPct val="85000"/>
+              </a:lnSpc>
+              <a:spcBef>
+                <a:spcPts val="200"/>
+              </a:spcBef>
+              <a:spcAft>
+                <a:spcPts val="200"/>
               </a:spcAft>
               <a:defRPr sz="1700"/>
             </a:pPr>
@@ -6624,10 +6907,13 @@
           <a:p>
             <a:pPr>
               <a:lnSpc>
-                <a:spcPct val="90000"/>
-              </a:lnSpc>
-              <a:spcAft>
-                <a:spcPts val="300"/>
+                <a:spcPct val="85000"/>
+              </a:lnSpc>
+              <a:spcBef>
+                <a:spcPts val="200"/>
+              </a:spcBef>
+              <a:spcAft>
+                <a:spcPts val="200"/>
               </a:spcAft>
               <a:defRPr sz="1900"/>
             </a:pPr>
@@ -6639,10 +6925,13 @@
           <a:p>
             <a:pPr lvl="1">
               <a:lnSpc>
-                <a:spcPct val="90000"/>
-              </a:lnSpc>
-              <a:spcAft>
-                <a:spcPts val="300"/>
+                <a:spcPct val="85000"/>
+              </a:lnSpc>
+              <a:spcBef>
+                <a:spcPts val="200"/>
+              </a:spcBef>
+              <a:spcAft>
+                <a:spcPts val="200"/>
               </a:spcAft>
               <a:defRPr sz="1700"/>
             </a:pPr>
@@ -6654,10 +6943,13 @@
           <a:p>
             <a:pPr lvl="1">
               <a:lnSpc>
-                <a:spcPct val="90000"/>
-              </a:lnSpc>
-              <a:spcAft>
-                <a:spcPts val="300"/>
+                <a:spcPct val="85000"/>
+              </a:lnSpc>
+              <a:spcBef>
+                <a:spcPts val="200"/>
+              </a:spcBef>
+              <a:spcAft>
+                <a:spcPts val="200"/>
               </a:spcAft>
               <a:defRPr sz="1700"/>
             </a:pPr>
@@ -6669,10 +6961,13 @@
           <a:p>
             <a:pPr lvl="1">
               <a:lnSpc>
-                <a:spcPct val="90000"/>
-              </a:lnSpc>
-              <a:spcAft>
-                <a:spcPts val="300"/>
+                <a:spcPct val="85000"/>
+              </a:lnSpc>
+              <a:spcBef>
+                <a:spcPts val="200"/>
+              </a:spcBef>
+              <a:spcAft>
+                <a:spcPts val="200"/>
               </a:spcAft>
               <a:defRPr sz="1700"/>
             </a:pPr>
@@ -6695,10 +6990,13 @@
           <a:p>
             <a:pPr>
               <a:lnSpc>
-                <a:spcPct val="90000"/>
-              </a:lnSpc>
-              <a:spcAft>
-                <a:spcPts val="300"/>
+                <a:spcPct val="85000"/>
+              </a:lnSpc>
+              <a:spcBef>
+                <a:spcPts val="200"/>
+              </a:spcBef>
+              <a:spcAft>
+                <a:spcPts val="200"/>
               </a:spcAft>
               <a:defRPr sz="1900"/>
             </a:pPr>
@@ -6710,10 +7008,13 @@
           <a:p>
             <a:pPr lvl="1">
               <a:lnSpc>
-                <a:spcPct val="90000"/>
-              </a:lnSpc>
-              <a:spcAft>
-                <a:spcPts val="300"/>
+                <a:spcPct val="85000"/>
+              </a:lnSpc>
+              <a:spcBef>
+                <a:spcPts val="200"/>
+              </a:spcBef>
+              <a:spcAft>
+                <a:spcPts val="200"/>
               </a:spcAft>
               <a:defRPr sz="1700"/>
             </a:pPr>
@@ -6725,10 +7026,13 @@
           <a:p>
             <a:pPr lvl="1">
               <a:lnSpc>
-                <a:spcPct val="90000"/>
-              </a:lnSpc>
-              <a:spcAft>
-                <a:spcPts val="300"/>
+                <a:spcPct val="85000"/>
+              </a:lnSpc>
+              <a:spcBef>
+                <a:spcPts val="200"/>
+              </a:spcBef>
+              <a:spcAft>
+                <a:spcPts val="200"/>
               </a:spcAft>
               <a:defRPr sz="1700"/>
             </a:pPr>
@@ -6751,10 +7055,13 @@
           <a:p>
             <a:pPr>
               <a:lnSpc>
-                <a:spcPct val="90000"/>
-              </a:lnSpc>
-              <a:spcAft>
-                <a:spcPts val="300"/>
+                <a:spcPct val="85000"/>
+              </a:lnSpc>
+              <a:spcBef>
+                <a:spcPts val="200"/>
+              </a:spcBef>
+              <a:spcAft>
+                <a:spcPts val="200"/>
               </a:spcAft>
               <a:defRPr sz="1900"/>
             </a:pPr>
@@ -6795,10 +7102,19 @@
         </p:nvSpPr>
         <p:spPr/>
         <p:txBody>
-          <a:bodyPr wrap="square"/>
+          <a:bodyPr wrap="square" tIns="25400" bIns="25400" lIns="63500" rIns="63500"/>
           <a:lstStyle/>
           <a:p>
             <a:pPr>
+              <a:lnSpc>
+                <a:spcPct val="85000"/>
+              </a:lnSpc>
+              <a:spcBef>
+                <a:spcPts val="200"/>
+              </a:spcBef>
+              <a:spcAft>
+                <a:spcPts val="200"/>
+              </a:spcAft>
               <a:defRPr sz="3800" b="1">
                 <a:solidFill>
                   <a:srgbClr val="764BA2"/>
@@ -6806,6 +7122,7 @@
               </a:defRPr>
             </a:pPr>
             <a:r>
+              <a:rPr/>
               <a:t>📐 Paragraf Ayarları</a:t>
             </a:r>
           </a:p>
@@ -6845,7 +7162,7 @@
           <a:noFill/>
         </p:spPr>
         <p:txBody>
-          <a:bodyPr wrap="square">
+          <a:bodyPr wrap="square" tIns="25400" bIns="25400" lIns="63500" rIns="63500">
             <a:spAutoFit/>
           </a:bodyPr>
           <a:lstStyle/>
@@ -6862,10 +7179,13 @@
           <a:p>
             <a:pPr>
               <a:lnSpc>
-                <a:spcPct val="90000"/>
-              </a:lnSpc>
-              <a:spcAft>
-                <a:spcPts val="300"/>
+                <a:spcPct val="85000"/>
+              </a:lnSpc>
+              <a:spcBef>
+                <a:spcPts val="200"/>
+              </a:spcBef>
+              <a:spcAft>
+                <a:spcPts val="200"/>
               </a:spcAft>
               <a:defRPr sz="1900"/>
             </a:pPr>
@@ -6888,10 +7208,13 @@
           <a:p>
             <a:pPr>
               <a:lnSpc>
-                <a:spcPct val="90000"/>
-              </a:lnSpc>
-              <a:spcAft>
-                <a:spcPts val="300"/>
+                <a:spcPct val="85000"/>
+              </a:lnSpc>
+              <a:spcBef>
+                <a:spcPts val="200"/>
+              </a:spcBef>
+              <a:spcAft>
+                <a:spcPts val="200"/>
               </a:spcAft>
               <a:defRPr sz="1900"/>
             </a:pPr>
@@ -6903,10 +7226,13 @@
           <a:p>
             <a:pPr lvl="1">
               <a:lnSpc>
-                <a:spcPct val="90000"/>
-              </a:lnSpc>
-              <a:spcAft>
-                <a:spcPts val="300"/>
+                <a:spcPct val="85000"/>
+              </a:lnSpc>
+              <a:spcBef>
+                <a:spcPts val="200"/>
+              </a:spcBef>
+              <a:spcAft>
+                <a:spcPts val="200"/>
               </a:spcAft>
               <a:defRPr sz="1700"/>
             </a:pPr>
@@ -6918,10 +7244,13 @@
           <a:p>
             <a:pPr lvl="1">
               <a:lnSpc>
-                <a:spcPct val="90000"/>
-              </a:lnSpc>
-              <a:spcAft>
-                <a:spcPts val="300"/>
+                <a:spcPct val="85000"/>
+              </a:lnSpc>
+              <a:spcBef>
+                <a:spcPts val="200"/>
+              </a:spcBef>
+              <a:spcAft>
+                <a:spcPts val="200"/>
               </a:spcAft>
               <a:defRPr sz="1700"/>
             </a:pPr>
@@ -6933,10 +7262,13 @@
           <a:p>
             <a:pPr lvl="1">
               <a:lnSpc>
-                <a:spcPct val="90000"/>
-              </a:lnSpc>
-              <a:spcAft>
-                <a:spcPts val="300"/>
+                <a:spcPct val="85000"/>
+              </a:lnSpc>
+              <a:spcBef>
+                <a:spcPts val="200"/>
+              </a:spcBef>
+              <a:spcAft>
+                <a:spcPts val="200"/>
               </a:spcAft>
               <a:defRPr sz="1700"/>
             </a:pPr>
@@ -6948,10 +7280,13 @@
           <a:p>
             <a:pPr lvl="1">
               <a:lnSpc>
-                <a:spcPct val="90000"/>
-              </a:lnSpc>
-              <a:spcAft>
-                <a:spcPts val="300"/>
+                <a:spcPct val="85000"/>
+              </a:lnSpc>
+              <a:spcBef>
+                <a:spcPts val="200"/>
+              </a:spcBef>
+              <a:spcAft>
+                <a:spcPts val="200"/>
               </a:spcAft>
               <a:defRPr sz="1700"/>
             </a:pPr>
@@ -6974,10 +7309,13 @@
           <a:p>
             <a:pPr>
               <a:lnSpc>
-                <a:spcPct val="90000"/>
-              </a:lnSpc>
-              <a:spcAft>
-                <a:spcPts val="300"/>
+                <a:spcPct val="85000"/>
+              </a:lnSpc>
+              <a:spcBef>
+                <a:spcPts val="200"/>
+              </a:spcBef>
+              <a:spcAft>
+                <a:spcPts val="200"/>
               </a:spcAft>
               <a:defRPr sz="1900"/>
             </a:pPr>
@@ -6989,10 +7327,13 @@
           <a:p>
             <a:pPr lvl="1">
               <a:lnSpc>
-                <a:spcPct val="90000"/>
-              </a:lnSpc>
-              <a:spcAft>
-                <a:spcPts val="300"/>
+                <a:spcPct val="85000"/>
+              </a:lnSpc>
+              <a:spcBef>
+                <a:spcPts val="200"/>
+              </a:spcBef>
+              <a:spcAft>
+                <a:spcPts val="200"/>
               </a:spcAft>
               <a:defRPr sz="1700"/>
             </a:pPr>
@@ -7004,10 +7345,13 @@
           <a:p>
             <a:pPr lvl="1">
               <a:lnSpc>
-                <a:spcPct val="90000"/>
-              </a:lnSpc>
-              <a:spcAft>
-                <a:spcPts val="300"/>
+                <a:spcPct val="85000"/>
+              </a:lnSpc>
+              <a:spcBef>
+                <a:spcPts val="200"/>
+              </a:spcBef>
+              <a:spcAft>
+                <a:spcPts val="200"/>
               </a:spcAft>
               <a:defRPr sz="1700"/>
             </a:pPr>
@@ -7019,10 +7363,13 @@
           <a:p>
             <a:pPr lvl="1">
               <a:lnSpc>
-                <a:spcPct val="90000"/>
-              </a:lnSpc>
-              <a:spcAft>
-                <a:spcPts val="300"/>
+                <a:spcPct val="85000"/>
+              </a:lnSpc>
+              <a:spcBef>
+                <a:spcPts val="200"/>
+              </a:spcBef>
+              <a:spcAft>
+                <a:spcPts val="200"/>
               </a:spcAft>
               <a:defRPr sz="1700"/>
             </a:pPr>
@@ -7045,10 +7392,13 @@
           <a:p>
             <a:pPr>
               <a:lnSpc>
-                <a:spcPct val="90000"/>
-              </a:lnSpc>
-              <a:spcAft>
-                <a:spcPts val="300"/>
+                <a:spcPct val="85000"/>
+              </a:lnSpc>
+              <a:spcBef>
+                <a:spcPts val="200"/>
+              </a:spcBef>
+              <a:spcAft>
+                <a:spcPts val="200"/>
               </a:spcAft>
               <a:defRPr sz="1900"/>
             </a:pPr>
@@ -7060,10 +7410,13 @@
           <a:p>
             <a:pPr lvl="1">
               <a:lnSpc>
-                <a:spcPct val="90000"/>
-              </a:lnSpc>
-              <a:spcAft>
-                <a:spcPts val="300"/>
+                <a:spcPct val="85000"/>
+              </a:lnSpc>
+              <a:spcBef>
+                <a:spcPts val="200"/>
+              </a:spcBef>
+              <a:spcAft>
+                <a:spcPts val="200"/>
               </a:spcAft>
               <a:defRPr sz="1700"/>
             </a:pPr>
@@ -7075,10 +7428,13 @@
           <a:p>
             <a:pPr lvl="1">
               <a:lnSpc>
-                <a:spcPct val="90000"/>
-              </a:lnSpc>
-              <a:spcAft>
-                <a:spcPts val="300"/>
+                <a:spcPct val="85000"/>
+              </a:lnSpc>
+              <a:spcBef>
+                <a:spcPts val="200"/>
+              </a:spcBef>
+              <a:spcAft>
+                <a:spcPts val="200"/>
               </a:spcAft>
               <a:defRPr sz="1700"/>
             </a:pPr>
@@ -7101,10 +7457,13 @@
           <a:p>
             <a:pPr>
               <a:lnSpc>
-                <a:spcPct val="90000"/>
-              </a:lnSpc>
-              <a:spcAft>
-                <a:spcPts val="300"/>
+                <a:spcPct val="85000"/>
+              </a:lnSpc>
+              <a:spcBef>
+                <a:spcPts val="200"/>
+              </a:spcBef>
+              <a:spcAft>
+                <a:spcPts val="200"/>
               </a:spcAft>
               <a:defRPr sz="1900"/>
             </a:pPr>
@@ -7116,10 +7475,13 @@
           <a:p>
             <a:pPr lvl="1">
               <a:lnSpc>
-                <a:spcPct val="90000"/>
-              </a:lnSpc>
-              <a:spcAft>
-                <a:spcPts val="300"/>
+                <a:spcPct val="85000"/>
+              </a:lnSpc>
+              <a:spcBef>
+                <a:spcPts val="200"/>
+              </a:spcBef>
+              <a:spcAft>
+                <a:spcPts val="200"/>
               </a:spcAft>
               <a:defRPr sz="1700"/>
             </a:pPr>
@@ -7131,10 +7493,13 @@
           <a:p>
             <a:pPr lvl="1">
               <a:lnSpc>
-                <a:spcPct val="90000"/>
-              </a:lnSpc>
-              <a:spcAft>
-                <a:spcPts val="300"/>
+                <a:spcPct val="85000"/>
+              </a:lnSpc>
+              <a:spcBef>
+                <a:spcPts val="200"/>
+              </a:spcBef>
+              <a:spcAft>
+                <a:spcPts val="200"/>
               </a:spcAft>
               <a:defRPr sz="1700"/>
             </a:pPr>
@@ -7157,10 +7522,13 @@
           <a:p>
             <a:pPr>
               <a:lnSpc>
-                <a:spcPct val="90000"/>
-              </a:lnSpc>
-              <a:spcAft>
-                <a:spcPts val="300"/>
+                <a:spcPct val="85000"/>
+              </a:lnSpc>
+              <a:spcBef>
+                <a:spcPts val="200"/>
+              </a:spcBef>
+              <a:spcAft>
+                <a:spcPts val="200"/>
               </a:spcAft>
               <a:defRPr sz="1900"/>
             </a:pPr>
@@ -7201,10 +7569,19 @@
         </p:nvSpPr>
         <p:spPr/>
         <p:txBody>
-          <a:bodyPr wrap="square"/>
+          <a:bodyPr wrap="square" tIns="25400" bIns="25400" lIns="63500" rIns="63500"/>
           <a:lstStyle/>
           <a:p>
             <a:pPr>
+              <a:lnSpc>
+                <a:spcPct val="85000"/>
+              </a:lnSpc>
+              <a:spcBef>
+                <a:spcPts val="200"/>
+              </a:spcBef>
+              <a:spcAft>
+                <a:spcPts val="200"/>
+              </a:spcAft>
               <a:defRPr sz="3800" b="1">
                 <a:solidFill>
                   <a:srgbClr val="764BA2"/>
@@ -7212,6 +7589,7 @@
               </a:defRPr>
             </a:pPr>
             <a:r>
+              <a:rPr/>
               <a:t>🖼️ Görsel ve Şekil Ekleme</a:t>
             </a:r>
           </a:p>
@@ -7251,7 +7629,7 @@
           <a:noFill/>
         </p:spPr>
         <p:txBody>
-          <a:bodyPr wrap="square">
+          <a:bodyPr wrap="square" tIns="25400" bIns="25400" lIns="63500" rIns="63500">
             <a:spAutoFit/>
           </a:bodyPr>
           <a:lstStyle/>
@@ -7268,10 +7646,13 @@
           <a:p>
             <a:pPr>
               <a:lnSpc>
-                <a:spcPct val="90000"/>
-              </a:lnSpc>
-              <a:spcAft>
-                <a:spcPts val="300"/>
+                <a:spcPct val="85000"/>
+              </a:lnSpc>
+              <a:spcBef>
+                <a:spcPts val="200"/>
+              </a:spcBef>
+              <a:spcAft>
+                <a:spcPts val="200"/>
               </a:spcAft>
               <a:defRPr sz="1900"/>
             </a:pPr>
@@ -7294,10 +7675,13 @@
           <a:p>
             <a:pPr>
               <a:lnSpc>
-                <a:spcPct val="90000"/>
-              </a:lnSpc>
-              <a:spcAft>
-                <a:spcPts val="300"/>
+                <a:spcPct val="85000"/>
+              </a:lnSpc>
+              <a:spcBef>
+                <a:spcPts val="200"/>
+              </a:spcBef>
+              <a:spcAft>
+                <a:spcPts val="200"/>
               </a:spcAft>
               <a:defRPr sz="1900"/>
             </a:pPr>
@@ -7309,10 +7693,13 @@
           <a:p>
             <a:pPr lvl="1">
               <a:lnSpc>
-                <a:spcPct val="90000"/>
-              </a:lnSpc>
-              <a:spcAft>
-                <a:spcPts val="300"/>
+                <a:spcPct val="85000"/>
+              </a:lnSpc>
+              <a:spcBef>
+                <a:spcPts val="200"/>
+              </a:spcBef>
+              <a:spcAft>
+                <a:spcPts val="200"/>
               </a:spcAft>
               <a:defRPr sz="1700"/>
             </a:pPr>
@@ -7324,10 +7711,13 @@
           <a:p>
             <a:pPr lvl="1">
               <a:lnSpc>
-                <a:spcPct val="90000"/>
-              </a:lnSpc>
-              <a:spcAft>
-                <a:spcPts val="300"/>
+                <a:spcPct val="85000"/>
+              </a:lnSpc>
+              <a:spcBef>
+                <a:spcPts val="200"/>
+              </a:spcBef>
+              <a:spcAft>
+                <a:spcPts val="200"/>
               </a:spcAft>
               <a:defRPr sz="1700"/>
             </a:pPr>
@@ -7339,10 +7729,13 @@
           <a:p>
             <a:pPr lvl="1">
               <a:lnSpc>
-                <a:spcPct val="90000"/>
-              </a:lnSpc>
-              <a:spcAft>
-                <a:spcPts val="300"/>
+                <a:spcPct val="85000"/>
+              </a:lnSpc>
+              <a:spcBef>
+                <a:spcPts val="200"/>
+              </a:spcBef>
+              <a:spcAft>
+                <a:spcPts val="200"/>
               </a:spcAft>
               <a:defRPr sz="1700"/>
             </a:pPr>
@@ -7365,10 +7758,13 @@
           <a:p>
             <a:pPr>
               <a:lnSpc>
-                <a:spcPct val="90000"/>
-              </a:lnSpc>
-              <a:spcAft>
-                <a:spcPts val="300"/>
+                <a:spcPct val="85000"/>
+              </a:lnSpc>
+              <a:spcBef>
+                <a:spcPts val="200"/>
+              </a:spcBef>
+              <a:spcAft>
+                <a:spcPts val="200"/>
               </a:spcAft>
               <a:defRPr sz="1900"/>
             </a:pPr>
@@ -7380,10 +7776,13 @@
           <a:p>
             <a:pPr lvl="1">
               <a:lnSpc>
-                <a:spcPct val="90000"/>
-              </a:lnSpc>
-              <a:spcAft>
-                <a:spcPts val="300"/>
+                <a:spcPct val="85000"/>
+              </a:lnSpc>
+              <a:spcBef>
+                <a:spcPts val="200"/>
+              </a:spcBef>
+              <a:spcAft>
+                <a:spcPts val="200"/>
               </a:spcAft>
               <a:defRPr sz="1700"/>
             </a:pPr>
@@ -7395,10 +7794,13 @@
           <a:p>
             <a:pPr lvl="1">
               <a:lnSpc>
-                <a:spcPct val="90000"/>
-              </a:lnSpc>
-              <a:spcAft>
-                <a:spcPts val="300"/>
+                <a:spcPct val="85000"/>
+              </a:lnSpc>
+              <a:spcBef>
+                <a:spcPts val="200"/>
+              </a:spcBef>
+              <a:spcAft>
+                <a:spcPts val="200"/>
               </a:spcAft>
               <a:defRPr sz="1700"/>
             </a:pPr>
@@ -7410,10 +7812,13 @@
           <a:p>
             <a:pPr lvl="1">
               <a:lnSpc>
-                <a:spcPct val="90000"/>
-              </a:lnSpc>
-              <a:spcAft>
-                <a:spcPts val="300"/>
+                <a:spcPct val="85000"/>
+              </a:lnSpc>
+              <a:spcBef>
+                <a:spcPts val="200"/>
+              </a:spcBef>
+              <a:spcAft>
+                <a:spcPts val="200"/>
               </a:spcAft>
               <a:defRPr sz="1700"/>
             </a:pPr>
@@ -7436,10 +7841,13 @@
           <a:p>
             <a:pPr>
               <a:lnSpc>
-                <a:spcPct val="90000"/>
-              </a:lnSpc>
-              <a:spcAft>
-                <a:spcPts val="300"/>
+                <a:spcPct val="85000"/>
+              </a:lnSpc>
+              <a:spcBef>
+                <a:spcPts val="200"/>
+              </a:spcBef>
+              <a:spcAft>
+                <a:spcPts val="200"/>
               </a:spcAft>
               <a:defRPr sz="1900"/>
             </a:pPr>
@@ -7451,10 +7859,13 @@
           <a:p>
             <a:pPr lvl="1">
               <a:lnSpc>
-                <a:spcPct val="90000"/>
-              </a:lnSpc>
-              <a:spcAft>
-                <a:spcPts val="300"/>
+                <a:spcPct val="85000"/>
+              </a:lnSpc>
+              <a:spcBef>
+                <a:spcPts val="200"/>
+              </a:spcBef>
+              <a:spcAft>
+                <a:spcPts val="200"/>
               </a:spcAft>
               <a:defRPr sz="1700"/>
             </a:pPr>
@@ -7466,10 +7877,13 @@
           <a:p>
             <a:pPr lvl="1">
               <a:lnSpc>
-                <a:spcPct val="90000"/>
-              </a:lnSpc>
-              <a:spcAft>
-                <a:spcPts val="300"/>
+                <a:spcPct val="85000"/>
+              </a:lnSpc>
+              <a:spcBef>
+                <a:spcPts val="200"/>
+              </a:spcBef>
+              <a:spcAft>
+                <a:spcPts val="200"/>
               </a:spcAft>
               <a:defRPr sz="1700"/>
             </a:pPr>
@@ -7492,10 +7906,13 @@
           <a:p>
             <a:pPr>
               <a:lnSpc>
-                <a:spcPct val="90000"/>
-              </a:lnSpc>
-              <a:spcAft>
-                <a:spcPts val="300"/>
+                <a:spcPct val="85000"/>
+              </a:lnSpc>
+              <a:spcBef>
+                <a:spcPts val="200"/>
+              </a:spcBef>
+              <a:spcAft>
+                <a:spcPts val="200"/>
               </a:spcAft>
               <a:defRPr sz="1900"/>
             </a:pPr>
@@ -7507,10 +7924,13 @@
           <a:p>
             <a:pPr lvl="1">
               <a:lnSpc>
-                <a:spcPct val="90000"/>
-              </a:lnSpc>
-              <a:spcAft>
-                <a:spcPts val="300"/>
+                <a:spcPct val="85000"/>
+              </a:lnSpc>
+              <a:spcBef>
+                <a:spcPts val="200"/>
+              </a:spcBef>
+              <a:spcAft>
+                <a:spcPts val="200"/>
               </a:spcAft>
               <a:defRPr sz="1700"/>
             </a:pPr>
@@ -7533,10 +7953,13 @@
           <a:p>
             <a:pPr>
               <a:lnSpc>
-                <a:spcPct val="90000"/>
-              </a:lnSpc>
-              <a:spcAft>
-                <a:spcPts val="300"/>
+                <a:spcPct val="85000"/>
+              </a:lnSpc>
+              <a:spcBef>
+                <a:spcPts val="200"/>
+              </a:spcBef>
+              <a:spcAft>
+                <a:spcPts val="200"/>
               </a:spcAft>
               <a:defRPr sz="1900"/>
             </a:pPr>
@@ -7548,10 +7971,13 @@
           <a:p>
             <a:pPr lvl="1">
               <a:lnSpc>
-                <a:spcPct val="90000"/>
-              </a:lnSpc>
-              <a:spcAft>
-                <a:spcPts val="300"/>
+                <a:spcPct val="85000"/>
+              </a:lnSpc>
+              <a:spcBef>
+                <a:spcPts val="200"/>
+              </a:spcBef>
+              <a:spcAft>
+                <a:spcPts val="200"/>
               </a:spcAft>
               <a:defRPr sz="1700"/>
             </a:pPr>
@@ -7563,10 +7989,13 @@
           <a:p>
             <a:pPr lvl="1">
               <a:lnSpc>
-                <a:spcPct val="90000"/>
-              </a:lnSpc>
-              <a:spcAft>
-                <a:spcPts val="300"/>
+                <a:spcPct val="85000"/>
+              </a:lnSpc>
+              <a:spcBef>
+                <a:spcPts val="200"/>
+              </a:spcBef>
+              <a:spcAft>
+                <a:spcPts val="200"/>
               </a:spcAft>
               <a:defRPr sz="1700"/>
             </a:pPr>
@@ -7607,10 +8036,19 @@
         </p:nvSpPr>
         <p:spPr/>
         <p:txBody>
-          <a:bodyPr wrap="square"/>
+          <a:bodyPr wrap="square" tIns="25400" bIns="25400" lIns="63500" rIns="63500"/>
           <a:lstStyle/>
           <a:p>
             <a:pPr>
+              <a:lnSpc>
+                <a:spcPct val="85000"/>
+              </a:lnSpc>
+              <a:spcBef>
+                <a:spcPts val="200"/>
+              </a:spcBef>
+              <a:spcAft>
+                <a:spcPts val="200"/>
+              </a:spcAft>
               <a:defRPr sz="3800" b="1">
                 <a:solidFill>
                   <a:srgbClr val="764BA2"/>
@@ -7618,6 +8056,7 @@
               </a:defRPr>
             </a:pPr>
             <a:r>
+              <a:rPr/>
               <a:t>📊 Tablo Oluşturma</a:t>
             </a:r>
           </a:p>
@@ -7657,7 +8096,7 @@
           <a:noFill/>
         </p:spPr>
         <p:txBody>
-          <a:bodyPr wrap="square">
+          <a:bodyPr wrap="square" tIns="25400" bIns="25400" lIns="63500" rIns="63500">
             <a:spAutoFit/>
           </a:bodyPr>
           <a:lstStyle/>
@@ -7674,10 +8113,13 @@
           <a:p>
             <a:pPr>
               <a:lnSpc>
-                <a:spcPct val="90000"/>
-              </a:lnSpc>
-              <a:spcAft>
-                <a:spcPts val="300"/>
+                <a:spcPct val="85000"/>
+              </a:lnSpc>
+              <a:spcBef>
+                <a:spcPts val="200"/>
+              </a:spcBef>
+              <a:spcAft>
+                <a:spcPts val="200"/>
               </a:spcAft>
               <a:defRPr sz="1900"/>
             </a:pPr>
@@ -7700,10 +8142,13 @@
           <a:p>
             <a:pPr>
               <a:lnSpc>
-                <a:spcPct val="90000"/>
-              </a:lnSpc>
-              <a:spcAft>
-                <a:spcPts val="300"/>
+                <a:spcPct val="85000"/>
+              </a:lnSpc>
+              <a:spcBef>
+                <a:spcPts val="200"/>
+              </a:spcBef>
+              <a:spcAft>
+                <a:spcPts val="200"/>
               </a:spcAft>
               <a:defRPr sz="1900"/>
             </a:pPr>
@@ -7715,10 +8160,13 @@
           <a:p>
             <a:pPr lvl="1">
               <a:lnSpc>
-                <a:spcPct val="90000"/>
-              </a:lnSpc>
-              <a:spcAft>
-                <a:spcPts val="300"/>
+                <a:spcPct val="85000"/>
+              </a:lnSpc>
+              <a:spcBef>
+                <a:spcPts val="200"/>
+              </a:spcBef>
+              <a:spcAft>
+                <a:spcPts val="200"/>
               </a:spcAft>
               <a:defRPr sz="1700"/>
             </a:pPr>
@@ -7730,10 +8178,13 @@
           <a:p>
             <a:pPr lvl="1">
               <a:lnSpc>
-                <a:spcPct val="90000"/>
-              </a:lnSpc>
-              <a:spcAft>
-                <a:spcPts val="300"/>
+                <a:spcPct val="85000"/>
+              </a:lnSpc>
+              <a:spcBef>
+                <a:spcPts val="200"/>
+              </a:spcBef>
+              <a:spcAft>
+                <a:spcPts val="200"/>
               </a:spcAft>
               <a:defRPr sz="1700"/>
             </a:pPr>
@@ -7756,10 +8207,13 @@
           <a:p>
             <a:pPr>
               <a:lnSpc>
-                <a:spcPct val="90000"/>
-              </a:lnSpc>
-              <a:spcAft>
-                <a:spcPts val="300"/>
+                <a:spcPct val="85000"/>
+              </a:lnSpc>
+              <a:spcBef>
+                <a:spcPts val="200"/>
+              </a:spcBef>
+              <a:spcAft>
+                <a:spcPts val="200"/>
               </a:spcAft>
               <a:defRPr sz="1900"/>
             </a:pPr>
@@ -7771,10 +8225,13 @@
           <a:p>
             <a:pPr lvl="1">
               <a:lnSpc>
-                <a:spcPct val="90000"/>
-              </a:lnSpc>
-              <a:spcAft>
-                <a:spcPts val="300"/>
+                <a:spcPct val="85000"/>
+              </a:lnSpc>
+              <a:spcBef>
+                <a:spcPts val="200"/>
+              </a:spcBef>
+              <a:spcAft>
+                <a:spcPts val="200"/>
               </a:spcAft>
               <a:defRPr sz="1700"/>
             </a:pPr>
@@ -7786,10 +8243,13 @@
           <a:p>
             <a:pPr lvl="1">
               <a:lnSpc>
-                <a:spcPct val="90000"/>
-              </a:lnSpc>
-              <a:spcAft>
-                <a:spcPts val="300"/>
+                <a:spcPct val="85000"/>
+              </a:lnSpc>
+              <a:spcBef>
+                <a:spcPts val="200"/>
+              </a:spcBef>
+              <a:spcAft>
+                <a:spcPts val="200"/>
               </a:spcAft>
               <a:defRPr sz="1700"/>
             </a:pPr>
@@ -7801,10 +8261,13 @@
           <a:p>
             <a:pPr lvl="1">
               <a:lnSpc>
-                <a:spcPct val="90000"/>
-              </a:lnSpc>
-              <a:spcAft>
-                <a:spcPts val="300"/>
+                <a:spcPct val="85000"/>
+              </a:lnSpc>
+              <a:spcBef>
+                <a:spcPts val="200"/>
+              </a:spcBef>
+              <a:spcAft>
+                <a:spcPts val="200"/>
               </a:spcAft>
               <a:defRPr sz="1700"/>
             </a:pPr>
@@ -7816,10 +8279,13 @@
           <a:p>
             <a:pPr lvl="1">
               <a:lnSpc>
-                <a:spcPct val="90000"/>
-              </a:lnSpc>
-              <a:spcAft>
-                <a:spcPts val="300"/>
+                <a:spcPct val="85000"/>
+              </a:lnSpc>
+              <a:spcBef>
+                <a:spcPts val="200"/>
+              </a:spcBef>
+              <a:spcAft>
+                <a:spcPts val="200"/>
               </a:spcAft>
               <a:defRPr sz="1700"/>
             </a:pPr>
@@ -7842,10 +8308,13 @@
           <a:p>
             <a:pPr>
               <a:lnSpc>
-                <a:spcPct val="90000"/>
-              </a:lnSpc>
-              <a:spcAft>
-                <a:spcPts val="300"/>
+                <a:spcPct val="85000"/>
+              </a:lnSpc>
+              <a:spcBef>
+                <a:spcPts val="200"/>
+              </a:spcBef>
+              <a:spcAft>
+                <a:spcPts val="200"/>
               </a:spcAft>
               <a:defRPr sz="1900"/>
             </a:pPr>
@@ -7857,10 +8326,13 @@
           <a:p>
             <a:pPr lvl="1">
               <a:lnSpc>
-                <a:spcPct val="90000"/>
-              </a:lnSpc>
-              <a:spcAft>
-                <a:spcPts val="300"/>
+                <a:spcPct val="85000"/>
+              </a:lnSpc>
+              <a:spcBef>
+                <a:spcPts val="200"/>
+              </a:spcBef>
+              <a:spcAft>
+                <a:spcPts val="200"/>
               </a:spcAft>
               <a:defRPr sz="1700"/>
             </a:pPr>
@@ -7872,10 +8344,13 @@
           <a:p>
             <a:pPr lvl="1">
               <a:lnSpc>
-                <a:spcPct val="90000"/>
-              </a:lnSpc>
-              <a:spcAft>
-                <a:spcPts val="300"/>
+                <a:spcPct val="85000"/>
+              </a:lnSpc>
+              <a:spcBef>
+                <a:spcPts val="200"/>
+              </a:spcBef>
+              <a:spcAft>
+                <a:spcPts val="200"/>
               </a:spcAft>
               <a:defRPr sz="1700"/>
             </a:pPr>
@@ -7887,10 +8362,13 @@
           <a:p>
             <a:pPr lvl="1">
               <a:lnSpc>
-                <a:spcPct val="90000"/>
-              </a:lnSpc>
-              <a:spcAft>
-                <a:spcPts val="300"/>
+                <a:spcPct val="85000"/>
+              </a:lnSpc>
+              <a:spcBef>
+                <a:spcPts val="200"/>
+              </a:spcBef>
+              <a:spcAft>
+                <a:spcPts val="200"/>
               </a:spcAft>
               <a:defRPr sz="1700"/>
             </a:pPr>
@@ -7913,10 +8391,13 @@
           <a:p>
             <a:pPr>
               <a:lnSpc>
-                <a:spcPct val="90000"/>
-              </a:lnSpc>
-              <a:spcAft>
-                <a:spcPts val="300"/>
+                <a:spcPct val="85000"/>
+              </a:lnSpc>
+              <a:spcBef>
+                <a:spcPts val="200"/>
+              </a:spcBef>
+              <a:spcAft>
+                <a:spcPts val="200"/>
               </a:spcAft>
               <a:defRPr sz="1900"/>
             </a:pPr>
@@ -7928,10 +8409,13 @@
           <a:p>
             <a:pPr lvl="1">
               <a:lnSpc>
-                <a:spcPct val="90000"/>
-              </a:lnSpc>
-              <a:spcAft>
-                <a:spcPts val="300"/>
+                <a:spcPct val="85000"/>
+              </a:lnSpc>
+              <a:spcBef>
+                <a:spcPts val="200"/>
+              </a:spcBef>
+              <a:spcAft>
+                <a:spcPts val="200"/>
               </a:spcAft>
               <a:defRPr sz="1700"/>
             </a:pPr>
@@ -7943,10 +8427,13 @@
           <a:p>
             <a:pPr lvl="1">
               <a:lnSpc>
-                <a:spcPct val="90000"/>
-              </a:lnSpc>
-              <a:spcAft>
-                <a:spcPts val="300"/>
+                <a:spcPct val="85000"/>
+              </a:lnSpc>
+              <a:spcBef>
+                <a:spcPts val="200"/>
+              </a:spcBef>
+              <a:spcAft>
+                <a:spcPts val="200"/>
               </a:spcAft>
               <a:defRPr sz="1700"/>
             </a:pPr>
@@ -7958,10 +8445,13 @@
           <a:p>
             <a:pPr lvl="1">
               <a:lnSpc>
-                <a:spcPct val="90000"/>
-              </a:lnSpc>
-              <a:spcAft>
-                <a:spcPts val="300"/>
+                <a:spcPct val="85000"/>
+              </a:lnSpc>
+              <a:spcBef>
+                <a:spcPts val="200"/>
+              </a:spcBef>
+              <a:spcAft>
+                <a:spcPts val="200"/>
               </a:spcAft>
               <a:defRPr sz="1700"/>
             </a:pPr>
@@ -7984,10 +8474,13 @@
           <a:p>
             <a:pPr>
               <a:lnSpc>
-                <a:spcPct val="90000"/>
-              </a:lnSpc>
-              <a:spcAft>
-                <a:spcPts val="300"/>
+                <a:spcPct val="85000"/>
+              </a:lnSpc>
+              <a:spcBef>
+                <a:spcPts val="200"/>
+              </a:spcBef>
+              <a:spcAft>
+                <a:spcPts val="200"/>
               </a:spcAft>
               <a:defRPr sz="1900"/>
             </a:pPr>
@@ -8028,10 +8521,19 @@
         </p:nvSpPr>
         <p:spPr/>
         <p:txBody>
-          <a:bodyPr wrap="square"/>
+          <a:bodyPr wrap="square" tIns="25400" bIns="25400" lIns="63500" rIns="63500"/>
           <a:lstStyle/>
           <a:p>
             <a:pPr>
+              <a:lnSpc>
+                <a:spcPct val="85000"/>
+              </a:lnSpc>
+              <a:spcBef>
+                <a:spcPts val="200"/>
+              </a:spcBef>
+              <a:spcAft>
+                <a:spcPts val="200"/>
+              </a:spcAft>
               <a:defRPr sz="3800" b="1">
                 <a:solidFill>
                   <a:srgbClr val="764BA2"/>
@@ -8039,6 +8541,7 @@
               </a:defRPr>
             </a:pPr>
             <a:r>
+              <a:rPr/>
               <a:t>📄 Sayfa Düzeni</a:t>
             </a:r>
           </a:p>
@@ -8078,7 +8581,7 @@
           <a:noFill/>
         </p:spPr>
         <p:txBody>
-          <a:bodyPr wrap="square">
+          <a:bodyPr wrap="square" tIns="25400" bIns="25400" lIns="63500" rIns="63500">
             <a:spAutoFit/>
           </a:bodyPr>
           <a:lstStyle/>
@@ -8095,10 +8598,13 @@
           <a:p>
             <a:pPr>
               <a:lnSpc>
-                <a:spcPct val="90000"/>
-              </a:lnSpc>
-              <a:spcAft>
-                <a:spcPts val="300"/>
+                <a:spcPct val="85000"/>
+              </a:lnSpc>
+              <a:spcBef>
+                <a:spcPts val="200"/>
+              </a:spcBef>
+              <a:spcAft>
+                <a:spcPts val="200"/>
               </a:spcAft>
               <a:defRPr sz="1900"/>
             </a:pPr>
@@ -8121,10 +8627,13 @@
           <a:p>
             <a:pPr>
               <a:lnSpc>
-                <a:spcPct val="90000"/>
-              </a:lnSpc>
-              <a:spcAft>
-                <a:spcPts val="300"/>
+                <a:spcPct val="85000"/>
+              </a:lnSpc>
+              <a:spcBef>
+                <a:spcPts val="200"/>
+              </a:spcBef>
+              <a:spcAft>
+                <a:spcPts val="200"/>
               </a:spcAft>
               <a:defRPr sz="1900"/>
             </a:pPr>
@@ -8136,10 +8645,13 @@
           <a:p>
             <a:pPr lvl="1">
               <a:lnSpc>
-                <a:spcPct val="90000"/>
-              </a:lnSpc>
-              <a:spcAft>
-                <a:spcPts val="300"/>
+                <a:spcPct val="85000"/>
+              </a:lnSpc>
+              <a:spcBef>
+                <a:spcPts val="200"/>
+              </a:spcBef>
+              <a:spcAft>
+                <a:spcPts val="200"/>
               </a:spcAft>
               <a:defRPr sz="1700"/>
             </a:pPr>
@@ -8151,10 +8663,13 @@
           <a:p>
             <a:pPr lvl="1">
               <a:lnSpc>
-                <a:spcPct val="90000"/>
-              </a:lnSpc>
-              <a:spcAft>
-                <a:spcPts val="300"/>
+                <a:spcPct val="85000"/>
+              </a:lnSpc>
+              <a:spcBef>
+                <a:spcPts val="200"/>
+              </a:spcBef>
+              <a:spcAft>
+                <a:spcPts val="200"/>
               </a:spcAft>
               <a:defRPr sz="1700"/>
             </a:pPr>
@@ -8177,10 +8692,13 @@
           <a:p>
             <a:pPr>
               <a:lnSpc>
-                <a:spcPct val="90000"/>
-              </a:lnSpc>
-              <a:spcAft>
-                <a:spcPts val="300"/>
+                <a:spcPct val="85000"/>
+              </a:lnSpc>
+              <a:spcBef>
+                <a:spcPts val="200"/>
+              </a:spcBef>
+              <a:spcAft>
+                <a:spcPts val="200"/>
               </a:spcAft>
               <a:defRPr sz="1900"/>
             </a:pPr>
@@ -8192,10 +8710,13 @@
           <a:p>
             <a:pPr lvl="1">
               <a:lnSpc>
-                <a:spcPct val="90000"/>
-              </a:lnSpc>
-              <a:spcAft>
-                <a:spcPts val="300"/>
+                <a:spcPct val="85000"/>
+              </a:lnSpc>
+              <a:spcBef>
+                <a:spcPts val="200"/>
+              </a:spcBef>
+              <a:spcAft>
+                <a:spcPts val="200"/>
               </a:spcAft>
               <a:defRPr sz="1700"/>
             </a:pPr>
@@ -8207,10 +8728,13 @@
           <a:p>
             <a:pPr lvl="1">
               <a:lnSpc>
-                <a:spcPct val="90000"/>
-              </a:lnSpc>
-              <a:spcAft>
-                <a:spcPts val="300"/>
+                <a:spcPct val="85000"/>
+              </a:lnSpc>
+              <a:spcBef>
+                <a:spcPts val="200"/>
+              </a:spcBef>
+              <a:spcAft>
+                <a:spcPts val="200"/>
               </a:spcAft>
               <a:defRPr sz="1700"/>
             </a:pPr>
@@ -8233,10 +8757,13 @@
           <a:p>
             <a:pPr>
               <a:lnSpc>
-                <a:spcPct val="90000"/>
-              </a:lnSpc>
-              <a:spcAft>
-                <a:spcPts val="300"/>
+                <a:spcPct val="85000"/>
+              </a:lnSpc>
+              <a:spcBef>
+                <a:spcPts val="200"/>
+              </a:spcBef>
+              <a:spcAft>
+                <a:spcPts val="200"/>
               </a:spcAft>
               <a:defRPr sz="1900"/>
             </a:pPr>
@@ -8248,10 +8775,13 @@
           <a:p>
             <a:pPr lvl="1">
               <a:lnSpc>
-                <a:spcPct val="90000"/>
-              </a:lnSpc>
-              <a:spcAft>
-                <a:spcPts val="300"/>
+                <a:spcPct val="85000"/>
+              </a:lnSpc>
+              <a:spcBef>
+                <a:spcPts val="200"/>
+              </a:spcBef>
+              <a:spcAft>
+                <a:spcPts val="200"/>
               </a:spcAft>
               <a:defRPr sz="1700"/>
             </a:pPr>
@@ -8263,10 +8793,13 @@
           <a:p>
             <a:pPr lvl="1">
               <a:lnSpc>
-                <a:spcPct val="90000"/>
-              </a:lnSpc>
-              <a:spcAft>
-                <a:spcPts val="300"/>
+                <a:spcPct val="85000"/>
+              </a:lnSpc>
+              <a:spcBef>
+                <a:spcPts val="200"/>
+              </a:spcBef>
+              <a:spcAft>
+                <a:spcPts val="200"/>
               </a:spcAft>
               <a:defRPr sz="1700"/>
             </a:pPr>
@@ -8278,10 +8811,13 @@
           <a:p>
             <a:pPr lvl="1">
               <a:lnSpc>
-                <a:spcPct val="90000"/>
-              </a:lnSpc>
-              <a:spcAft>
-                <a:spcPts val="300"/>
+                <a:spcPct val="85000"/>
+              </a:lnSpc>
+              <a:spcBef>
+                <a:spcPts val="200"/>
+              </a:spcBef>
+              <a:spcAft>
+                <a:spcPts val="200"/>
               </a:spcAft>
               <a:defRPr sz="1700"/>
             </a:pPr>
@@ -8304,10 +8840,13 @@
           <a:p>
             <a:pPr>
               <a:lnSpc>
-                <a:spcPct val="90000"/>
-              </a:lnSpc>
-              <a:spcAft>
-                <a:spcPts val="300"/>
+                <a:spcPct val="85000"/>
+              </a:lnSpc>
+              <a:spcBef>
+                <a:spcPts val="200"/>
+              </a:spcBef>
+              <a:spcAft>
+                <a:spcPts val="200"/>
               </a:spcAft>
               <a:defRPr sz="1900"/>
             </a:pPr>
@@ -8319,10 +8858,13 @@
           <a:p>
             <a:pPr lvl="1">
               <a:lnSpc>
-                <a:spcPct val="90000"/>
-              </a:lnSpc>
-              <a:spcAft>
-                <a:spcPts val="300"/>
+                <a:spcPct val="85000"/>
+              </a:lnSpc>
+              <a:spcBef>
+                <a:spcPts val="200"/>
+              </a:spcBef>
+              <a:spcAft>
+                <a:spcPts val="200"/>
               </a:spcAft>
               <a:defRPr sz="1700"/>
             </a:pPr>
@@ -8334,10 +8876,13 @@
           <a:p>
             <a:pPr lvl="1">
               <a:lnSpc>
-                <a:spcPct val="90000"/>
-              </a:lnSpc>
-              <a:spcAft>
-                <a:spcPts val="300"/>
+                <a:spcPct val="85000"/>
+              </a:lnSpc>
+              <a:spcBef>
+                <a:spcPts val="200"/>
+              </a:spcBef>
+              <a:spcAft>
+                <a:spcPts val="200"/>
               </a:spcAft>
               <a:defRPr sz="1700"/>
             </a:pPr>
@@ -8360,10 +8905,13 @@
           <a:p>
             <a:pPr>
               <a:lnSpc>
-                <a:spcPct val="90000"/>
-              </a:lnSpc>
-              <a:spcAft>
-                <a:spcPts val="300"/>
+                <a:spcPct val="85000"/>
+              </a:lnSpc>
+              <a:spcBef>
+                <a:spcPts val="200"/>
+              </a:spcBef>
+              <a:spcAft>
+                <a:spcPts val="200"/>
               </a:spcAft>
               <a:defRPr sz="1900"/>
             </a:pPr>
@@ -8375,10 +8923,13 @@
           <a:p>
             <a:pPr lvl="1">
               <a:lnSpc>
-                <a:spcPct val="90000"/>
-              </a:lnSpc>
-              <a:spcAft>
-                <a:spcPts val="300"/>
+                <a:spcPct val="85000"/>
+              </a:lnSpc>
+              <a:spcBef>
+                <a:spcPts val="200"/>
+              </a:spcBef>
+              <a:spcAft>
+                <a:spcPts val="200"/>
               </a:spcAft>
               <a:defRPr sz="1700"/>
             </a:pPr>
@@ -8390,10 +8941,13 @@
           <a:p>
             <a:pPr lvl="1">
               <a:lnSpc>
-                <a:spcPct val="90000"/>
-              </a:lnSpc>
-              <a:spcAft>
-                <a:spcPts val="300"/>
+                <a:spcPct val="85000"/>
+              </a:lnSpc>
+              <a:spcBef>
+                <a:spcPts val="200"/>
+              </a:spcBef>
+              <a:spcAft>
+                <a:spcPts val="200"/>
               </a:spcAft>
               <a:defRPr sz="1700"/>
             </a:pPr>
@@ -8416,10 +8970,13 @@
           <a:p>
             <a:pPr>
               <a:lnSpc>
-                <a:spcPct val="90000"/>
-              </a:lnSpc>
-              <a:spcAft>
-                <a:spcPts val="300"/>
+                <a:spcPct val="85000"/>
+              </a:lnSpc>
+              <a:spcBef>
+                <a:spcPts val="200"/>
+              </a:spcBef>
+              <a:spcAft>
+                <a:spcPts val="200"/>
               </a:spcAft>
               <a:defRPr sz="1900"/>
             </a:pPr>
@@ -8460,10 +9017,19 @@
         </p:nvSpPr>
         <p:spPr/>
         <p:txBody>
-          <a:bodyPr wrap="square"/>
+          <a:bodyPr wrap="square" tIns="25400" bIns="25400" lIns="63500" rIns="63500"/>
           <a:lstStyle/>
           <a:p>
             <a:pPr>
+              <a:lnSpc>
+                <a:spcPct val="85000"/>
+              </a:lnSpc>
+              <a:spcBef>
+                <a:spcPts val="200"/>
+              </a:spcBef>
+              <a:spcAft>
+                <a:spcPts val="200"/>
+              </a:spcAft>
               <a:defRPr sz="3800" b="1">
                 <a:solidFill>
                   <a:srgbClr val="764BA2"/>
@@ -8471,6 +9037,7 @@
               </a:defRPr>
             </a:pPr>
             <a:r>
+              <a:rPr/>
               <a:t>📚 Google Docs</a:t>
             </a:r>
           </a:p>
@@ -8510,7 +9077,7 @@
           <a:noFill/>
         </p:spPr>
         <p:txBody>
-          <a:bodyPr wrap="square">
+          <a:bodyPr wrap="square" tIns="25400" bIns="25400" lIns="63500" rIns="63500">
             <a:spAutoFit/>
           </a:bodyPr>
           <a:lstStyle/>
@@ -8527,10 +9094,13 @@
           <a:p>
             <a:pPr>
               <a:lnSpc>
-                <a:spcPct val="90000"/>
-              </a:lnSpc>
-              <a:spcAft>
-                <a:spcPts val="300"/>
+                <a:spcPct val="85000"/>
+              </a:lnSpc>
+              <a:spcBef>
+                <a:spcPts val="200"/>
+              </a:spcBef>
+              <a:spcAft>
+                <a:spcPts val="200"/>
               </a:spcAft>
               <a:defRPr sz="1900"/>
             </a:pPr>
@@ -8553,10 +9123,13 @@
           <a:p>
             <a:pPr>
               <a:lnSpc>
-                <a:spcPct val="90000"/>
-              </a:lnSpc>
-              <a:spcAft>
-                <a:spcPts val="300"/>
+                <a:spcPct val="85000"/>
+              </a:lnSpc>
+              <a:spcBef>
+                <a:spcPts val="200"/>
+              </a:spcBef>
+              <a:spcAft>
+                <a:spcPts val="200"/>
               </a:spcAft>
               <a:defRPr sz="1900"/>
             </a:pPr>
@@ -8568,10 +9141,13 @@
           <a:p>
             <a:pPr lvl="1">
               <a:lnSpc>
-                <a:spcPct val="90000"/>
-              </a:lnSpc>
-              <a:spcAft>
-                <a:spcPts val="300"/>
+                <a:spcPct val="85000"/>
+              </a:lnSpc>
+              <a:spcBef>
+                <a:spcPts val="200"/>
+              </a:spcBef>
+              <a:spcAft>
+                <a:spcPts val="200"/>
               </a:spcAft>
               <a:defRPr sz="1700"/>
             </a:pPr>
@@ -8583,10 +9159,13 @@
           <a:p>
             <a:pPr lvl="1">
               <a:lnSpc>
-                <a:spcPct val="90000"/>
-              </a:lnSpc>
-              <a:spcAft>
-                <a:spcPts val="300"/>
+                <a:spcPct val="85000"/>
+              </a:lnSpc>
+              <a:spcBef>
+                <a:spcPts val="200"/>
+              </a:spcBef>
+              <a:spcAft>
+                <a:spcPts val="200"/>
               </a:spcAft>
               <a:defRPr sz="1700"/>
             </a:pPr>
@@ -8598,10 +9177,13 @@
           <a:p>
             <a:pPr lvl="1">
               <a:lnSpc>
-                <a:spcPct val="90000"/>
-              </a:lnSpc>
-              <a:spcAft>
-                <a:spcPts val="300"/>
+                <a:spcPct val="85000"/>
+              </a:lnSpc>
+              <a:spcBef>
+                <a:spcPts val="200"/>
+              </a:spcBef>
+              <a:spcAft>
+                <a:spcPts val="200"/>
               </a:spcAft>
               <a:defRPr sz="1700"/>
             </a:pPr>
@@ -8613,10 +9195,13 @@
           <a:p>
             <a:pPr lvl="1">
               <a:lnSpc>
-                <a:spcPct val="90000"/>
-              </a:lnSpc>
-              <a:spcAft>
-                <a:spcPts val="300"/>
+                <a:spcPct val="85000"/>
+              </a:lnSpc>
+              <a:spcBef>
+                <a:spcPts val="200"/>
+              </a:spcBef>
+              <a:spcAft>
+                <a:spcPts val="200"/>
               </a:spcAft>
               <a:defRPr sz="1700"/>
             </a:pPr>
@@ -8628,10 +9213,13 @@
           <a:p>
             <a:pPr lvl="1">
               <a:lnSpc>
-                <a:spcPct val="90000"/>
-              </a:lnSpc>
-              <a:spcAft>
-                <a:spcPts val="300"/>
+                <a:spcPct val="85000"/>
+              </a:lnSpc>
+              <a:spcBef>
+                <a:spcPts val="200"/>
+              </a:spcBef>
+              <a:spcAft>
+                <a:spcPts val="200"/>
               </a:spcAft>
               <a:defRPr sz="1700"/>
             </a:pPr>
@@ -8654,10 +9242,13 @@
           <a:p>
             <a:pPr>
               <a:lnSpc>
-                <a:spcPct val="90000"/>
-              </a:lnSpc>
-              <a:spcAft>
-                <a:spcPts val="300"/>
+                <a:spcPct val="85000"/>
+              </a:lnSpc>
+              <a:spcBef>
+                <a:spcPts val="200"/>
+              </a:spcBef>
+              <a:spcAft>
+                <a:spcPts val="200"/>
               </a:spcAft>
               <a:defRPr sz="1900"/>
             </a:pPr>
@@ -8669,10 +9260,13 @@
           <a:p>
             <a:pPr lvl="1">
               <a:lnSpc>
-                <a:spcPct val="90000"/>
-              </a:lnSpc>
-              <a:spcAft>
-                <a:spcPts val="300"/>
+                <a:spcPct val="85000"/>
+              </a:lnSpc>
+              <a:spcBef>
+                <a:spcPts val="200"/>
+              </a:spcBef>
+              <a:spcAft>
+                <a:spcPts val="200"/>
               </a:spcAft>
               <a:defRPr sz="1700"/>
             </a:pPr>
@@ -8684,10 +9278,13 @@
           <a:p>
             <a:pPr lvl="1">
               <a:lnSpc>
-                <a:spcPct val="90000"/>
-              </a:lnSpc>
-              <a:spcAft>
-                <a:spcPts val="300"/>
+                <a:spcPct val="85000"/>
+              </a:lnSpc>
+              <a:spcBef>
+                <a:spcPts val="200"/>
+              </a:spcBef>
+              <a:spcAft>
+                <a:spcPts val="200"/>
               </a:spcAft>
               <a:defRPr sz="1700"/>
             </a:pPr>
@@ -8699,10 +9296,13 @@
           <a:p>
             <a:pPr lvl="1">
               <a:lnSpc>
-                <a:spcPct val="90000"/>
-              </a:lnSpc>
-              <a:spcAft>
-                <a:spcPts val="300"/>
+                <a:spcPct val="85000"/>
+              </a:lnSpc>
+              <a:spcBef>
+                <a:spcPts val="200"/>
+              </a:spcBef>
+              <a:spcAft>
+                <a:spcPts val="200"/>
               </a:spcAft>
               <a:defRPr sz="1700"/>
             </a:pPr>
@@ -8725,10 +9325,13 @@
           <a:p>
             <a:pPr>
               <a:lnSpc>
-                <a:spcPct val="90000"/>
-              </a:lnSpc>
-              <a:spcAft>
-                <a:spcPts val="300"/>
+                <a:spcPct val="85000"/>
+              </a:lnSpc>
+              <a:spcBef>
+                <a:spcPts val="200"/>
+              </a:spcBef>
+              <a:spcAft>
+                <a:spcPts val="200"/>
               </a:spcAft>
               <a:defRPr sz="1900"/>
             </a:pPr>
@@ -8740,10 +9343,13 @@
           <a:p>
             <a:pPr lvl="1">
               <a:lnSpc>
-                <a:spcPct val="90000"/>
-              </a:lnSpc>
-              <a:spcAft>
-                <a:spcPts val="300"/>
+                <a:spcPct val="85000"/>
+              </a:lnSpc>
+              <a:spcBef>
+                <a:spcPts val="200"/>
+              </a:spcBef>
+              <a:spcAft>
+                <a:spcPts val="200"/>
               </a:spcAft>
               <a:defRPr sz="1700"/>
             </a:pPr>
@@ -8755,10 +9361,13 @@
           <a:p>
             <a:pPr lvl="1">
               <a:lnSpc>
-                <a:spcPct val="90000"/>
-              </a:lnSpc>
-              <a:spcAft>
-                <a:spcPts val="300"/>
+                <a:spcPct val="85000"/>
+              </a:lnSpc>
+              <a:spcBef>
+                <a:spcPts val="200"/>
+              </a:spcBef>
+              <a:spcAft>
+                <a:spcPts val="200"/>
               </a:spcAft>
               <a:defRPr sz="1700"/>
             </a:pPr>
@@ -8770,10 +9379,13 @@
           <a:p>
             <a:pPr lvl="1">
               <a:lnSpc>
-                <a:spcPct val="90000"/>
-              </a:lnSpc>
-              <a:spcAft>
-                <a:spcPts val="300"/>
+                <a:spcPct val="85000"/>
+              </a:lnSpc>
+              <a:spcBef>
+                <a:spcPts val="200"/>
+              </a:spcBef>
+              <a:spcAft>
+                <a:spcPts val="200"/>
               </a:spcAft>
               <a:defRPr sz="1700"/>
             </a:pPr>
@@ -8785,10 +9397,13 @@
           <a:p>
             <a:pPr lvl="1">
               <a:lnSpc>
-                <a:spcPct val="90000"/>
-              </a:lnSpc>
-              <a:spcAft>
-                <a:spcPts val="300"/>
+                <a:spcPct val="85000"/>
+              </a:lnSpc>
+              <a:spcBef>
+                <a:spcPts val="200"/>
+              </a:spcBef>
+              <a:spcAft>
+                <a:spcPts val="200"/>
               </a:spcAft>
               <a:defRPr sz="1700"/>
             </a:pPr>
@@ -8811,10 +9426,13 @@
           <a:p>
             <a:pPr>
               <a:lnSpc>
-                <a:spcPct val="90000"/>
-              </a:lnSpc>
-              <a:spcAft>
-                <a:spcPts val="300"/>
+                <a:spcPct val="85000"/>
+              </a:lnSpc>
+              <a:spcBef>
+                <a:spcPts val="200"/>
+              </a:spcBef>
+              <a:spcAft>
+                <a:spcPts val="200"/>
               </a:spcAft>
               <a:defRPr sz="1900"/>
             </a:pPr>
@@ -8826,10 +9444,13 @@
           <a:p>
             <a:pPr>
               <a:lnSpc>
-                <a:spcPct val="90000"/>
-              </a:lnSpc>
-              <a:spcAft>
-                <a:spcPts val="300"/>
+                <a:spcPct val="85000"/>
+              </a:lnSpc>
+              <a:spcBef>
+                <a:spcPts val="200"/>
+              </a:spcBef>
+              <a:spcAft>
+                <a:spcPts val="200"/>
               </a:spcAft>
               <a:defRPr sz="1900"/>
             </a:pPr>
